--- a/docs/week-12/cen429-week-12-sunum.tr.pptx
+++ b/docs/week-12/cen429-week-12-sunum.tr.pptx
@@ -33644,40 +33644,30 @@
           </a:p>
         </p:txBody>
       </p:sp>
-      <p:sp>
-        <p:nvSpPr>
-          <p:cNvPr id="7" name="TextBox 6"/>
-          <p:cNvSpPr txBox="1"/>
-          <p:nvPr/>
-        </p:nvSpPr>
-        <p:spPr>
-          <a:xfrm>
-            <a:off x="640080" y="1325880"/>
-            <a:ext cx="10911535" cy="4732528"/>
-          </a:xfrm>
-          <a:prstGeom prst="rect">
-            <a:avLst/>
-          </a:prstGeom>
-          <a:noFill/>
-        </p:spPr>
-        <p:txBody>
-          <a:bodyPr wrap="square" lIns="45720" rIns="45720">
-            <a:spAutoFit/>
-          </a:bodyPr>
-          <a:lstStyle/>
-          <a:p>
-            <a:pPr algn="l"/>
-            <a:r>
-              <a:rPr sz="1400" b="0">
-                <a:solidFill>
-                  <a:srgbClr val="1F2D3A"/>
-                </a:solidFill>
-              </a:rPr>
-              <a:t>&lt;svg viewBox="0 0 940 300" style="width:95%;height:auto;display:block;margin:2px auto" font-family="sans-serif"&gt; &lt;text x="470" y="24" text-anchor="middle" font-size="16" fill="#005f66" font-weight="bold"&gt;Beş faktörün toplamı → puan → derece&lt;/text&gt; &lt;g font-size="15" fill="#333"&gt; &lt;text x="30" y="66"&gt;Geçen zaman&lt;/text&gt;&lt;rect x="200" y="52" width="150" height="18" rx="4" fill="#0a9396"/&gt; &lt;text x="30" y="98"&gt;Uzmanlık&lt;/text&gt;&lt;rect x="200" y="84" width="200" height="18" rx="4" fill="#0a9396"/&gt; &lt;text x="30" y="130"&gt;Hedef bilgisi&lt;/text&gt;&lt;rect x="200" y="116" width="110" height="18" rx="4" fill="#0a9396"/&gt; &lt;text x="30" y="162"&gt;Fırsat (erişim)&lt;/text&gt;&lt;rect x="200" y="148" width="170" height="18" rx="4" fill="#0a9396"/&gt; &lt;text x="30" y="194"&gt;Ekipman&lt;/text&gt;&lt;rect x="200" y="180" width="130" height="18" rx="4" fill="#0a9396"/&gt; &lt;/g&gt; &lt;line x1="470" y1="45" x2="470" y2="205" stroke="#bbb" stroke-dasharray="4,4"/&gt; &lt;rect x="560" y="100" width="120" height="60" rx="8" fill="#006d77"/&gt;&lt;text x="620" y="128" text-anchor="middle" font-size="15" fill="#fff"&gt;TOPLAM&lt;/text&gt;&lt;text x="620" y="150" text-anchor="middle" font-size="14" fill="#cdeff1"&gt;puan&lt;/text&gt; &lt;line x1="680" y1="130" x2="720" y2="130" stroke="#333" stroke-width="3" marker-end="url(#a12)"/&gt; &lt;g font-size="13"&gt; &lt;rect x="720" y="70" width="200" height="26" fill="#2e7d32"/&gt;&lt;text x="820" y="88" text-anchor="middle" fill="#fff"&gt;DÜŞÜK pot. = ciddi bulgu&lt;/text&gt; &lt;rect x="720" y="100" width="200" height="26" fill="#8bc34a"/&gt;&lt;text x="820" y="118" text-anchor="middle" fill="#123"&gt;Temel / Gelişmiş&lt;/text&gt; &lt;rect x="720" y="130" width="200" height="26" fill="#ffb300"/&gt;&lt;text x="820" y="148" text-anchor="middle" fill="#123"&gt;Orta / Yüksek&lt;/text&gt; &lt;rect x="720" y="160" width="200" height="26" fill="#c0392b"/&gt;&lt;text x="820" y="178" text-anchor="middle" fill="#fff"&gt;YÜKSEK pot. = zor saldırı&lt;/text&gt; &lt;/g&gt; &lt;text x="470" y="250" text-anchor="middle" font-size="14.5" fill="#555"&gt;Düşük potansiyel = az zaman/beceri/araç → çok saldırgan yapabilir → yüksek risk.&lt;/text&gt; &lt;text x="470" y="276" text-anchor="middle" font-size="14" fill="#777"&gt;Saldırı potansiyeli = saldırının ZORLUĞU · CVSS = açığın ETKİSİ (ayrı eksenler).&lt;/text&gt; &lt;defs&gt;&lt;marker id="a12" markerWidth="9" markerHeight="9" refX="7" refY="3" orient="auto"&gt;&lt;path d="M0,0 L7,3 L0,6 Z" fill="#333"/&gt;&lt;/marker&gt;&lt;/defs&gt; &lt;/svg&gt;</a:t>
-            </a:r>
-          </a:p>
-        </p:txBody>
-      </p:sp>
+      <p:pic>
+        <p:nvPicPr>
+          <p:cNvPr id="7" name="Picture 6" descr="h12-03-saldiri-potansiyeli.png"/>
+          <p:cNvPicPr>
+            <a:picLocks noChangeAspect="1"/>
+          </p:cNvPicPr>
+          <p:nvPr/>
+        </p:nvPicPr>
+        <p:blipFill>
+          <a:blip r:embed="rId3"/>
+          <a:stretch>
+            <a:fillRect/>
+          </a:stretch>
+        </p:blipFill>
+        <p:spPr>
+          <a:xfrm>
+            <a:off x="1833529" y="1325880"/>
+            <a:ext cx="8524636" cy="3950214"/>
+          </a:xfrm>
+          <a:prstGeom prst="rect">
+            <a:avLst/>
+          </a:prstGeom>
+        </p:spPr>
+      </p:pic>
     </p:spTree>
   </p:cSld>
   <p:clrMapOvr>

--- a/docs/week-12/cen429-week-12-sunum.tr.pptx
+++ b/docs/week-12/cen429-week-12-sunum.tr.pptx
@@ -200,6 +200,7 @@
     <p:sldId id="448" r:id="rId200"/>
     <p:sldId id="449" r:id="rId201"/>
     <p:sldId id="450" r:id="rId202"/>
+    <p:sldId id="451" r:id="rId203"/>
   </p:sldIdLst>
   <p:sldSz cx="12191695" cy="6858000" type="screen4x3"/>
   <p:notesSz cx="6858000" cy="9144000"/>
@@ -18103,95 +18104,35 @@
                   <a:srgbClr val="006D77"/>
                 </a:solidFill>
               </a:rPr>
-              <a:t>İyi rapor = karar verilebilir belge</a:t>
-            </a:r>
-          </a:p>
-        </p:txBody>
-      </p:sp>
-      <p:sp>
-        <p:nvSpPr>
-          <p:cNvPr id="7" name="TextBox 6"/>
-          <p:cNvSpPr txBox="1"/>
-          <p:nvPr/>
-        </p:nvSpPr>
-        <p:spPr>
-          <a:xfrm>
-            <a:off x="640080" y="1325880"/>
-            <a:ext cx="10911535" cy="439928"/>
-          </a:xfrm>
-          <a:prstGeom prst="rect">
-            <a:avLst/>
-          </a:prstGeom>
-          <a:noFill/>
-        </p:spPr>
-        <p:txBody>
-          <a:bodyPr wrap="square" lIns="45720" rIns="45720">
-            <a:spAutoFit/>
-          </a:bodyPr>
-          <a:lstStyle/>
-          <a:p>
-            <a:pPr algn="l"/>
-            <a:r>
-              <a:rPr sz="2000" b="0">
-                <a:solidFill>
-                  <a:srgbClr val="1F2D3A"/>
-                </a:solidFill>
-              </a:rPr>
-              <a:t>Bir "kaldınız" listesi değil.</a:t>
-            </a:r>
-          </a:p>
-        </p:txBody>
-      </p:sp>
-      <p:sp>
-        <p:nvSpPr>
-          <p:cNvPr id="8" name="TextBox 7"/>
-          <p:cNvSpPr txBox="1"/>
-          <p:nvPr/>
-        </p:nvSpPr>
-        <p:spPr>
-          <a:xfrm>
-            <a:off x="640080" y="1875536"/>
-            <a:ext cx="10911535" cy="439928"/>
-          </a:xfrm>
-          <a:prstGeom prst="rect">
-            <a:avLst/>
-          </a:prstGeom>
-          <a:noFill/>
-        </p:spPr>
-        <p:txBody>
-          <a:bodyPr wrap="square" lIns="45720" rIns="45720">
-            <a:spAutoFit/>
-          </a:bodyPr>
-          <a:lstStyle/>
-          <a:p>
-            <a:pPr algn="l"/>
-            <a:r>
-              <a:rPr sz="2000" b="0">
-                <a:solidFill>
-                  <a:srgbClr val="1F2D3A"/>
-                </a:solidFill>
-              </a:rPr>
-              <a:t>Okuyan kişi </a:t>
-            </a:r>
-            <a:r>
-              <a:rPr sz="2000" b="1">
-                <a:solidFill>
-                  <a:srgbClr val="1F2D3A"/>
-                </a:solidFill>
-              </a:rPr>
-              <a:t>ne yapacağına</a:t>
-            </a:r>
-            <a:r>
-              <a:rPr sz="2000" b="0">
-                <a:solidFill>
-                  <a:srgbClr val="1F2D3A"/>
-                </a:solidFill>
-              </a:rPr>
-              <a:t> karar verebilmeli.</a:t>
-            </a:r>
-          </a:p>
-        </p:txBody>
-      </p:sp>
+              <a:t>Raporun dört bölümü — şema</a:t>
+            </a:r>
+          </a:p>
+        </p:txBody>
+      </p:sp>
+      <p:pic>
+        <p:nvPicPr>
+          <p:cNvPr id="7" name="Picture 6" descr="h12-12-raporlama.png"/>
+          <p:cNvPicPr>
+            <a:picLocks noChangeAspect="1"/>
+          </p:cNvPicPr>
+          <p:nvPr/>
+        </p:nvPicPr>
+        <p:blipFill>
+          <a:blip r:embed="rId3"/>
+          <a:stretch>
+            <a:fillRect/>
+          </a:stretch>
+        </p:blipFill>
+        <p:spPr>
+          <a:xfrm>
+            <a:off x="2259761" y="1325880"/>
+            <a:ext cx="7672173" cy="3429419"/>
+          </a:xfrm>
+          <a:prstGeom prst="rect">
+            <a:avLst/>
+          </a:prstGeom>
+        </p:spPr>
+      </p:pic>
     </p:spTree>
   </p:cSld>
   <p:clrMapOvr>
@@ -18362,7 +18303,7 @@
                   <a:srgbClr val="006D77"/>
                 </a:solidFill>
               </a:rPr>
-              <a:t>Rapor bölümleri (1)</a:t>
+              <a:t>İyi rapor = karar verilebilir belge</a:t>
             </a:r>
           </a:p>
         </p:txBody>
@@ -18376,78 +18317,77 @@
         <p:spPr>
           <a:xfrm>
             <a:off x="640080" y="1325880"/>
-            <a:ext cx="10911535" cy="843280"/>
-          </a:xfrm>
-          <a:prstGeom prst="rect">
-            <a:avLst/>
-          </a:prstGeom>
-          <a:noFill/>
-        </p:spPr>
-        <p:txBody>
-          <a:bodyPr wrap="square" lIns="45720" rIns="45720">
-            <a:spAutoFit/>
-          </a:bodyPr>
-          <a:lstStyle/>
-          <a:p>
-            <a:pPr>
-              <a:spcAft>
-                <a:spcPts val="300"/>
-              </a:spcAft>
-            </a:pPr>
-            <a:r>
-              <a:rPr sz="2000" b="1">
-                <a:solidFill>
-                  <a:srgbClr val="006D77"/>
-                </a:solidFill>
-              </a:rPr>
-              <a:t>• </a:t>
-            </a:r>
-            <a:r>
-              <a:rPr sz="2000" b="1">
-                <a:solidFill>
-                  <a:srgbClr val="1F2D3A"/>
-                </a:solidFill>
-              </a:rPr>
-              <a:t>Yönetici özeti:</a:t>
-            </a:r>
-            <a:r>
-              <a:rPr sz="2000" b="0">
-                <a:solidFill>
-                  <a:srgbClr val="1F2D3A"/>
-                </a:solidFill>
-              </a:rPr>
-              <a:t> teknik olmayan okur için genel durum + en kritik üç bulgu.</a:t>
-            </a:r>
-          </a:p>
-          <a:p>
-            <a:pPr>
-              <a:spcAft>
-                <a:spcPts val="300"/>
-              </a:spcAft>
-            </a:pPr>
-            <a:r>
-              <a:rPr sz="2000" b="1">
-                <a:solidFill>
-                  <a:srgbClr val="006D77"/>
-                </a:solidFill>
-              </a:rPr>
-              <a:t>• </a:t>
-            </a:r>
-            <a:r>
-              <a:rPr sz="2000" b="1">
-                <a:solidFill>
-                  <a:srgbClr val="1F2D3A"/>
-                </a:solidFill>
-              </a:rPr>
-              <a:t>Yöntem ve kapsam:</a:t>
-            </a:r>
-            <a:r>
-              <a:rPr sz="2000" b="0">
-                <a:solidFill>
-                  <a:srgbClr val="1F2D3A"/>
-                </a:solidFill>
-              </a:rPr>
-              <a:t> ne test edildi, ne edilmedi, hangi metodolojiyle.</a:t>
+            <a:ext cx="10911535" cy="439928"/>
+          </a:xfrm>
+          <a:prstGeom prst="rect">
+            <a:avLst/>
+          </a:prstGeom>
+          <a:noFill/>
+        </p:spPr>
+        <p:txBody>
+          <a:bodyPr wrap="square" lIns="45720" rIns="45720">
+            <a:spAutoFit/>
+          </a:bodyPr>
+          <a:lstStyle/>
+          <a:p>
+            <a:pPr algn="l"/>
+            <a:r>
+              <a:rPr sz="2000" b="0">
+                <a:solidFill>
+                  <a:srgbClr val="1F2D3A"/>
+                </a:solidFill>
+              </a:rPr>
+              <a:t>Bir "kaldınız" listesi değil.</a:t>
+            </a:r>
+          </a:p>
+        </p:txBody>
+      </p:sp>
+      <p:sp>
+        <p:nvSpPr>
+          <p:cNvPr id="8" name="TextBox 7"/>
+          <p:cNvSpPr txBox="1"/>
+          <p:nvPr/>
+        </p:nvSpPr>
+        <p:spPr>
+          <a:xfrm>
+            <a:off x="640080" y="1875536"/>
+            <a:ext cx="10911535" cy="439928"/>
+          </a:xfrm>
+          <a:prstGeom prst="rect">
+            <a:avLst/>
+          </a:prstGeom>
+          <a:noFill/>
+        </p:spPr>
+        <p:txBody>
+          <a:bodyPr wrap="square" lIns="45720" rIns="45720">
+            <a:spAutoFit/>
+          </a:bodyPr>
+          <a:lstStyle/>
+          <a:p>
+            <a:pPr algn="l"/>
+            <a:r>
+              <a:rPr sz="2000" b="0">
+                <a:solidFill>
+                  <a:srgbClr val="1F2D3A"/>
+                </a:solidFill>
+              </a:rPr>
+              <a:t>Okuyan kişi </a:t>
+            </a:r>
+            <a:r>
+              <a:rPr sz="2000" b="1">
+                <a:solidFill>
+                  <a:srgbClr val="1F2D3A"/>
+                </a:solidFill>
+              </a:rPr>
+              <a:t>ne yapacağına</a:t>
+            </a:r>
+            <a:r>
+              <a:rPr sz="2000" b="0">
+                <a:solidFill>
+                  <a:srgbClr val="1F2D3A"/>
+                </a:solidFill>
+              </a:rPr>
+              <a:t> karar verebilmeli.</a:t>
             </a:r>
           </a:p>
         </p:txBody>
@@ -18622,7 +18562,7 @@
                   <a:srgbClr val="006D77"/>
                 </a:solidFill>
               </a:rPr>
-              <a:t>Rapor bölümleri (2)</a:t>
+              <a:t>Rapor bölümleri (1)</a:t>
             </a:r>
           </a:p>
         </p:txBody>
@@ -18636,7 +18576,7 @@
         <p:spPr>
           <a:xfrm>
             <a:off x="640080" y="1325880"/>
-            <a:ext cx="10911535" cy="1219200"/>
+            <a:ext cx="10911535" cy="843280"/>
           </a:xfrm>
           <a:prstGeom prst="rect">
             <a:avLst/>
@@ -18668,15 +18608,15 @@
                   <a:srgbClr val="1F2D3A"/>
                 </a:solidFill>
               </a:rPr>
-              <a:t>Bulgular:</a:t>
-            </a:r>
-            <a:r>
-              <a:rPr sz="2000" b="0">
-                <a:solidFill>
-                  <a:srgbClr val="1F2D3A"/>
-                </a:solidFill>
-              </a:rPr>
-              <a:t> her biri kanıt + saldırı potansiyeli + CVSS + öneri.</a:t>
+              <a:t>Yönetici özeti:</a:t>
+            </a:r>
+            <a:r>
+              <a:rPr sz="2000" b="0">
+                <a:solidFill>
+                  <a:srgbClr val="1F2D3A"/>
+                </a:solidFill>
+              </a:rPr>
+              <a:t> teknik olmayan okur için genel durum + en kritik üç bulgu.</a:t>
             </a:r>
           </a:p>
           <a:p>
@@ -18699,46 +18639,15 @@
                   <a:srgbClr val="1F2D3A"/>
                 </a:solidFill>
               </a:rPr>
-              <a:t>Bulgu–aksiyon tablosu:</a:t>
-            </a:r>
-            <a:r>
-              <a:rPr sz="2000" b="0">
-                <a:solidFill>
-                  <a:srgbClr val="1F2D3A"/>
-                </a:solidFill>
-              </a:rPr>
-              <a:t> geliştirici yanıtı, kapanış.</a:t>
-            </a:r>
-          </a:p>
-          <a:p>
-            <a:pPr>
-              <a:spcAft>
-                <a:spcPts val="300"/>
-              </a:spcAft>
-            </a:pPr>
-            <a:r>
-              <a:rPr sz="2000" b="1">
-                <a:solidFill>
-                  <a:srgbClr val="006D77"/>
-                </a:solidFill>
-              </a:rPr>
-              <a:t>• </a:t>
-            </a:r>
-            <a:r>
-              <a:rPr sz="2000" b="1">
-                <a:solidFill>
-                  <a:srgbClr val="1F2D3A"/>
-                </a:solidFill>
-              </a:rPr>
-              <a:t>Kalan risk:</a:t>
-            </a:r>
-            <a:r>
-              <a:rPr sz="2000" b="0">
-                <a:solidFill>
-                  <a:srgbClr val="1F2D3A"/>
-                </a:solidFill>
-              </a:rPr>
-              <a:t> kapatılmayan/devredilen, gerekçesiyle.</a:t>
+              <a:t>Yöntem ve kapsam:</a:t>
+            </a:r>
+            <a:r>
+              <a:rPr sz="2000" b="0">
+                <a:solidFill>
+                  <a:srgbClr val="1F2D3A"/>
+                </a:solidFill>
+              </a:rPr>
+              <a:t> ne test edildi, ne edilmedi, hangi metodolojiyle.</a:t>
             </a:r>
           </a:p>
         </p:txBody>
@@ -18913,7 +18822,7 @@
                   <a:srgbClr val="006D77"/>
                 </a:solidFill>
               </a:rPr>
-              <a:t>Eleştirel okuma alıştırması</a:t>
+              <a:t>Rapor bölümleri (2)</a:t>
             </a:r>
           </a:p>
         </p:txBody>
@@ -18927,40 +18836,6 @@
         <p:spPr>
           <a:xfrm>
             <a:off x="640080" y="1325880"/>
-            <a:ext cx="10911535" cy="439928"/>
-          </a:xfrm>
-          <a:prstGeom prst="rect">
-            <a:avLst/>
-          </a:prstGeom>
-          <a:noFill/>
-        </p:spPr>
-        <p:txBody>
-          <a:bodyPr wrap="square" lIns="45720" rIns="45720">
-            <a:spAutoFit/>
-          </a:bodyPr>
-          <a:lstStyle/>
-          <a:p>
-            <a:pPr algn="l"/>
-            <a:r>
-              <a:rPr sz="2000" b="0">
-                <a:solidFill>
-                  <a:srgbClr val="1F2D3A"/>
-                </a:solidFill>
-              </a:rPr>
-              <a:t>Kısa bir bulgu metnini birlikte okuyun:</a:t>
-            </a:r>
-          </a:p>
-        </p:txBody>
-      </p:sp>
-      <p:sp>
-        <p:nvSpPr>
-          <p:cNvPr id="8" name="TextBox 7"/>
-          <p:cNvSpPr txBox="1"/>
-          <p:nvPr/>
-        </p:nvSpPr>
-        <p:spPr>
-          <a:xfrm>
-            <a:off x="640080" y="1875536"/>
             <a:ext cx="10911535" cy="1219200"/>
           </a:xfrm>
           <a:prstGeom prst="rect">
@@ -18988,12 +18863,20 @@
               <a:t>• </a:t>
             </a:r>
             <a:r>
-              <a:rPr sz="2000" b="0">
-                <a:solidFill>
-                  <a:srgbClr val="1F2D3A"/>
-                </a:solidFill>
-              </a:rPr>
-              <a:t>Saldırı potansiyeli doğru mu derecelendirilmiş?</a:t>
+              <a:rPr sz="2000" b="1">
+                <a:solidFill>
+                  <a:srgbClr val="1F2D3A"/>
+                </a:solidFill>
+              </a:rPr>
+              <a:t>Bulgular:</a:t>
+            </a:r>
+            <a:r>
+              <a:rPr sz="2000" b="0">
+                <a:solidFill>
+                  <a:srgbClr val="1F2D3A"/>
+                </a:solidFill>
+              </a:rPr>
+              <a:t> her biri kanıt + saldırı potansiyeli + CVSS + öneri.</a:t>
             </a:r>
           </a:p>
           <a:p>
@@ -19011,12 +18894,20 @@
               <a:t>• </a:t>
             </a:r>
             <a:r>
-              <a:rPr sz="2000" b="0">
-                <a:solidFill>
-                  <a:srgbClr val="1F2D3A"/>
-                </a:solidFill>
-              </a:rPr>
-              <a:t>Öneri uygulanabilir mi?</a:t>
+              <a:rPr sz="2000" b="1">
+                <a:solidFill>
+                  <a:srgbClr val="1F2D3A"/>
+                </a:solidFill>
+              </a:rPr>
+              <a:t>Bulgu–aksiyon tablosu:</a:t>
+            </a:r>
+            <a:r>
+              <a:rPr sz="2000" b="0">
+                <a:solidFill>
+                  <a:srgbClr val="1F2D3A"/>
+                </a:solidFill>
+              </a:rPr>
+              <a:t> geliştirici yanıtı, kapanış.</a:t>
             </a:r>
           </a:p>
           <a:p>
@@ -19034,62 +18925,20 @@
               <a:t>• </a:t>
             </a:r>
             <a:r>
-              <a:rPr sz="2000" b="0">
-                <a:solidFill>
-                  <a:srgbClr val="1F2D3A"/>
-                </a:solidFill>
-              </a:rPr>
-              <a:t>"Karşılandı" satırının </a:t>
-            </a:r>
-            <a:r>
-              <a:rPr sz="2000" b="1">
-                <a:solidFill>
-                  <a:srgbClr val="1F2D3A"/>
-                </a:solidFill>
-              </a:rPr>
-              <a:t>kanıtı</a:t>
-            </a:r>
-            <a:r>
-              <a:rPr sz="2000" b="0">
-                <a:solidFill>
-                  <a:srgbClr val="1F2D3A"/>
-                </a:solidFill>
-              </a:rPr>
-              <a:t> var mı?</a:t>
-            </a:r>
-          </a:p>
-        </p:txBody>
-      </p:sp>
-      <p:sp>
-        <p:nvSpPr>
-          <p:cNvPr id="9" name="TextBox 8"/>
-          <p:cNvSpPr txBox="1"/>
-          <p:nvPr/>
-        </p:nvSpPr>
-        <p:spPr>
-          <a:xfrm>
-            <a:off x="640080" y="3204464"/>
-            <a:ext cx="10911535" cy="439928"/>
-          </a:xfrm>
-          <a:prstGeom prst="rect">
-            <a:avLst/>
-          </a:prstGeom>
-          <a:noFill/>
-        </p:spPr>
-        <p:txBody>
-          <a:bodyPr wrap="square" lIns="45720" rIns="45720">
-            <a:spAutoFit/>
-          </a:bodyPr>
-          <a:lstStyle/>
-          <a:p>
-            <a:pPr algn="l"/>
-            <a:r>
-              <a:rPr sz="2000" b="0">
-                <a:solidFill>
-                  <a:srgbClr val="1F2D3A"/>
-                </a:solidFill>
-              </a:rPr>
-              <a:t>Bu, 13. haftadaki uyum matrisi okumasının provası.</a:t>
+              <a:rPr sz="2000" b="1">
+                <a:solidFill>
+                  <a:srgbClr val="1F2D3A"/>
+                </a:solidFill>
+              </a:rPr>
+              <a:t>Kalan risk:</a:t>
+            </a:r>
+            <a:r>
+              <a:rPr sz="2000" b="0">
+                <a:solidFill>
+                  <a:srgbClr val="1F2D3A"/>
+                </a:solidFill>
+              </a:rPr>
+              <a:t> kapatılmayan/devredilen, gerekçesiyle.</a:t>
             </a:r>
           </a:p>
         </p:txBody>
@@ -19264,7 +19113,7 @@
                   <a:srgbClr val="006D77"/>
                 </a:solidFill>
               </a:rPr>
-              <a:t>Bölüm 5 — kısa sınama</a:t>
+              <a:t>Eleştirel okuma alıştırması</a:t>
             </a:r>
           </a:p>
         </p:txBody>
@@ -19278,6 +19127,40 @@
         <p:spPr>
           <a:xfrm>
             <a:off x="640080" y="1325880"/>
+            <a:ext cx="10911535" cy="439928"/>
+          </a:xfrm>
+          <a:prstGeom prst="rect">
+            <a:avLst/>
+          </a:prstGeom>
+          <a:noFill/>
+        </p:spPr>
+        <p:txBody>
+          <a:bodyPr wrap="square" lIns="45720" rIns="45720">
+            <a:spAutoFit/>
+          </a:bodyPr>
+          <a:lstStyle/>
+          <a:p>
+            <a:pPr algn="l"/>
+            <a:r>
+              <a:rPr sz="2000" b="0">
+                <a:solidFill>
+                  <a:srgbClr val="1F2D3A"/>
+                </a:solidFill>
+              </a:rPr>
+              <a:t>Kısa bir bulgu metnini birlikte okuyun:</a:t>
+            </a:r>
+          </a:p>
+        </p:txBody>
+      </p:sp>
+      <p:sp>
+        <p:nvSpPr>
+          <p:cNvPr id="8" name="TextBox 7"/>
+          <p:cNvSpPr txBox="1"/>
+          <p:nvPr/>
+        </p:nvSpPr>
+        <p:spPr>
+          <a:xfrm>
+            <a:off x="640080" y="1875536"/>
             <a:ext cx="10911535" cy="1219200"/>
           </a:xfrm>
           <a:prstGeom prst="rect">
@@ -19302,15 +19185,15 @@
                   <a:srgbClr val="006D77"/>
                 </a:solidFill>
               </a:rPr>
-              <a:t>1. </a:t>
-            </a:r>
-            <a:r>
-              <a:rPr sz="2000" b="0">
-                <a:solidFill>
-                  <a:srgbClr val="1F2D3A"/>
-                </a:solidFill>
-              </a:rPr>
-              <a:t>Planın dört başlığı?</a:t>
+              <a:t>• </a:t>
+            </a:r>
+            <a:r>
+              <a:rPr sz="2000" b="0">
+                <a:solidFill>
+                  <a:srgbClr val="1F2D3A"/>
+                </a:solidFill>
+              </a:rPr>
+              <a:t>Saldırı potansiyeli doğru mu derecelendirilmiş?</a:t>
             </a:r>
           </a:p>
           <a:p>
@@ -19325,15 +19208,15 @@
                   <a:srgbClr val="006D77"/>
                 </a:solidFill>
               </a:rPr>
-              <a:t>2. </a:t>
-            </a:r>
-            <a:r>
-              <a:rPr sz="2000" b="0">
-                <a:solidFill>
-                  <a:srgbClr val="1F2D3A"/>
-                </a:solidFill>
-              </a:rPr>
-              <a:t>"Durdurma koşulu" neden var?</a:t>
+              <a:t>• </a:t>
+            </a:r>
+            <a:r>
+              <a:rPr sz="2000" b="0">
+                <a:solidFill>
+                  <a:srgbClr val="1F2D3A"/>
+                </a:solidFill>
+              </a:rPr>
+              <a:t>Öneri uygulanabilir mi?</a:t>
             </a:r>
           </a:p>
           <a:p>
@@ -19348,15 +19231,65 @@
                   <a:srgbClr val="006D77"/>
                 </a:solidFill>
               </a:rPr>
-              <a:t>3. </a:t>
-            </a:r>
-            <a:r>
-              <a:rPr sz="2000" b="0">
-                <a:solidFill>
-                  <a:srgbClr val="1F2D3A"/>
-                </a:solidFill>
-              </a:rPr>
-              <a:t>Test kartının hangi alanı S17'ye bağlanır?</a:t>
+              <a:t>• </a:t>
+            </a:r>
+            <a:r>
+              <a:rPr sz="2000" b="0">
+                <a:solidFill>
+                  <a:srgbClr val="1F2D3A"/>
+                </a:solidFill>
+              </a:rPr>
+              <a:t>"Karşılandı" satırının </a:t>
+            </a:r>
+            <a:r>
+              <a:rPr sz="2000" b="1">
+                <a:solidFill>
+                  <a:srgbClr val="1F2D3A"/>
+                </a:solidFill>
+              </a:rPr>
+              <a:t>kanıtı</a:t>
+            </a:r>
+            <a:r>
+              <a:rPr sz="2000" b="0">
+                <a:solidFill>
+                  <a:srgbClr val="1F2D3A"/>
+                </a:solidFill>
+              </a:rPr>
+              <a:t> var mı?</a:t>
+            </a:r>
+          </a:p>
+        </p:txBody>
+      </p:sp>
+      <p:sp>
+        <p:nvSpPr>
+          <p:cNvPr id="9" name="TextBox 8"/>
+          <p:cNvSpPr txBox="1"/>
+          <p:nvPr/>
+        </p:nvSpPr>
+        <p:spPr>
+          <a:xfrm>
+            <a:off x="640080" y="3204464"/>
+            <a:ext cx="10911535" cy="439928"/>
+          </a:xfrm>
+          <a:prstGeom prst="rect">
+            <a:avLst/>
+          </a:prstGeom>
+          <a:noFill/>
+        </p:spPr>
+        <p:txBody>
+          <a:bodyPr wrap="square" lIns="45720" rIns="45720">
+            <a:spAutoFit/>
+          </a:bodyPr>
+          <a:lstStyle/>
+          <a:p>
+            <a:pPr algn="l"/>
+            <a:r>
+              <a:rPr sz="2000" b="0">
+                <a:solidFill>
+                  <a:srgbClr val="1F2D3A"/>
+                </a:solidFill>
+              </a:rPr>
+              <a:t>Bu, 13. haftadaki uyum matrisi okumasının provası.</a:t>
             </a:r>
           </a:p>
         </p:txBody>
@@ -19531,7 +19464,7 @@
                   <a:srgbClr val="006D77"/>
                 </a:solidFill>
               </a:rPr>
-              <a:t>Bölüm 5 — cevaplar</a:t>
+              <a:t>Bölüm 5 — kısa sınama</a:t>
             </a:r>
           </a:p>
         </p:txBody>
@@ -19545,7 +19478,7 @@
         <p:spPr>
           <a:xfrm>
             <a:off x="640080" y="1325880"/>
-            <a:ext cx="10911535" cy="2209800"/>
+            <a:ext cx="10911535" cy="1219200"/>
           </a:xfrm>
           <a:prstGeom prst="rect">
             <a:avLst/>
@@ -19572,20 +19505,12 @@
               <a:t>1. </a:t>
             </a:r>
             <a:r>
-              <a:rPr sz="2000" b="1">
-                <a:solidFill>
-                  <a:srgbClr val="1F2D3A"/>
-                </a:solidFill>
-              </a:rPr>
-              <a:t>Kapsam · kurallar (RoE) · yöntem/metodoloji · test kartları</a:t>
-            </a:r>
-            <a:r>
-              <a:rPr sz="2000" b="0">
-                <a:solidFill>
-                  <a:srgbClr val="1F2D3A"/>
-                </a:solidFill>
-              </a:rPr>
-              <a:t> (+ durdurma koşulu, raporlama).</a:t>
+              <a:rPr sz="2000" b="0">
+                <a:solidFill>
+                  <a:srgbClr val="1F2D3A"/>
+                </a:solidFill>
+              </a:rPr>
+              <a:t>Planın dört başlığı?</a:t>
             </a:r>
           </a:p>
           <a:p>
@@ -19608,39 +19533,7 @@
                   <a:srgbClr val="1F2D3A"/>
                 </a:solidFill>
               </a:rPr>
-              <a:t>Gerçek </a:t>
-            </a:r>
-            <a:r>
-              <a:rPr sz="2000" b="1">
-                <a:solidFill>
-                  <a:srgbClr val="1F2D3A"/>
-                </a:solidFill>
-              </a:rPr>
-              <a:t>zarar/veri kaybı/kesinti</a:t>
-            </a:r>
-            <a:r>
-              <a:rPr sz="2000" b="0">
-                <a:solidFill>
-                  <a:srgbClr val="1F2D3A"/>
-                </a:solidFill>
-              </a:rPr>
-              <a:t> riskini sınırlamak; belirli bir eşikte test </a:t>
-            </a:r>
-            <a:r>
-              <a:rPr sz="2000" b="1">
-                <a:solidFill>
-                  <a:srgbClr val="1F2D3A"/>
-                </a:solidFill>
-              </a:rPr>
-              <a:t>durur</a:t>
-            </a:r>
-            <a:r>
-              <a:rPr sz="2000" b="0">
-                <a:solidFill>
-                  <a:srgbClr val="1F2D3A"/>
-                </a:solidFill>
-              </a:rPr>
-              <a:t> → güvenli ve etik yürütme.</a:t>
+              <a:t>"Durdurma koşulu" neden var?</a:t>
             </a:r>
           </a:p>
           <a:p>
@@ -19663,39 +19556,7 @@
                   <a:srgbClr val="1F2D3A"/>
                 </a:solidFill>
               </a:rPr>
-              <a:t>Test kartının </a:t>
-            </a:r>
-            <a:r>
-              <a:rPr sz="2000" b="1">
-                <a:solidFill>
-                  <a:srgbClr val="1F2D3A"/>
-                </a:solidFill>
-              </a:rPr>
-              <a:t>sonuç/karşılanan gereksinim</a:t>
-            </a:r>
-            <a:r>
-              <a:rPr sz="2000" b="0">
-                <a:solidFill>
-                  <a:srgbClr val="1F2D3A"/>
-                </a:solidFill>
-              </a:rPr>
-              <a:t> alanı → </a:t>
-            </a:r>
-            <a:r>
-              <a:rPr sz="2000" b="1">
-                <a:solidFill>
-                  <a:srgbClr val="1F2D3A"/>
-                </a:solidFill>
-              </a:rPr>
-              <a:t>S17 uyum matrisine</a:t>
-            </a:r>
-            <a:r>
-              <a:rPr sz="2000" b="0">
-                <a:solidFill>
-                  <a:srgbClr val="1F2D3A"/>
-                </a:solidFill>
-              </a:rPr>
-              <a:t> kanıt olarak bağlanır.</a:t>
+              <a:t>Test kartının hangi alanı S17'ye bağlanır?</a:t>
             </a:r>
           </a:p>
         </p:txBody>
@@ -19709,6 +19570,345 @@
 </file>
 
 <file path=ppt/slides/slide146.xml><?xml version="1.0" encoding="utf-8"?>
+<p:sld xmlns:a="http://schemas.openxmlformats.org/drawingml/2006/main" xmlns:p="http://schemas.openxmlformats.org/presentationml/2006/main" xmlns:r="http://schemas.openxmlformats.org/officeDocument/2006/relationships">
+  <p:cSld>
+    <p:spTree>
+      <p:nvGrpSpPr>
+        <p:cNvPr id="1" name=""/>
+        <p:cNvGrpSpPr/>
+        <p:nvPr/>
+      </p:nvGrpSpPr>
+      <p:grpSpPr/>
+      <p:pic>
+        <p:nvPicPr>
+          <p:cNvPr id="2" name="Picture 1" descr="rteu_logo_kucuk.jpg"/>
+          <p:cNvPicPr>
+            <a:picLocks noChangeAspect="1"/>
+          </p:cNvPicPr>
+          <p:nvPr/>
+        </p:nvPicPr>
+        <p:blipFill>
+          <a:blip r:embed="rId2"/>
+          <a:stretch>
+            <a:fillRect/>
+          </a:stretch>
+        </p:blipFill>
+        <p:spPr>
+          <a:xfrm>
+            <a:off x="640080" y="164592"/>
+            <a:ext cx="242773" cy="329184"/>
+          </a:xfrm>
+          <a:prstGeom prst="rect">
+            <a:avLst/>
+          </a:prstGeom>
+        </p:spPr>
+      </p:pic>
+      <p:sp>
+        <p:nvSpPr>
+          <p:cNvPr id="3" name="TextBox 2"/>
+          <p:cNvSpPr txBox="1"/>
+          <p:nvPr/>
+        </p:nvSpPr>
+        <p:spPr>
+          <a:xfrm>
+            <a:off x="1051560" y="182880"/>
+            <a:ext cx="7315200" cy="320040"/>
+          </a:xfrm>
+          <a:prstGeom prst="rect">
+            <a:avLst/>
+          </a:prstGeom>
+          <a:noFill/>
+        </p:spPr>
+        <p:txBody>
+          <a:bodyPr wrap="square" lIns="45720" rIns="45720">
+            <a:spAutoFit/>
+          </a:bodyPr>
+          <a:lstStyle/>
+          <a:p>
+            <a:r>
+              <a:rPr sz="1100" b="0">
+                <a:solidFill>
+                  <a:srgbClr val="5B6770"/>
+                </a:solidFill>
+              </a:rPr>
+              <a:t>CEN429 Güvenli Programlama · Hafta 12</a:t>
+            </a:r>
+          </a:p>
+        </p:txBody>
+      </p:sp>
+      <p:sp>
+        <p:nvSpPr>
+          <p:cNvPr id="4" name="TextBox 3"/>
+          <p:cNvSpPr txBox="1"/>
+          <p:nvPr/>
+        </p:nvSpPr>
+        <p:spPr>
+          <a:xfrm>
+            <a:off x="640080" y="6446520"/>
+            <a:ext cx="7315200" cy="274320"/>
+          </a:xfrm>
+          <a:prstGeom prst="rect">
+            <a:avLst/>
+          </a:prstGeom>
+          <a:noFill/>
+        </p:spPr>
+        <p:txBody>
+          <a:bodyPr wrap="square" lIns="45720" rIns="45720">
+            <a:spAutoFit/>
+          </a:bodyPr>
+          <a:lstStyle/>
+          <a:p>
+            <a:r>
+              <a:rPr sz="1000" b="0">
+                <a:solidFill>
+                  <a:srgbClr val="5B6770"/>
+                </a:solidFill>
+              </a:rPr>
+              <a:t>RTEÜ Bilgisayar Mühendisliği · 2026-2027 Güz</a:t>
+            </a:r>
+          </a:p>
+        </p:txBody>
+      </p:sp>
+      <p:sp>
+        <p:nvSpPr>
+          <p:cNvPr id="5" name="TextBox 4"/>
+          <p:cNvSpPr txBox="1"/>
+          <p:nvPr/>
+        </p:nvSpPr>
+        <p:spPr>
+          <a:xfrm>
+            <a:off x="10637215" y="6446520"/>
+            <a:ext cx="914400" cy="274320"/>
+          </a:xfrm>
+          <a:prstGeom prst="rect">
+            <a:avLst/>
+          </a:prstGeom>
+          <a:noFill/>
+        </p:spPr>
+        <p:txBody>
+          <a:bodyPr wrap="square" lIns="45720" rIns="45720">
+            <a:spAutoFit/>
+          </a:bodyPr>
+          <a:lstStyle/>
+          <a:p>
+            <a:pPr algn="r"/>
+            <a:r>
+              <a:rPr sz="1000" b="0">
+                <a:solidFill>
+                  <a:srgbClr val="5B6770"/>
+                </a:solidFill>
+              </a:rPr>
+              <a:t>146</a:t>
+            </a:r>
+          </a:p>
+        </p:txBody>
+      </p:sp>
+      <p:sp>
+        <p:nvSpPr>
+          <p:cNvPr id="6" name="TextBox 5"/>
+          <p:cNvSpPr txBox="1"/>
+          <p:nvPr/>
+        </p:nvSpPr>
+        <p:spPr>
+          <a:xfrm>
+            <a:off x="640080" y="548640"/>
+            <a:ext cx="10911535" cy="731520"/>
+          </a:xfrm>
+          <a:prstGeom prst="rect">
+            <a:avLst/>
+          </a:prstGeom>
+          <a:noFill/>
+        </p:spPr>
+        <p:txBody>
+          <a:bodyPr wrap="square" lIns="45720" rIns="45720" anchor="ctr">
+            <a:spAutoFit/>
+          </a:bodyPr>
+          <a:lstStyle/>
+          <a:p>
+            <a:r>
+              <a:rPr sz="3000" b="1">
+                <a:solidFill>
+                  <a:srgbClr val="006D77"/>
+                </a:solidFill>
+              </a:rPr>
+              <a:t>Bölüm 5 — cevaplar</a:t>
+            </a:r>
+          </a:p>
+        </p:txBody>
+      </p:sp>
+      <p:sp>
+        <p:nvSpPr>
+          <p:cNvPr id="7" name="TextBox 6"/>
+          <p:cNvSpPr txBox="1"/>
+          <p:nvPr/>
+        </p:nvSpPr>
+        <p:spPr>
+          <a:xfrm>
+            <a:off x="640080" y="1325880"/>
+            <a:ext cx="10911535" cy="2209800"/>
+          </a:xfrm>
+          <a:prstGeom prst="rect">
+            <a:avLst/>
+          </a:prstGeom>
+          <a:noFill/>
+        </p:spPr>
+        <p:txBody>
+          <a:bodyPr wrap="square" lIns="45720" rIns="45720">
+            <a:spAutoFit/>
+          </a:bodyPr>
+          <a:lstStyle/>
+          <a:p>
+            <a:pPr>
+              <a:spcAft>
+                <a:spcPts val="300"/>
+              </a:spcAft>
+            </a:pPr>
+            <a:r>
+              <a:rPr sz="2000" b="1">
+                <a:solidFill>
+                  <a:srgbClr val="006D77"/>
+                </a:solidFill>
+              </a:rPr>
+              <a:t>1. </a:t>
+            </a:r>
+            <a:r>
+              <a:rPr sz="2000" b="1">
+                <a:solidFill>
+                  <a:srgbClr val="1F2D3A"/>
+                </a:solidFill>
+              </a:rPr>
+              <a:t>Kapsam · kurallar (RoE) · yöntem/metodoloji · test kartları</a:t>
+            </a:r>
+            <a:r>
+              <a:rPr sz="2000" b="0">
+                <a:solidFill>
+                  <a:srgbClr val="1F2D3A"/>
+                </a:solidFill>
+              </a:rPr>
+              <a:t> (+ durdurma koşulu, raporlama).</a:t>
+            </a:r>
+          </a:p>
+          <a:p>
+            <a:pPr>
+              <a:spcAft>
+                <a:spcPts val="300"/>
+              </a:spcAft>
+            </a:pPr>
+            <a:r>
+              <a:rPr sz="2000" b="1">
+                <a:solidFill>
+                  <a:srgbClr val="006D77"/>
+                </a:solidFill>
+              </a:rPr>
+              <a:t>2. </a:t>
+            </a:r>
+            <a:r>
+              <a:rPr sz="2000" b="0">
+                <a:solidFill>
+                  <a:srgbClr val="1F2D3A"/>
+                </a:solidFill>
+              </a:rPr>
+              <a:t>Gerçek </a:t>
+            </a:r>
+            <a:r>
+              <a:rPr sz="2000" b="1">
+                <a:solidFill>
+                  <a:srgbClr val="1F2D3A"/>
+                </a:solidFill>
+              </a:rPr>
+              <a:t>zarar/veri kaybı/kesinti</a:t>
+            </a:r>
+            <a:r>
+              <a:rPr sz="2000" b="0">
+                <a:solidFill>
+                  <a:srgbClr val="1F2D3A"/>
+                </a:solidFill>
+              </a:rPr>
+              <a:t> riskini sınırlamak; belirli bir eşikte test </a:t>
+            </a:r>
+            <a:r>
+              <a:rPr sz="2000" b="1">
+                <a:solidFill>
+                  <a:srgbClr val="1F2D3A"/>
+                </a:solidFill>
+              </a:rPr>
+              <a:t>durur</a:t>
+            </a:r>
+            <a:r>
+              <a:rPr sz="2000" b="0">
+                <a:solidFill>
+                  <a:srgbClr val="1F2D3A"/>
+                </a:solidFill>
+              </a:rPr>
+              <a:t> → güvenli ve etik yürütme.</a:t>
+            </a:r>
+          </a:p>
+          <a:p>
+            <a:pPr>
+              <a:spcAft>
+                <a:spcPts val="300"/>
+              </a:spcAft>
+            </a:pPr>
+            <a:r>
+              <a:rPr sz="2000" b="1">
+                <a:solidFill>
+                  <a:srgbClr val="006D77"/>
+                </a:solidFill>
+              </a:rPr>
+              <a:t>3. </a:t>
+            </a:r>
+            <a:r>
+              <a:rPr sz="2000" b="0">
+                <a:solidFill>
+                  <a:srgbClr val="1F2D3A"/>
+                </a:solidFill>
+              </a:rPr>
+              <a:t>Test kartının </a:t>
+            </a:r>
+            <a:r>
+              <a:rPr sz="2000" b="1">
+                <a:solidFill>
+                  <a:srgbClr val="1F2D3A"/>
+                </a:solidFill>
+              </a:rPr>
+              <a:t>sonuç/karşılanan gereksinim</a:t>
+            </a:r>
+            <a:r>
+              <a:rPr sz="2000" b="0">
+                <a:solidFill>
+                  <a:srgbClr val="1F2D3A"/>
+                </a:solidFill>
+              </a:rPr>
+              <a:t> alanı → </a:t>
+            </a:r>
+            <a:r>
+              <a:rPr sz="2000" b="1">
+                <a:solidFill>
+                  <a:srgbClr val="1F2D3A"/>
+                </a:solidFill>
+              </a:rPr>
+              <a:t>S17 uyum matrisine</a:t>
+            </a:r>
+            <a:r>
+              <a:rPr sz="2000" b="0">
+                <a:solidFill>
+                  <a:srgbClr val="1F2D3A"/>
+                </a:solidFill>
+              </a:rPr>
+              <a:t> kanıt olarak bağlanır.</a:t>
+            </a:r>
+          </a:p>
+        </p:txBody>
+      </p:sp>
+    </p:spTree>
+  </p:cSld>
+  <p:clrMapOvr>
+    <a:masterClrMapping/>
+  </p:clrMapOvr>
+</p:sld>
+</file>
+
+<file path=ppt/slides/slide147.xml><?xml version="1.0" encoding="utf-8"?>
 <p:sld xmlns:a="http://schemas.openxmlformats.org/drawingml/2006/main" xmlns:p="http://schemas.openxmlformats.org/presentationml/2006/main" xmlns:r="http://schemas.openxmlformats.org/officeDocument/2006/relationships">
   <p:cSld>
     <p:bg>
@@ -19821,7 +20021,7 @@
                   <a:srgbClr val="D8F0F2"/>
                 </a:solidFill>
               </a:rPr>
-              <a:t>146</a:t>
+              <a:t>147</a:t>
             </a:r>
           </a:p>
         </p:txBody>
@@ -19856,239 +20056,6 @@
                 </a:solidFill>
               </a:rPr>
               <a:t>6. Proje ve kapanış</a:t>
-            </a:r>
-          </a:p>
-        </p:txBody>
-      </p:sp>
-    </p:spTree>
-  </p:cSld>
-  <p:clrMapOvr>
-    <a:masterClrMapping/>
-  </p:clrMapOvr>
-</p:sld>
-</file>
-
-<file path=ppt/slides/slide147.xml><?xml version="1.0" encoding="utf-8"?>
-<p:sld xmlns:a="http://schemas.openxmlformats.org/drawingml/2006/main" xmlns:p="http://schemas.openxmlformats.org/presentationml/2006/main" xmlns:r="http://schemas.openxmlformats.org/officeDocument/2006/relationships">
-  <p:cSld>
-    <p:spTree>
-      <p:nvGrpSpPr>
-        <p:cNvPr id="1" name=""/>
-        <p:cNvGrpSpPr/>
-        <p:nvPr/>
-      </p:nvGrpSpPr>
-      <p:grpSpPr/>
-      <p:pic>
-        <p:nvPicPr>
-          <p:cNvPr id="2" name="Picture 1" descr="rteu_logo_kucuk.jpg"/>
-          <p:cNvPicPr>
-            <a:picLocks noChangeAspect="1"/>
-          </p:cNvPicPr>
-          <p:nvPr/>
-        </p:nvPicPr>
-        <p:blipFill>
-          <a:blip r:embed="rId2"/>
-          <a:stretch>
-            <a:fillRect/>
-          </a:stretch>
-        </p:blipFill>
-        <p:spPr>
-          <a:xfrm>
-            <a:off x="640080" y="164592"/>
-            <a:ext cx="242773" cy="329184"/>
-          </a:xfrm>
-          <a:prstGeom prst="rect">
-            <a:avLst/>
-          </a:prstGeom>
-        </p:spPr>
-      </p:pic>
-      <p:sp>
-        <p:nvSpPr>
-          <p:cNvPr id="3" name="TextBox 2"/>
-          <p:cNvSpPr txBox="1"/>
-          <p:nvPr/>
-        </p:nvSpPr>
-        <p:spPr>
-          <a:xfrm>
-            <a:off x="1051560" y="182880"/>
-            <a:ext cx="7315200" cy="320040"/>
-          </a:xfrm>
-          <a:prstGeom prst="rect">
-            <a:avLst/>
-          </a:prstGeom>
-          <a:noFill/>
-        </p:spPr>
-        <p:txBody>
-          <a:bodyPr wrap="square" lIns="45720" rIns="45720">
-            <a:spAutoFit/>
-          </a:bodyPr>
-          <a:lstStyle/>
-          <a:p>
-            <a:r>
-              <a:rPr sz="1100" b="0">
-                <a:solidFill>
-                  <a:srgbClr val="5B6770"/>
-                </a:solidFill>
-              </a:rPr>
-              <a:t>CEN429 Güvenli Programlama · Hafta 12</a:t>
-            </a:r>
-          </a:p>
-        </p:txBody>
-      </p:sp>
-      <p:sp>
-        <p:nvSpPr>
-          <p:cNvPr id="4" name="TextBox 3"/>
-          <p:cNvSpPr txBox="1"/>
-          <p:nvPr/>
-        </p:nvSpPr>
-        <p:spPr>
-          <a:xfrm>
-            <a:off x="640080" y="6446520"/>
-            <a:ext cx="7315200" cy="274320"/>
-          </a:xfrm>
-          <a:prstGeom prst="rect">
-            <a:avLst/>
-          </a:prstGeom>
-          <a:noFill/>
-        </p:spPr>
-        <p:txBody>
-          <a:bodyPr wrap="square" lIns="45720" rIns="45720">
-            <a:spAutoFit/>
-          </a:bodyPr>
-          <a:lstStyle/>
-          <a:p>
-            <a:r>
-              <a:rPr sz="1000" b="0">
-                <a:solidFill>
-                  <a:srgbClr val="5B6770"/>
-                </a:solidFill>
-              </a:rPr>
-              <a:t>RTEÜ Bilgisayar Mühendisliği · 2026-2027 Güz</a:t>
-            </a:r>
-          </a:p>
-        </p:txBody>
-      </p:sp>
-      <p:sp>
-        <p:nvSpPr>
-          <p:cNvPr id="5" name="TextBox 4"/>
-          <p:cNvSpPr txBox="1"/>
-          <p:nvPr/>
-        </p:nvSpPr>
-        <p:spPr>
-          <a:xfrm>
-            <a:off x="10637215" y="6446520"/>
-            <a:ext cx="914400" cy="274320"/>
-          </a:xfrm>
-          <a:prstGeom prst="rect">
-            <a:avLst/>
-          </a:prstGeom>
-          <a:noFill/>
-        </p:spPr>
-        <p:txBody>
-          <a:bodyPr wrap="square" lIns="45720" rIns="45720">
-            <a:spAutoFit/>
-          </a:bodyPr>
-          <a:lstStyle/>
-          <a:p>
-            <a:pPr algn="r"/>
-            <a:r>
-              <a:rPr sz="1000" b="0">
-                <a:solidFill>
-                  <a:srgbClr val="5B6770"/>
-                </a:solidFill>
-              </a:rPr>
-              <a:t>147</a:t>
-            </a:r>
-          </a:p>
-        </p:txBody>
-      </p:sp>
-      <p:sp>
-        <p:nvSpPr>
-          <p:cNvPr id="6" name="TextBox 5"/>
-          <p:cNvSpPr txBox="1"/>
-          <p:nvPr/>
-        </p:nvSpPr>
-        <p:spPr>
-          <a:xfrm>
-            <a:off x="640080" y="548640"/>
-            <a:ext cx="10911535" cy="731520"/>
-          </a:xfrm>
-          <a:prstGeom prst="rect">
-            <a:avLst/>
-          </a:prstGeom>
-          <a:noFill/>
-        </p:spPr>
-        <p:txBody>
-          <a:bodyPr wrap="square" lIns="45720" rIns="45720" anchor="ctr">
-            <a:spAutoFit/>
-          </a:bodyPr>
-          <a:lstStyle/>
-          <a:p>
-            <a:r>
-              <a:rPr sz="3000" b="1">
-                <a:solidFill>
-                  <a:srgbClr val="006D77"/>
-                </a:solidFill>
-              </a:rPr>
-              <a:t>Proje · S16 (test planı + sonuçları) — 1</a:t>
-            </a:r>
-          </a:p>
-        </p:txBody>
-      </p:sp>
-      <p:sp>
-        <p:nvSpPr>
-          <p:cNvPr id="7" name="TextBox 6"/>
-          <p:cNvSpPr txBox="1"/>
-          <p:nvPr/>
-        </p:nvSpPr>
-        <p:spPr>
-          <a:xfrm>
-            <a:off x="640080" y="1325880"/>
-            <a:ext cx="10911535" cy="770128"/>
-          </a:xfrm>
-          <a:prstGeom prst="rect">
-            <a:avLst/>
-          </a:prstGeom>
-          <a:noFill/>
-        </p:spPr>
-        <p:txBody>
-          <a:bodyPr wrap="square" lIns="45720" rIns="45720">
-            <a:spAutoFit/>
-          </a:bodyPr>
-          <a:lstStyle/>
-          <a:p>
-            <a:pPr algn="l"/>
-            <a:r>
-              <a:rPr sz="2000" b="1">
-                <a:solidFill>
-                  <a:srgbClr val="1F2D3A"/>
-                </a:solidFill>
-              </a:rPr>
-              <a:t>1.</a:t>
-            </a:r>
-            <a:r>
-              <a:rPr sz="2000" b="0">
-                <a:solidFill>
-                  <a:srgbClr val="1F2D3A"/>
-                </a:solidFill>
-              </a:rPr>
-              <a:t> En kritik iki–üç varlık/gereksinim için </a:t>
-            </a:r>
-            <a:r>
-              <a:rPr sz="2000" b="1">
-                <a:solidFill>
-                  <a:srgbClr val="1F2D3A"/>
-                </a:solidFill>
-              </a:rPr>
-              <a:t>sekiz başlıklı</a:t>
-            </a:r>
-            <a:r>
-              <a:rPr sz="2000" b="0">
-                <a:solidFill>
-                  <a:srgbClr val="1F2D3A"/>
-                </a:solidFill>
-              </a:rPr>
-              <a:t> test kartları yazın (S17 ile bağlı).</a:t>
             </a:r>
           </a:p>
         </p:txBody>
@@ -20263,7 +20230,7 @@
                   <a:srgbClr val="006D77"/>
                 </a:solidFill>
               </a:rPr>
-              <a:t>Proje · S16 — 2</a:t>
+              <a:t>Proje · S16 (test planı + sonuçları) — 1</a:t>
             </a:r>
           </a:p>
         </p:txBody>
@@ -20297,15 +20264,31 @@
                   <a:srgbClr val="1F2D3A"/>
                 </a:solidFill>
               </a:rPr>
-              <a:t>2. Yöntem:</a:t>
-            </a:r>
-            <a:r>
-              <a:rPr sz="2000" b="0">
-                <a:solidFill>
-                  <a:srgbClr val="1F2D3A"/>
-                </a:solidFill>
-              </a:rPr>
-              <a:t> hangi metodolojiyi (MASTG / WSTG / PTES / NIST SP 800-115) temel aldığınızı belirtin.</a:t>
+              <a:t>1.</a:t>
+            </a:r>
+            <a:r>
+              <a:rPr sz="2000" b="0">
+                <a:solidFill>
+                  <a:srgbClr val="1F2D3A"/>
+                </a:solidFill>
+              </a:rPr>
+              <a:t> En kritik iki–üç varlık/gereksinim için </a:t>
+            </a:r>
+            <a:r>
+              <a:rPr sz="2000" b="1">
+                <a:solidFill>
+                  <a:srgbClr val="1F2D3A"/>
+                </a:solidFill>
+              </a:rPr>
+              <a:t>sekiz başlıklı</a:t>
+            </a:r>
+            <a:r>
+              <a:rPr sz="2000" b="0">
+                <a:solidFill>
+                  <a:srgbClr val="1F2D3A"/>
+                </a:solidFill>
+              </a:rPr>
+              <a:t> test kartları yazın (S17 ile bağlı).</a:t>
             </a:r>
           </a:p>
         </p:txBody>
@@ -20480,7 +20463,7 @@
                   <a:srgbClr val="006D77"/>
                 </a:solidFill>
               </a:rPr>
-              <a:t>Proje · S16 — 3</a:t>
+              <a:t>Proje · S16 — 2</a:t>
             </a:r>
           </a:p>
         </p:txBody>
@@ -20494,7 +20477,7 @@
         <p:spPr>
           <a:xfrm>
             <a:off x="640080" y="1325880"/>
-            <a:ext cx="10911535" cy="439928"/>
+            <a:ext cx="10911535" cy="770128"/>
           </a:xfrm>
           <a:prstGeom prst="rect">
             <a:avLst/>
@@ -20514,100 +20497,15 @@
                   <a:srgbClr val="1F2D3A"/>
                 </a:solidFill>
               </a:rPr>
-              <a:t>3. Sonuçlar:</a:t>
-            </a:r>
-            <a:r>
-              <a:rPr sz="2000" b="0">
-                <a:solidFill>
-                  <a:srgbClr val="1F2D3A"/>
-                </a:solidFill>
-              </a:rPr>
-              <a:t> testleri çalıştırıp </a:t>
-            </a:r>
-            <a:r>
-              <a:rPr sz="2000" b="1">
-                <a:solidFill>
-                  <a:srgbClr val="1F2D3A"/>
-                </a:solidFill>
-              </a:rPr>
-              <a:t>gözlenen sonuçları</a:t>
-            </a:r>
-            <a:r>
-              <a:rPr sz="2000" b="0">
-                <a:solidFill>
-                  <a:srgbClr val="1F2D3A"/>
-                </a:solidFill>
-              </a:rPr>
-              <a:t> yazın.</a:t>
-            </a:r>
-          </a:p>
-        </p:txBody>
-      </p:sp>
-      <p:sp>
-        <p:nvSpPr>
-          <p:cNvPr id="8" name="Rectangle 7"/>
-          <p:cNvSpPr/>
-          <p:nvPr/>
-        </p:nvSpPr>
-        <p:spPr>
-          <a:xfrm>
-            <a:off x="640080" y="1875536"/>
-            <a:ext cx="10911535" cy="604520"/>
-          </a:xfrm>
-          <a:prstGeom prst="rect">
-            <a:avLst/>
-          </a:prstGeom>
-          <a:solidFill>
-            <a:srgbClr val="EEF7F8"/>
-          </a:solidFill>
-          <a:ln>
-            <a:solidFill>
-              <a:srgbClr val="006D77"/>
-            </a:solidFill>
-          </a:ln>
-        </p:spPr>
-        <p:style>
-          <a:lnRef idx="1">
-            <a:schemeClr val="accent1"/>
-          </a:lnRef>
-          <a:fillRef idx="3">
-            <a:schemeClr val="accent1"/>
-          </a:fillRef>
-          <a:effectRef idx="2">
-            <a:schemeClr val="accent1"/>
-          </a:effectRef>
-          <a:fontRef idx="minor">
-            <a:schemeClr val="lt1"/>
-          </a:fontRef>
-        </p:style>
-        <p:txBody>
-          <a:bodyPr rtlCol="0" anchor="ctr" wrap="square" lIns="182880"/>
-          <a:lstStyle/>
-          <a:p>
-            <a:pPr algn="l"/>
-            <a:r>
-              <a:rPr sz="2000" b="0">
-                <a:solidFill>
-                  <a:srgbClr val="1F2D3A"/>
-                </a:solidFill>
-              </a:rPr>
-              <a:t>Finalde plan değil, </a:t>
-            </a:r>
-            <a:r>
-              <a:rPr sz="2000" b="1">
-                <a:solidFill>
-                  <a:srgbClr val="1F2D3A"/>
-                </a:solidFill>
-              </a:rPr>
-              <a:t>sonuç</a:t>
-            </a:r>
-            <a:r>
-              <a:rPr sz="2000" b="0">
-                <a:solidFill>
-                  <a:srgbClr val="1F2D3A"/>
-                </a:solidFill>
-              </a:rPr>
-              <a:t> beklenir.</a:t>
+              <a:t>2. Yöntem:</a:t>
+            </a:r>
+            <a:r>
+              <a:rPr sz="2000" b="0">
+                <a:solidFill>
+                  <a:srgbClr val="1F2D3A"/>
+                </a:solidFill>
+              </a:rPr>
+              <a:t> hangi metodolojiyi (MASTG / WSTG / PTES / NIST SP 800-115) temel aldığınızı belirtin.</a:t>
             </a:r>
           </a:p>
         </p:txBody>
@@ -21097,7 +20995,7 @@
                   <a:srgbClr val="006D77"/>
                 </a:solidFill>
               </a:rPr>
-              <a:t>Proje · S16 — 4, 5</a:t>
+              <a:t>Proje · S16 — 3</a:t>
             </a:r>
           </a:p>
         </p:txBody>
@@ -21131,57 +21029,100 @@
                   <a:srgbClr val="1F2D3A"/>
                 </a:solidFill>
               </a:rPr>
-              <a:t>4. Bulgu–aksiyon:</a:t>
-            </a:r>
-            <a:r>
-              <a:rPr sz="2000" b="0">
-                <a:solidFill>
-                  <a:srgbClr val="1F2D3A"/>
-                </a:solidFill>
-              </a:rPr>
-              <a:t> vize geri bildirimlerini bir tabloya dökün.</a:t>
-            </a:r>
-          </a:p>
-        </p:txBody>
-      </p:sp>
-      <p:sp>
-        <p:nvSpPr>
-          <p:cNvPr id="8" name="TextBox 7"/>
-          <p:cNvSpPr txBox="1"/>
+              <a:t>3. Sonuçlar:</a:t>
+            </a:r>
+            <a:r>
+              <a:rPr sz="2000" b="0">
+                <a:solidFill>
+                  <a:srgbClr val="1F2D3A"/>
+                </a:solidFill>
+              </a:rPr>
+              <a:t> testleri çalıştırıp </a:t>
+            </a:r>
+            <a:r>
+              <a:rPr sz="2000" b="1">
+                <a:solidFill>
+                  <a:srgbClr val="1F2D3A"/>
+                </a:solidFill>
+              </a:rPr>
+              <a:t>gözlenen sonuçları</a:t>
+            </a:r>
+            <a:r>
+              <a:rPr sz="2000" b="0">
+                <a:solidFill>
+                  <a:srgbClr val="1F2D3A"/>
+                </a:solidFill>
+              </a:rPr>
+              <a:t> yazın.</a:t>
+            </a:r>
+          </a:p>
+        </p:txBody>
+      </p:sp>
+      <p:sp>
+        <p:nvSpPr>
+          <p:cNvPr id="8" name="Rectangle 7"/>
+          <p:cNvSpPr/>
           <p:nvPr/>
         </p:nvSpPr>
         <p:spPr>
           <a:xfrm>
             <a:off x="640080" y="1875536"/>
-            <a:ext cx="10911535" cy="439928"/>
-          </a:xfrm>
-          <a:prstGeom prst="rect">
-            <a:avLst/>
-          </a:prstGeom>
-          <a:noFill/>
-        </p:spPr>
-        <p:txBody>
-          <a:bodyPr wrap="square" lIns="45720" rIns="45720">
-            <a:spAutoFit/>
-          </a:bodyPr>
+            <a:ext cx="10911535" cy="604520"/>
+          </a:xfrm>
+          <a:prstGeom prst="rect">
+            <a:avLst/>
+          </a:prstGeom>
+          <a:solidFill>
+            <a:srgbClr val="EEF7F8"/>
+          </a:solidFill>
+          <a:ln>
+            <a:solidFill>
+              <a:srgbClr val="006D77"/>
+            </a:solidFill>
+          </a:ln>
+        </p:spPr>
+        <p:style>
+          <a:lnRef idx="1">
+            <a:schemeClr val="accent1"/>
+          </a:lnRef>
+          <a:fillRef idx="3">
+            <a:schemeClr val="accent1"/>
+          </a:fillRef>
+          <a:effectRef idx="2">
+            <a:schemeClr val="accent1"/>
+          </a:effectRef>
+          <a:fontRef idx="minor">
+            <a:schemeClr val="lt1"/>
+          </a:fontRef>
+        </p:style>
+        <p:txBody>
+          <a:bodyPr rtlCol="0" anchor="ctr" wrap="square" lIns="182880"/>
           <a:lstStyle/>
           <a:p>
             <a:pPr algn="l"/>
             <a:r>
-              <a:rPr sz="2000" b="1">
-                <a:solidFill>
-                  <a:srgbClr val="1F2D3A"/>
-                </a:solidFill>
-              </a:rPr>
-              <a:t>5. Kalan risk:</a:t>
-            </a:r>
-            <a:r>
-              <a:rPr sz="2000" b="0">
-                <a:solidFill>
-                  <a:srgbClr val="1F2D3A"/>
-                </a:solidFill>
-              </a:rPr>
-              <a:t> kapatmadığınız riskleri ve gerekçesini yazın.</a:t>
+              <a:rPr sz="2000" b="0">
+                <a:solidFill>
+                  <a:srgbClr val="1F2D3A"/>
+                </a:solidFill>
+              </a:rPr>
+              <a:t>Finalde plan değil, </a:t>
+            </a:r>
+            <a:r>
+              <a:rPr sz="2000" b="1">
+                <a:solidFill>
+                  <a:srgbClr val="1F2D3A"/>
+                </a:solidFill>
+              </a:rPr>
+              <a:t>sonuç</a:t>
+            </a:r>
+            <a:r>
+              <a:rPr sz="2000" b="0">
+                <a:solidFill>
+                  <a:srgbClr val="1F2D3A"/>
+                </a:solidFill>
+              </a:rPr>
+              <a:t> beklenir.</a:t>
             </a:r>
           </a:p>
         </p:txBody>
@@ -21356,7 +21297,7 @@
                   <a:srgbClr val="006D77"/>
                 </a:solidFill>
               </a:rPr>
-              <a:t>⚠️ Etik (tekrar)</a:t>
+              <a:t>Proje · S16 — 4, 5</a:t>
             </a:r>
           </a:p>
         </p:txBody>
@@ -21370,117 +21311,77 @@
         <p:spPr>
           <a:xfrm>
             <a:off x="640080" y="1325880"/>
-            <a:ext cx="10911535" cy="1219200"/>
-          </a:xfrm>
-          <a:prstGeom prst="rect">
-            <a:avLst/>
-          </a:prstGeom>
-          <a:noFill/>
-        </p:spPr>
-        <p:txBody>
-          <a:bodyPr wrap="square" lIns="45720" rIns="45720">
-            <a:spAutoFit/>
-          </a:bodyPr>
-          <a:lstStyle/>
-          <a:p>
-            <a:pPr>
-              <a:spcAft>
-                <a:spcPts val="300"/>
-              </a:spcAft>
-            </a:pPr>
-            <a:r>
-              <a:rPr sz="2000" b="1">
-                <a:solidFill>
-                  <a:srgbClr val="006D77"/>
-                </a:solidFill>
-              </a:rPr>
-              <a:t>• </a:t>
-            </a:r>
-            <a:r>
-              <a:rPr sz="2000" b="0">
-                <a:solidFill>
-                  <a:srgbClr val="1F2D3A"/>
-                </a:solidFill>
-              </a:rPr>
-              <a:t>Test yalnız </a:t>
-            </a:r>
-            <a:r>
-              <a:rPr sz="2000" b="1">
-                <a:solidFill>
-                  <a:srgbClr val="1F2D3A"/>
-                </a:solidFill>
-              </a:rPr>
-              <a:t>kendi</a:t>
-            </a:r>
-            <a:r>
-              <a:rPr sz="2000" b="0">
-                <a:solidFill>
-                  <a:srgbClr val="1F2D3A"/>
-                </a:solidFill>
-              </a:rPr>
-              <a:t> projeniz ve yetkili olduğunuz sistemlerde.</a:t>
-            </a:r>
-          </a:p>
-          <a:p>
-            <a:pPr>
-              <a:spcAft>
-                <a:spcPts val="300"/>
-              </a:spcAft>
-            </a:pPr>
-            <a:r>
-              <a:rPr sz="2000" b="1">
-                <a:solidFill>
-                  <a:srgbClr val="006D77"/>
-                </a:solidFill>
-              </a:rPr>
-              <a:t>• </a:t>
-            </a:r>
-            <a:r>
-              <a:rPr sz="2000" b="0">
-                <a:solidFill>
-                  <a:srgbClr val="1F2D3A"/>
-                </a:solidFill>
-              </a:rPr>
-              <a:t>İzinsiz test suçtur.</a:t>
-            </a:r>
-          </a:p>
-          <a:p>
-            <a:pPr>
-              <a:spcAft>
-                <a:spcPts val="300"/>
-              </a:spcAft>
-            </a:pPr>
-            <a:r>
-              <a:rPr sz="2000" b="1">
-                <a:solidFill>
-                  <a:srgbClr val="006D77"/>
-                </a:solidFill>
-              </a:rPr>
-              <a:t>• </a:t>
-            </a:r>
-            <a:r>
-              <a:rPr sz="2000" b="0">
-                <a:solidFill>
-                  <a:srgbClr val="1F2D3A"/>
-                </a:solidFill>
-              </a:rPr>
-              <a:t>Bütün veriler </a:t>
-            </a:r>
-            <a:r>
-              <a:rPr sz="2000" b="1">
-                <a:solidFill>
-                  <a:srgbClr val="1F2D3A"/>
-                </a:solidFill>
-              </a:rPr>
-              <a:t>sentetik</a:t>
-            </a:r>
-            <a:r>
-              <a:rPr sz="2000" b="0">
-                <a:solidFill>
-                  <a:srgbClr val="1F2D3A"/>
-                </a:solidFill>
-              </a:rPr>
-              <a:t>; depoda gerçek sır/kişisel veri yok.</a:t>
+            <a:ext cx="10911535" cy="439928"/>
+          </a:xfrm>
+          <a:prstGeom prst="rect">
+            <a:avLst/>
+          </a:prstGeom>
+          <a:noFill/>
+        </p:spPr>
+        <p:txBody>
+          <a:bodyPr wrap="square" lIns="45720" rIns="45720">
+            <a:spAutoFit/>
+          </a:bodyPr>
+          <a:lstStyle/>
+          <a:p>
+            <a:pPr algn="l"/>
+            <a:r>
+              <a:rPr sz="2000" b="1">
+                <a:solidFill>
+                  <a:srgbClr val="1F2D3A"/>
+                </a:solidFill>
+              </a:rPr>
+              <a:t>4. Bulgu–aksiyon:</a:t>
+            </a:r>
+            <a:r>
+              <a:rPr sz="2000" b="0">
+                <a:solidFill>
+                  <a:srgbClr val="1F2D3A"/>
+                </a:solidFill>
+              </a:rPr>
+              <a:t> vize geri bildirimlerini bir tabloya dökün.</a:t>
+            </a:r>
+          </a:p>
+        </p:txBody>
+      </p:sp>
+      <p:sp>
+        <p:nvSpPr>
+          <p:cNvPr id="8" name="TextBox 7"/>
+          <p:cNvSpPr txBox="1"/>
+          <p:nvPr/>
+        </p:nvSpPr>
+        <p:spPr>
+          <a:xfrm>
+            <a:off x="640080" y="1875536"/>
+            <a:ext cx="10911535" cy="439928"/>
+          </a:xfrm>
+          <a:prstGeom prst="rect">
+            <a:avLst/>
+          </a:prstGeom>
+          <a:noFill/>
+        </p:spPr>
+        <p:txBody>
+          <a:bodyPr wrap="square" lIns="45720" rIns="45720">
+            <a:spAutoFit/>
+          </a:bodyPr>
+          <a:lstStyle/>
+          <a:p>
+            <a:pPr algn="l"/>
+            <a:r>
+              <a:rPr sz="2000" b="1">
+                <a:solidFill>
+                  <a:srgbClr val="1F2D3A"/>
+                </a:solidFill>
+              </a:rPr>
+              <a:t>5. Kalan risk:</a:t>
+            </a:r>
+            <a:r>
+              <a:rPr sz="2000" b="0">
+                <a:solidFill>
+                  <a:srgbClr val="1F2D3A"/>
+                </a:solidFill>
+              </a:rPr>
+              <a:t> kapatmadığınız riskleri ve gerekçesini yazın.</a:t>
             </a:r>
           </a:p>
         </p:txBody>
@@ -21494,6 +21395,305 @@
 </file>
 
 <file path=ppt/slides/slide152.xml><?xml version="1.0" encoding="utf-8"?>
+<p:sld xmlns:a="http://schemas.openxmlformats.org/drawingml/2006/main" xmlns:p="http://schemas.openxmlformats.org/presentationml/2006/main" xmlns:r="http://schemas.openxmlformats.org/officeDocument/2006/relationships">
+  <p:cSld>
+    <p:spTree>
+      <p:nvGrpSpPr>
+        <p:cNvPr id="1" name=""/>
+        <p:cNvGrpSpPr/>
+        <p:nvPr/>
+      </p:nvGrpSpPr>
+      <p:grpSpPr/>
+      <p:pic>
+        <p:nvPicPr>
+          <p:cNvPr id="2" name="Picture 1" descr="rteu_logo_kucuk.jpg"/>
+          <p:cNvPicPr>
+            <a:picLocks noChangeAspect="1"/>
+          </p:cNvPicPr>
+          <p:nvPr/>
+        </p:nvPicPr>
+        <p:blipFill>
+          <a:blip r:embed="rId2"/>
+          <a:stretch>
+            <a:fillRect/>
+          </a:stretch>
+        </p:blipFill>
+        <p:spPr>
+          <a:xfrm>
+            <a:off x="640080" y="164592"/>
+            <a:ext cx="242773" cy="329184"/>
+          </a:xfrm>
+          <a:prstGeom prst="rect">
+            <a:avLst/>
+          </a:prstGeom>
+        </p:spPr>
+      </p:pic>
+      <p:sp>
+        <p:nvSpPr>
+          <p:cNvPr id="3" name="TextBox 2"/>
+          <p:cNvSpPr txBox="1"/>
+          <p:nvPr/>
+        </p:nvSpPr>
+        <p:spPr>
+          <a:xfrm>
+            <a:off x="1051560" y="182880"/>
+            <a:ext cx="7315200" cy="320040"/>
+          </a:xfrm>
+          <a:prstGeom prst="rect">
+            <a:avLst/>
+          </a:prstGeom>
+          <a:noFill/>
+        </p:spPr>
+        <p:txBody>
+          <a:bodyPr wrap="square" lIns="45720" rIns="45720">
+            <a:spAutoFit/>
+          </a:bodyPr>
+          <a:lstStyle/>
+          <a:p>
+            <a:r>
+              <a:rPr sz="1100" b="0">
+                <a:solidFill>
+                  <a:srgbClr val="5B6770"/>
+                </a:solidFill>
+              </a:rPr>
+              <a:t>CEN429 Güvenli Programlama · Hafta 12</a:t>
+            </a:r>
+          </a:p>
+        </p:txBody>
+      </p:sp>
+      <p:sp>
+        <p:nvSpPr>
+          <p:cNvPr id="4" name="TextBox 3"/>
+          <p:cNvSpPr txBox="1"/>
+          <p:nvPr/>
+        </p:nvSpPr>
+        <p:spPr>
+          <a:xfrm>
+            <a:off x="640080" y="6446520"/>
+            <a:ext cx="7315200" cy="274320"/>
+          </a:xfrm>
+          <a:prstGeom prst="rect">
+            <a:avLst/>
+          </a:prstGeom>
+          <a:noFill/>
+        </p:spPr>
+        <p:txBody>
+          <a:bodyPr wrap="square" lIns="45720" rIns="45720">
+            <a:spAutoFit/>
+          </a:bodyPr>
+          <a:lstStyle/>
+          <a:p>
+            <a:r>
+              <a:rPr sz="1000" b="0">
+                <a:solidFill>
+                  <a:srgbClr val="5B6770"/>
+                </a:solidFill>
+              </a:rPr>
+              <a:t>RTEÜ Bilgisayar Mühendisliği · 2026-2027 Güz</a:t>
+            </a:r>
+          </a:p>
+        </p:txBody>
+      </p:sp>
+      <p:sp>
+        <p:nvSpPr>
+          <p:cNvPr id="5" name="TextBox 4"/>
+          <p:cNvSpPr txBox="1"/>
+          <p:nvPr/>
+        </p:nvSpPr>
+        <p:spPr>
+          <a:xfrm>
+            <a:off x="10637215" y="6446520"/>
+            <a:ext cx="914400" cy="274320"/>
+          </a:xfrm>
+          <a:prstGeom prst="rect">
+            <a:avLst/>
+          </a:prstGeom>
+          <a:noFill/>
+        </p:spPr>
+        <p:txBody>
+          <a:bodyPr wrap="square" lIns="45720" rIns="45720">
+            <a:spAutoFit/>
+          </a:bodyPr>
+          <a:lstStyle/>
+          <a:p>
+            <a:pPr algn="r"/>
+            <a:r>
+              <a:rPr sz="1000" b="0">
+                <a:solidFill>
+                  <a:srgbClr val="5B6770"/>
+                </a:solidFill>
+              </a:rPr>
+              <a:t>152</a:t>
+            </a:r>
+          </a:p>
+        </p:txBody>
+      </p:sp>
+      <p:sp>
+        <p:nvSpPr>
+          <p:cNvPr id="6" name="TextBox 5"/>
+          <p:cNvSpPr txBox="1"/>
+          <p:nvPr/>
+        </p:nvSpPr>
+        <p:spPr>
+          <a:xfrm>
+            <a:off x="640080" y="548640"/>
+            <a:ext cx="10911535" cy="731520"/>
+          </a:xfrm>
+          <a:prstGeom prst="rect">
+            <a:avLst/>
+          </a:prstGeom>
+          <a:noFill/>
+        </p:spPr>
+        <p:txBody>
+          <a:bodyPr wrap="square" lIns="45720" rIns="45720" anchor="ctr">
+            <a:spAutoFit/>
+          </a:bodyPr>
+          <a:lstStyle/>
+          <a:p>
+            <a:r>
+              <a:rPr sz="3000" b="1">
+                <a:solidFill>
+                  <a:srgbClr val="006D77"/>
+                </a:solidFill>
+              </a:rPr>
+              <a:t>⚠️ Etik (tekrar)</a:t>
+            </a:r>
+          </a:p>
+        </p:txBody>
+      </p:sp>
+      <p:sp>
+        <p:nvSpPr>
+          <p:cNvPr id="7" name="TextBox 6"/>
+          <p:cNvSpPr txBox="1"/>
+          <p:nvPr/>
+        </p:nvSpPr>
+        <p:spPr>
+          <a:xfrm>
+            <a:off x="640080" y="1325880"/>
+            <a:ext cx="10911535" cy="1219200"/>
+          </a:xfrm>
+          <a:prstGeom prst="rect">
+            <a:avLst/>
+          </a:prstGeom>
+          <a:noFill/>
+        </p:spPr>
+        <p:txBody>
+          <a:bodyPr wrap="square" lIns="45720" rIns="45720">
+            <a:spAutoFit/>
+          </a:bodyPr>
+          <a:lstStyle/>
+          <a:p>
+            <a:pPr>
+              <a:spcAft>
+                <a:spcPts val="300"/>
+              </a:spcAft>
+            </a:pPr>
+            <a:r>
+              <a:rPr sz="2000" b="1">
+                <a:solidFill>
+                  <a:srgbClr val="006D77"/>
+                </a:solidFill>
+              </a:rPr>
+              <a:t>• </a:t>
+            </a:r>
+            <a:r>
+              <a:rPr sz="2000" b="0">
+                <a:solidFill>
+                  <a:srgbClr val="1F2D3A"/>
+                </a:solidFill>
+              </a:rPr>
+              <a:t>Test yalnız </a:t>
+            </a:r>
+            <a:r>
+              <a:rPr sz="2000" b="1">
+                <a:solidFill>
+                  <a:srgbClr val="1F2D3A"/>
+                </a:solidFill>
+              </a:rPr>
+              <a:t>kendi</a:t>
+            </a:r>
+            <a:r>
+              <a:rPr sz="2000" b="0">
+                <a:solidFill>
+                  <a:srgbClr val="1F2D3A"/>
+                </a:solidFill>
+              </a:rPr>
+              <a:t> projeniz ve yetkili olduğunuz sistemlerde.</a:t>
+            </a:r>
+          </a:p>
+          <a:p>
+            <a:pPr>
+              <a:spcAft>
+                <a:spcPts val="300"/>
+              </a:spcAft>
+            </a:pPr>
+            <a:r>
+              <a:rPr sz="2000" b="1">
+                <a:solidFill>
+                  <a:srgbClr val="006D77"/>
+                </a:solidFill>
+              </a:rPr>
+              <a:t>• </a:t>
+            </a:r>
+            <a:r>
+              <a:rPr sz="2000" b="0">
+                <a:solidFill>
+                  <a:srgbClr val="1F2D3A"/>
+                </a:solidFill>
+              </a:rPr>
+              <a:t>İzinsiz test suçtur.</a:t>
+            </a:r>
+          </a:p>
+          <a:p>
+            <a:pPr>
+              <a:spcAft>
+                <a:spcPts val="300"/>
+              </a:spcAft>
+            </a:pPr>
+            <a:r>
+              <a:rPr sz="2000" b="1">
+                <a:solidFill>
+                  <a:srgbClr val="006D77"/>
+                </a:solidFill>
+              </a:rPr>
+              <a:t>• </a:t>
+            </a:r>
+            <a:r>
+              <a:rPr sz="2000" b="0">
+                <a:solidFill>
+                  <a:srgbClr val="1F2D3A"/>
+                </a:solidFill>
+              </a:rPr>
+              <a:t>Bütün veriler </a:t>
+            </a:r>
+            <a:r>
+              <a:rPr sz="2000" b="1">
+                <a:solidFill>
+                  <a:srgbClr val="1F2D3A"/>
+                </a:solidFill>
+              </a:rPr>
+              <a:t>sentetik</a:t>
+            </a:r>
+            <a:r>
+              <a:rPr sz="2000" b="0">
+                <a:solidFill>
+                  <a:srgbClr val="1F2D3A"/>
+                </a:solidFill>
+              </a:rPr>
+              <a:t>; depoda gerçek sır/kişisel veri yok.</a:t>
+            </a:r>
+          </a:p>
+        </p:txBody>
+      </p:sp>
+    </p:spTree>
+  </p:cSld>
+  <p:clrMapOvr>
+    <a:masterClrMapping/>
+  </p:clrMapOvr>
+</p:sld>
+</file>
+
+<file path=ppt/slides/slide153.xml><?xml version="1.0" encoding="utf-8"?>
 <p:sld xmlns:a="http://schemas.openxmlformats.org/drawingml/2006/main" xmlns:p="http://schemas.openxmlformats.org/presentationml/2006/main" xmlns:r="http://schemas.openxmlformats.org/officeDocument/2006/relationships">
   <p:cSld>
     <p:bg>
@@ -21606,7 +21806,7 @@
                   <a:srgbClr val="D8F0F2"/>
                 </a:solidFill>
               </a:rPr>
-              <a:t>152</a:t>
+              <a:t>153</a:t>
             </a:r>
           </a:p>
         </p:txBody>
@@ -21641,257 +21841,6 @@
                 </a:solidFill>
               </a:rPr>
               <a:t>Çözümlü kendini sınama</a:t>
-            </a:r>
-          </a:p>
-        </p:txBody>
-      </p:sp>
-    </p:spTree>
-  </p:cSld>
-  <p:clrMapOvr>
-    <a:masterClrMapping/>
-  </p:clrMapOvr>
-</p:sld>
-</file>
-
-<file path=ppt/slides/slide153.xml><?xml version="1.0" encoding="utf-8"?>
-<p:sld xmlns:a="http://schemas.openxmlformats.org/drawingml/2006/main" xmlns:p="http://schemas.openxmlformats.org/presentationml/2006/main" xmlns:r="http://schemas.openxmlformats.org/officeDocument/2006/relationships">
-  <p:cSld>
-    <p:spTree>
-      <p:nvGrpSpPr>
-        <p:cNvPr id="1" name=""/>
-        <p:cNvGrpSpPr/>
-        <p:nvPr/>
-      </p:nvGrpSpPr>
-      <p:grpSpPr/>
-      <p:pic>
-        <p:nvPicPr>
-          <p:cNvPr id="2" name="Picture 1" descr="rteu_logo_kucuk.jpg"/>
-          <p:cNvPicPr>
-            <a:picLocks noChangeAspect="1"/>
-          </p:cNvPicPr>
-          <p:nvPr/>
-        </p:nvPicPr>
-        <p:blipFill>
-          <a:blip r:embed="rId2"/>
-          <a:stretch>
-            <a:fillRect/>
-          </a:stretch>
-        </p:blipFill>
-        <p:spPr>
-          <a:xfrm>
-            <a:off x="640080" y="164592"/>
-            <a:ext cx="242773" cy="329184"/>
-          </a:xfrm>
-          <a:prstGeom prst="rect">
-            <a:avLst/>
-          </a:prstGeom>
-        </p:spPr>
-      </p:pic>
-      <p:sp>
-        <p:nvSpPr>
-          <p:cNvPr id="3" name="TextBox 2"/>
-          <p:cNvSpPr txBox="1"/>
-          <p:nvPr/>
-        </p:nvSpPr>
-        <p:spPr>
-          <a:xfrm>
-            <a:off x="1051560" y="182880"/>
-            <a:ext cx="7315200" cy="320040"/>
-          </a:xfrm>
-          <a:prstGeom prst="rect">
-            <a:avLst/>
-          </a:prstGeom>
-          <a:noFill/>
-        </p:spPr>
-        <p:txBody>
-          <a:bodyPr wrap="square" lIns="45720" rIns="45720">
-            <a:spAutoFit/>
-          </a:bodyPr>
-          <a:lstStyle/>
-          <a:p>
-            <a:r>
-              <a:rPr sz="1100" b="0">
-                <a:solidFill>
-                  <a:srgbClr val="5B6770"/>
-                </a:solidFill>
-              </a:rPr>
-              <a:t>CEN429 Güvenli Programlama · Hafta 12</a:t>
-            </a:r>
-          </a:p>
-        </p:txBody>
-      </p:sp>
-      <p:sp>
-        <p:nvSpPr>
-          <p:cNvPr id="4" name="TextBox 3"/>
-          <p:cNvSpPr txBox="1"/>
-          <p:nvPr/>
-        </p:nvSpPr>
-        <p:spPr>
-          <a:xfrm>
-            <a:off x="640080" y="6446520"/>
-            <a:ext cx="7315200" cy="274320"/>
-          </a:xfrm>
-          <a:prstGeom prst="rect">
-            <a:avLst/>
-          </a:prstGeom>
-          <a:noFill/>
-        </p:spPr>
-        <p:txBody>
-          <a:bodyPr wrap="square" lIns="45720" rIns="45720">
-            <a:spAutoFit/>
-          </a:bodyPr>
-          <a:lstStyle/>
-          <a:p>
-            <a:r>
-              <a:rPr sz="1000" b="0">
-                <a:solidFill>
-                  <a:srgbClr val="5B6770"/>
-                </a:solidFill>
-              </a:rPr>
-              <a:t>RTEÜ Bilgisayar Mühendisliği · 2026-2027 Güz</a:t>
-            </a:r>
-          </a:p>
-        </p:txBody>
-      </p:sp>
-      <p:sp>
-        <p:nvSpPr>
-          <p:cNvPr id="5" name="TextBox 4"/>
-          <p:cNvSpPr txBox="1"/>
-          <p:nvPr/>
-        </p:nvSpPr>
-        <p:spPr>
-          <a:xfrm>
-            <a:off x="10637215" y="6446520"/>
-            <a:ext cx="914400" cy="274320"/>
-          </a:xfrm>
-          <a:prstGeom prst="rect">
-            <a:avLst/>
-          </a:prstGeom>
-          <a:noFill/>
-        </p:spPr>
-        <p:txBody>
-          <a:bodyPr wrap="square" lIns="45720" rIns="45720">
-            <a:spAutoFit/>
-          </a:bodyPr>
-          <a:lstStyle/>
-          <a:p>
-            <a:pPr algn="r"/>
-            <a:r>
-              <a:rPr sz="1000" b="0">
-                <a:solidFill>
-                  <a:srgbClr val="5B6770"/>
-                </a:solidFill>
-              </a:rPr>
-              <a:t>153</a:t>
-            </a:r>
-          </a:p>
-        </p:txBody>
-      </p:sp>
-      <p:sp>
-        <p:nvSpPr>
-          <p:cNvPr id="6" name="TextBox 5"/>
-          <p:cNvSpPr txBox="1"/>
-          <p:nvPr/>
-        </p:nvSpPr>
-        <p:spPr>
-          <a:xfrm>
-            <a:off x="640080" y="548640"/>
-            <a:ext cx="10911535" cy="731520"/>
-          </a:xfrm>
-          <a:prstGeom prst="rect">
-            <a:avLst/>
-          </a:prstGeom>
-          <a:noFill/>
-        </p:spPr>
-        <p:txBody>
-          <a:bodyPr wrap="square" lIns="45720" rIns="45720" anchor="ctr">
-            <a:spAutoFit/>
-          </a:bodyPr>
-          <a:lstStyle/>
-          <a:p>
-            <a:r>
-              <a:rPr sz="3000" b="1">
-                <a:solidFill>
-                  <a:srgbClr val="006D77"/>
-                </a:solidFill>
-              </a:rPr>
-              <a:t>Soru 1</a:t>
-            </a:r>
-          </a:p>
-        </p:txBody>
-      </p:sp>
-      <p:sp>
-        <p:nvSpPr>
-          <p:cNvPr id="7" name="TextBox 6"/>
-          <p:cNvSpPr txBox="1"/>
-          <p:nvPr/>
-        </p:nvSpPr>
-        <p:spPr>
-          <a:xfrm>
-            <a:off x="640080" y="1325880"/>
-            <a:ext cx="10911535" cy="439928"/>
-          </a:xfrm>
-          <a:prstGeom prst="rect">
-            <a:avLst/>
-          </a:prstGeom>
-          <a:noFill/>
-        </p:spPr>
-        <p:txBody>
-          <a:bodyPr wrap="square" lIns="45720" rIns="45720">
-            <a:spAutoFit/>
-          </a:bodyPr>
-          <a:lstStyle/>
-          <a:p>
-            <a:pPr algn="l"/>
-            <a:r>
-              <a:rPr sz="2000" b="1">
-                <a:solidFill>
-                  <a:srgbClr val="1F2D3A"/>
-                </a:solidFill>
-              </a:rPr>
-              <a:t>13 adımı üç aşamada özetleyin.</a:t>
-            </a:r>
-          </a:p>
-        </p:txBody>
-      </p:sp>
-      <p:sp>
-        <p:nvSpPr>
-          <p:cNvPr id="8" name="TextBox 7"/>
-          <p:cNvSpPr txBox="1"/>
-          <p:nvPr/>
-        </p:nvSpPr>
-        <p:spPr>
-          <a:xfrm>
-            <a:off x="640080" y="1875536"/>
-            <a:ext cx="10911535" cy="1100327"/>
-          </a:xfrm>
-          <a:prstGeom prst="rect">
-            <a:avLst/>
-          </a:prstGeom>
-          <a:noFill/>
-        </p:spPr>
-        <p:txBody>
-          <a:bodyPr wrap="square" lIns="45720" rIns="45720">
-            <a:spAutoFit/>
-          </a:bodyPr>
-          <a:lstStyle/>
-          <a:p>
-            <a:pPr algn="l"/>
-            <a:r>
-              <a:rPr sz="2000" b="1">
-                <a:solidFill>
-                  <a:srgbClr val="1F2D3A"/>
-                </a:solidFill>
-              </a:rPr>
-              <a:t>Cevap:</a:t>
-            </a:r>
-            <a:r>
-              <a:rPr sz="2000" b="0">
-                <a:solidFill>
-                  <a:srgbClr val="1F2D3A"/>
-                </a:solidFill>
-              </a:rPr>
-              <a:t> Hazırlık (TOE, belge, gereksinim şablonu, atölye) → Değerlendirme (kod inceleme, zafiyet, sızma, işlevsel) → Sonuç (bulgu, etki analizi, delta, kalan risk, değişiklik yönetimi).</a:t>
             </a:r>
           </a:p>
         </p:txBody>
@@ -22066,7 +22015,7 @@
                   <a:srgbClr val="006D77"/>
                 </a:solidFill>
               </a:rPr>
-              <a:t>Soru 2</a:t>
+              <a:t>Soru 1</a:t>
             </a:r>
           </a:p>
         </p:txBody>
@@ -22100,7 +22049,7 @@
                   <a:srgbClr val="1F2D3A"/>
                 </a:solidFill>
               </a:rPr>
-              <a:t>Değerlendiricinin iki varsayımı? Sonucu ne?</a:t>
+              <a:t>13 adımı üç aşamada özetleyin.</a:t>
             </a:r>
           </a:p>
         </p:txBody>
@@ -22114,7 +22063,7 @@
         <p:spPr>
           <a:xfrm>
             <a:off x="640080" y="1875536"/>
-            <a:ext cx="10911535" cy="770128"/>
+            <a:ext cx="10911535" cy="1100327"/>
           </a:xfrm>
           <a:prstGeom prst="rect">
             <a:avLst/>
@@ -22142,23 +22091,7 @@
                   <a:srgbClr val="1F2D3A"/>
                 </a:solidFill>
               </a:rPr>
-              <a:t> (1) beyaz kutu — tüm kaynak/belge erişimi; (2) platform güvenilmez. Sonuç: korumanın var olması yetmez, </a:t>
-            </a:r>
-            <a:r>
-              <a:rPr sz="2000" b="1">
-                <a:solidFill>
-                  <a:srgbClr val="1F2D3A"/>
-                </a:solidFill>
-              </a:rPr>
-              <a:t>ne kadar kolay aşıldığı</a:t>
-            </a:r>
-            <a:r>
-              <a:rPr sz="2000" b="0">
-                <a:solidFill>
-                  <a:srgbClr val="1F2D3A"/>
-                </a:solidFill>
-              </a:rPr>
-              <a:t> ölçülür.</a:t>
+              <a:t> Hazırlık (TOE, belge, gereksinim şablonu, atölye) → Değerlendirme (kod inceleme, zafiyet, sızma, işlevsel) → Sonuç (bulgu, etki analizi, delta, kalan risk, değişiklik yönetimi).</a:t>
             </a:r>
           </a:p>
         </p:txBody>
@@ -22333,7 +22266,7 @@
                   <a:srgbClr val="006D77"/>
                 </a:solidFill>
               </a:rPr>
-              <a:t>Soru 3</a:t>
+              <a:t>Soru 2</a:t>
             </a:r>
           </a:p>
         </p:txBody>
@@ -22367,7 +22300,7 @@
                   <a:srgbClr val="1F2D3A"/>
                 </a:solidFill>
               </a:rPr>
-              <a:t>Yöntemleri neden ucuzdan pahalıya sıralarız?</a:t>
+              <a:t>Değerlendiricinin iki varsayımı? Sonucu ne?</a:t>
             </a:r>
           </a:p>
         </p:txBody>
@@ -22381,7 +22314,7 @@
         <p:spPr>
           <a:xfrm>
             <a:off x="640080" y="1875536"/>
-            <a:ext cx="10911535" cy="1100327"/>
+            <a:ext cx="10911535" cy="770128"/>
           </a:xfrm>
           <a:prstGeom prst="rect">
             <a:avLst/>
@@ -22409,7 +22342,23 @@
                   <a:srgbClr val="1F2D3A"/>
                 </a:solidFill>
               </a:rPr>
-              <a:t> Ucuz/geniş yöntemler (SAST) kolay bulguları temizler; pahalı/derin yöntem (pentest) böylece gerçek, birleşik sorunlara odaklanır. Zaman ve maliyet verimliliği.</a:t>
+              <a:t> (1) beyaz kutu — tüm kaynak/belge erişimi; (2) platform güvenilmez. Sonuç: korumanın var olması yetmez, </a:t>
+            </a:r>
+            <a:r>
+              <a:rPr sz="2000" b="1">
+                <a:solidFill>
+                  <a:srgbClr val="1F2D3A"/>
+                </a:solidFill>
+              </a:rPr>
+              <a:t>ne kadar kolay aşıldığı</a:t>
+            </a:r>
+            <a:r>
+              <a:rPr sz="2000" b="0">
+                <a:solidFill>
+                  <a:srgbClr val="1F2D3A"/>
+                </a:solidFill>
+              </a:rPr>
+              <a:t> ölçülür.</a:t>
             </a:r>
           </a:p>
         </p:txBody>
@@ -22584,7 +22533,7 @@
                   <a:srgbClr val="006D77"/>
                 </a:solidFill>
               </a:rPr>
-              <a:t>Soru 4</a:t>
+              <a:t>Soru 3</a:t>
             </a:r>
           </a:p>
         </p:txBody>
@@ -22618,7 +22567,7 @@
                   <a:srgbClr val="1F2D3A"/>
                 </a:solidFill>
               </a:rPr>
-              <a:t>ISO 27001 ile Ortak Kriterler neyi ayrı sertifikalar?</a:t>
+              <a:t>Yöntemleri neden ucuzdan pahalıya sıralarız?</a:t>
             </a:r>
           </a:p>
         </p:txBody>
@@ -22632,7 +22581,7 @@
         <p:spPr>
           <a:xfrm>
             <a:off x="640080" y="1875536"/>
-            <a:ext cx="10911535" cy="439928"/>
+            <a:ext cx="10911535" cy="1100327"/>
           </a:xfrm>
           <a:prstGeom prst="rect">
             <a:avLst/>
@@ -22660,39 +22609,7 @@
                   <a:srgbClr val="1F2D3A"/>
                 </a:solidFill>
               </a:rPr>
-              <a:t> ISO 27001 </a:t>
-            </a:r>
-            <a:r>
-              <a:rPr sz="2000" b="1">
-                <a:solidFill>
-                  <a:srgbClr val="1F2D3A"/>
-                </a:solidFill>
-              </a:rPr>
-              <a:t>kurumu</a:t>
-            </a:r>
-            <a:r>
-              <a:rPr sz="2000" b="0">
-                <a:solidFill>
-                  <a:srgbClr val="1F2D3A"/>
-                </a:solidFill>
-              </a:rPr>
-              <a:t> (süreç), Ortak Kriterler </a:t>
-            </a:r>
-            <a:r>
-              <a:rPr sz="2000" b="1">
-                <a:solidFill>
-                  <a:srgbClr val="1F2D3A"/>
-                </a:solidFill>
-              </a:rPr>
-              <a:t>ürünü</a:t>
-            </a:r>
-            <a:r>
-              <a:rPr sz="2000" b="0">
-                <a:solidFill>
-                  <a:srgbClr val="1F2D3A"/>
-                </a:solidFill>
-              </a:rPr>
-              <a:t>. Biri diğerini gerektirmez.</a:t>
+              <a:t> Ucuz/geniş yöntemler (SAST) kolay bulguları temizler; pahalı/derin yöntem (pentest) böylece gerçek, birleşik sorunlara odaklanır. Zaman ve maliyet verimliliği.</a:t>
             </a:r>
           </a:p>
         </p:txBody>
@@ -22867,7 +22784,7 @@
                   <a:srgbClr val="006D77"/>
                 </a:solidFill>
               </a:rPr>
-              <a:t>Soru 5</a:t>
+              <a:t>Soru 4</a:t>
             </a:r>
           </a:p>
         </p:txBody>
@@ -22901,7 +22818,7 @@
                   <a:srgbClr val="1F2D3A"/>
                 </a:solidFill>
               </a:rPr>
-              <a:t>Saldırı potansiyelinin beş faktörü? Düşük puan neden ciddi?</a:t>
+              <a:t>ISO 27001 ile Ortak Kriterler neyi ayrı sertifikalar?</a:t>
             </a:r>
           </a:p>
         </p:txBody>
@@ -22915,7 +22832,7 @@
         <p:spPr>
           <a:xfrm>
             <a:off x="640080" y="1875536"/>
-            <a:ext cx="10911535" cy="770128"/>
+            <a:ext cx="10911535" cy="439928"/>
           </a:xfrm>
           <a:prstGeom prst="rect">
             <a:avLst/>
@@ -22943,23 +22860,39 @@
                   <a:srgbClr val="1F2D3A"/>
                 </a:solidFill>
               </a:rPr>
-              <a:t> süre, uzmanlık, hedef bilgisi, fırsat penceresi, ekipman. Düşük toplam = kolay saldırı = </a:t>
-            </a:r>
-            <a:r>
-              <a:rPr sz="2000" b="1">
-                <a:solidFill>
-                  <a:srgbClr val="1F2D3A"/>
-                </a:solidFill>
-              </a:rPr>
-              <a:t>ciddi bulgu</a:t>
-            </a:r>
-            <a:r>
-              <a:rPr sz="2000" b="0">
-                <a:solidFill>
-                  <a:srgbClr val="1F2D3A"/>
-                </a:solidFill>
-              </a:rPr>
-              <a:t>.</a:t>
+              <a:t> ISO 27001 </a:t>
+            </a:r>
+            <a:r>
+              <a:rPr sz="2000" b="1">
+                <a:solidFill>
+                  <a:srgbClr val="1F2D3A"/>
+                </a:solidFill>
+              </a:rPr>
+              <a:t>kurumu</a:t>
+            </a:r>
+            <a:r>
+              <a:rPr sz="2000" b="0">
+                <a:solidFill>
+                  <a:srgbClr val="1F2D3A"/>
+                </a:solidFill>
+              </a:rPr>
+              <a:t> (süreç), Ortak Kriterler </a:t>
+            </a:r>
+            <a:r>
+              <a:rPr sz="2000" b="1">
+                <a:solidFill>
+                  <a:srgbClr val="1F2D3A"/>
+                </a:solidFill>
+              </a:rPr>
+              <a:t>ürünü</a:t>
+            </a:r>
+            <a:r>
+              <a:rPr sz="2000" b="0">
+                <a:solidFill>
+                  <a:srgbClr val="1F2D3A"/>
+                </a:solidFill>
+              </a:rPr>
+              <a:t>. Biri diğerini gerektirmez.</a:t>
             </a:r>
           </a:p>
         </p:txBody>
@@ -23134,7 +23067,7 @@
                   <a:srgbClr val="006D77"/>
                 </a:solidFill>
               </a:rPr>
-              <a:t>Soru 6</a:t>
+              <a:t>Soru 5</a:t>
             </a:r>
           </a:p>
         </p:txBody>
@@ -23168,7 +23101,7 @@
                   <a:srgbClr val="1F2D3A"/>
                 </a:solidFill>
               </a:rPr>
-              <a:t>Saldırı potansiyeli ile CVSS neyi ölçer? Neden birlikte?</a:t>
+              <a:t>Saldırı potansiyelinin beş faktörü? Düşük puan neden ciddi?</a:t>
             </a:r>
           </a:p>
         </p:txBody>
@@ -23210,39 +23143,23 @@
                   <a:srgbClr val="1F2D3A"/>
                 </a:solidFill>
               </a:rPr>
-              <a:t> Saldırı potansiyeli </a:t>
-            </a:r>
-            <a:r>
-              <a:rPr sz="2000" b="1">
-                <a:solidFill>
-                  <a:srgbClr val="1F2D3A"/>
-                </a:solidFill>
-              </a:rPr>
-              <a:t>olabilirliği</a:t>
-            </a:r>
-            <a:r>
-              <a:rPr sz="2000" b="0">
-                <a:solidFill>
-                  <a:srgbClr val="1F2D3A"/>
-                </a:solidFill>
-              </a:rPr>
-              <a:t> (zorluk), CVSS </a:t>
-            </a:r>
-            <a:r>
-              <a:rPr sz="2000" b="1">
-                <a:solidFill>
-                  <a:srgbClr val="1F2D3A"/>
-                </a:solidFill>
-              </a:rPr>
-              <a:t>etkiyi</a:t>
-            </a:r>
-            <a:r>
-              <a:rPr sz="2000" b="0">
-                <a:solidFill>
-                  <a:srgbClr val="1F2D3A"/>
-                </a:solidFill>
-              </a:rPr>
-              <a:t> (C/I/A kaybı). Önceliklendirme için ikisi birden verilir.</a:t>
+              <a:t> süre, uzmanlık, hedef bilgisi, fırsat penceresi, ekipman. Düşük toplam = kolay saldırı = </a:t>
+            </a:r>
+            <a:r>
+              <a:rPr sz="2000" b="1">
+                <a:solidFill>
+                  <a:srgbClr val="1F2D3A"/>
+                </a:solidFill>
+              </a:rPr>
+              <a:t>ciddi bulgu</a:t>
+            </a:r>
+            <a:r>
+              <a:rPr sz="2000" b="0">
+                <a:solidFill>
+                  <a:srgbClr val="1F2D3A"/>
+                </a:solidFill>
+              </a:rPr>
+              <a:t>.</a:t>
             </a:r>
           </a:p>
         </p:txBody>
@@ -23417,7 +23334,7 @@
                   <a:srgbClr val="006D77"/>
                 </a:solidFill>
               </a:rPr>
-              <a:t>Soru 7</a:t>
+              <a:t>Soru 6</a:t>
             </a:r>
           </a:p>
         </p:txBody>
@@ -23451,7 +23368,7 @@
                   <a:srgbClr val="1F2D3A"/>
                 </a:solidFill>
               </a:rPr>
-              <a:t>Bulgu–öneri–aksiyon döngüsü. Bir bulgu "açık değil" diye nasıl kapanır?</a:t>
+              <a:t>Saldırı potansiyeli ile CVSS neyi ölçer? Neden birlikte?</a:t>
             </a:r>
           </a:p>
         </p:txBody>
@@ -23493,23 +23410,39 @@
                   <a:srgbClr val="1F2D3A"/>
                 </a:solidFill>
               </a:rPr>
-              <a:t> Laboratuvar öneri, geliştirici aksiyon üretir. Bazı bulgular güvenlik açığı değil </a:t>
-            </a:r>
-            <a:r>
-              <a:rPr sz="2000" b="1">
-                <a:solidFill>
-                  <a:srgbClr val="1F2D3A"/>
-                </a:solidFill>
-              </a:rPr>
-              <a:t>iyi uygulama önerisi</a:t>
-            </a:r>
-            <a:r>
-              <a:rPr sz="2000" b="0">
-                <a:solidFill>
-                  <a:srgbClr val="1F2D3A"/>
-                </a:solidFill>
-              </a:rPr>
-              <a:t> olarak, gerekçeyle kapanır.</a:t>
+              <a:t> Saldırı potansiyeli </a:t>
+            </a:r>
+            <a:r>
+              <a:rPr sz="2000" b="1">
+                <a:solidFill>
+                  <a:srgbClr val="1F2D3A"/>
+                </a:solidFill>
+              </a:rPr>
+              <a:t>olabilirliği</a:t>
+            </a:r>
+            <a:r>
+              <a:rPr sz="2000" b="0">
+                <a:solidFill>
+                  <a:srgbClr val="1F2D3A"/>
+                </a:solidFill>
+              </a:rPr>
+              <a:t> (zorluk), CVSS </a:t>
+            </a:r>
+            <a:r>
+              <a:rPr sz="2000" b="1">
+                <a:solidFill>
+                  <a:srgbClr val="1F2D3A"/>
+                </a:solidFill>
+              </a:rPr>
+              <a:t>etkiyi</a:t>
+            </a:r>
+            <a:r>
+              <a:rPr sz="2000" b="0">
+                <a:solidFill>
+                  <a:srgbClr val="1F2D3A"/>
+                </a:solidFill>
+              </a:rPr>
+              <a:t> (C/I/A kaybı). Önceliklendirme için ikisi birden verilir.</a:t>
             </a:r>
           </a:p>
         </p:txBody>
@@ -24025,7 +23958,7 @@
                   <a:srgbClr val="006D77"/>
                 </a:solidFill>
               </a:rPr>
-              <a:t>Soru 8</a:t>
+              <a:t>Soru 7</a:t>
             </a:r>
           </a:p>
         </p:txBody>
@@ -24059,7 +23992,7 @@
                   <a:srgbClr val="1F2D3A"/>
                 </a:solidFill>
               </a:rPr>
-              <a:t>Etki analizi ile delta değerlendirme farkı? Kimin işi?</a:t>
+              <a:t>Bulgu–öneri–aksiyon döngüsü. Bir bulgu "açık değil" diye nasıl kapanır?</a:t>
             </a:r>
           </a:p>
         </p:txBody>
@@ -24101,39 +24034,23 @@
                   <a:srgbClr val="1F2D3A"/>
                 </a:solidFill>
               </a:rPr>
-              <a:t> Etki analizi değişikliğin etkisini </a:t>
-            </a:r>
-            <a:r>
-              <a:rPr sz="2000" b="1">
-                <a:solidFill>
-                  <a:srgbClr val="1F2D3A"/>
-                </a:solidFill>
-              </a:rPr>
-              <a:t>belgeler</a:t>
-            </a:r>
-            <a:r>
-              <a:rPr sz="2000" b="0">
-                <a:solidFill>
-                  <a:srgbClr val="1F2D3A"/>
-                </a:solidFill>
-              </a:rPr>
-              <a:t> (geliştirici); delta yalnız değişeni </a:t>
-            </a:r>
-            <a:r>
-              <a:rPr sz="2000" b="1">
-                <a:solidFill>
-                  <a:srgbClr val="1F2D3A"/>
-                </a:solidFill>
-              </a:rPr>
-              <a:t>yeniden değerlendirir</a:t>
-            </a:r>
-            <a:r>
-              <a:rPr sz="2000" b="0">
-                <a:solidFill>
-                  <a:srgbClr val="1F2D3A"/>
-                </a:solidFill>
-              </a:rPr>
-              <a:t> (laboratuvar).</a:t>
+              <a:t> Laboratuvar öneri, geliştirici aksiyon üretir. Bazı bulgular güvenlik açığı değil </a:t>
+            </a:r>
+            <a:r>
+              <a:rPr sz="2000" b="1">
+                <a:solidFill>
+                  <a:srgbClr val="1F2D3A"/>
+                </a:solidFill>
+              </a:rPr>
+              <a:t>iyi uygulama önerisi</a:t>
+            </a:r>
+            <a:r>
+              <a:rPr sz="2000" b="0">
+                <a:solidFill>
+                  <a:srgbClr val="1F2D3A"/>
+                </a:solidFill>
+              </a:rPr>
+              <a:t> olarak, gerekçeyle kapanır.</a:t>
             </a:r>
           </a:p>
         </p:txBody>
@@ -24308,7 +24225,7 @@
                   <a:srgbClr val="006D77"/>
                 </a:solidFill>
               </a:rPr>
-              <a:t>Soru 9</a:t>
+              <a:t>Soru 8</a:t>
             </a:r>
           </a:p>
         </p:txBody>
@@ -24342,7 +24259,7 @@
                   <a:srgbClr val="1F2D3A"/>
                 </a:solidFill>
               </a:rPr>
-              <a:t>Sızma testi planının dört başlığı?</a:t>
+              <a:t>Etki analizi ile delta değerlendirme farkı? Kimin işi?</a:t>
             </a:r>
           </a:p>
         </p:txBody>
@@ -24384,7 +24301,39 @@
                   <a:srgbClr val="1F2D3A"/>
                 </a:solidFill>
               </a:rPr>
-              <a:t> kapsam, angajman kuralları, yöntem, test şablonu. Her biri sonucu meşru, tekrarlanabilir ve güvenli kılar.</a:t>
+              <a:t> Etki analizi değişikliğin etkisini </a:t>
+            </a:r>
+            <a:r>
+              <a:rPr sz="2000" b="1">
+                <a:solidFill>
+                  <a:srgbClr val="1F2D3A"/>
+                </a:solidFill>
+              </a:rPr>
+              <a:t>belgeler</a:t>
+            </a:r>
+            <a:r>
+              <a:rPr sz="2000" b="0">
+                <a:solidFill>
+                  <a:srgbClr val="1F2D3A"/>
+                </a:solidFill>
+              </a:rPr>
+              <a:t> (geliştirici); delta yalnız değişeni </a:t>
+            </a:r>
+            <a:r>
+              <a:rPr sz="2000" b="1">
+                <a:solidFill>
+                  <a:srgbClr val="1F2D3A"/>
+                </a:solidFill>
+              </a:rPr>
+              <a:t>yeniden değerlendirir</a:t>
+            </a:r>
+            <a:r>
+              <a:rPr sz="2000" b="0">
+                <a:solidFill>
+                  <a:srgbClr val="1F2D3A"/>
+                </a:solidFill>
+              </a:rPr>
+              <a:t> (laboratuvar).</a:t>
             </a:r>
           </a:p>
         </p:txBody>
@@ -24559,7 +24508,7 @@
                   <a:srgbClr val="006D77"/>
                 </a:solidFill>
               </a:rPr>
-              <a:t>Soru 10</a:t>
+              <a:t>Soru 9</a:t>
             </a:r>
           </a:p>
         </p:txBody>
@@ -24593,7 +24542,7 @@
                   <a:srgbClr val="1F2D3A"/>
                 </a:solidFill>
               </a:rPr>
-              <a:t>Angajman kurallarında "durdurma koşulu" neden var?</a:t>
+              <a:t>Sızma testi planının dört başlığı?</a:t>
             </a:r>
           </a:p>
         </p:txBody>
@@ -24635,7 +24584,7 @@
                   <a:srgbClr val="1F2D3A"/>
                 </a:solidFill>
               </a:rPr>
-              <a:t> Kritik/öngörülmeyen bir etki görülürse test hemen durur ve bildirilir; hasarı ve hukuki riski sınırlar.</a:t>
+              <a:t> kapsam, angajman kuralları, yöntem, test şablonu. Her biri sonucu meşru, tekrarlanabilir ve güvenli kılar.</a:t>
             </a:r>
           </a:p>
         </p:txBody>
@@ -24810,7 +24759,7 @@
                   <a:srgbClr val="006D77"/>
                 </a:solidFill>
               </a:rPr>
-              <a:t>Soru 11</a:t>
+              <a:t>Soru 10</a:t>
             </a:r>
           </a:p>
         </p:txBody>
@@ -24844,7 +24793,7 @@
                   <a:srgbClr val="1F2D3A"/>
                 </a:solidFill>
               </a:rPr>
-              <a:t>Test kartının hangi alanı S17'ye bağlanır?</a:t>
+              <a:t>Angajman kurallarında "durdurma koşulu" neden var?</a:t>
             </a:r>
           </a:p>
         </p:txBody>
@@ -24886,7 +24835,7 @@
                   <a:srgbClr val="1F2D3A"/>
                 </a:solidFill>
               </a:rPr>
-              <a:t> "İlgili gereksinim" alanı — her test bir gereksinime/varlığa bağlanır, uyum matrisiyle (S17) izlenir.</a:t>
+              <a:t> Kritik/öngörülmeyen bir etki görülürse test hemen durur ve bildirilir; hasarı ve hukuki riski sınırlar.</a:t>
             </a:r>
           </a:p>
         </p:txBody>
@@ -25061,7 +25010,7 @@
                   <a:srgbClr val="006D77"/>
                 </a:solidFill>
               </a:rPr>
-              <a:t>Soru 12</a:t>
+              <a:t>Soru 11</a:t>
             </a:r>
           </a:p>
         </p:txBody>
@@ -25095,7 +25044,7 @@
                   <a:srgbClr val="1F2D3A"/>
                 </a:solidFill>
               </a:rPr>
-              <a:t>Finalde S16'dan "plan" değil "sonuç" beklenmesi ne demek?</a:t>
+              <a:t>Test kartının hangi alanı S17'ye bağlanır?</a:t>
             </a:r>
           </a:p>
         </p:txBody>
@@ -25137,23 +25086,7 @@
                   <a:srgbClr val="1F2D3A"/>
                 </a:solidFill>
               </a:rPr>
-              <a:t> Test planı yazmak yetmez; testleri </a:t>
-            </a:r>
-            <a:r>
-              <a:rPr sz="2000" b="1">
-                <a:solidFill>
-                  <a:srgbClr val="1F2D3A"/>
-                </a:solidFill>
-              </a:rPr>
-              <a:t>çalıştırıp gözlenen sonuçları</a:t>
-            </a:r>
-            <a:r>
-              <a:rPr sz="2000" b="0">
-                <a:solidFill>
-                  <a:srgbClr val="1F2D3A"/>
-                </a:solidFill>
-              </a:rPr>
-              <a:t> ve bulgu–aksiyonu sunmak gerekir.</a:t>
+              <a:t> "İlgili gereksinim" alanı — her test bir gereksinime/varlığa bağlanır, uyum matrisiyle (S17) izlenir.</a:t>
             </a:r>
           </a:p>
         </p:txBody>
@@ -25296,6 +25229,273 @@
                 </a:solidFill>
               </a:rPr>
               <a:t>165</a:t>
+            </a:r>
+          </a:p>
+        </p:txBody>
+      </p:sp>
+      <p:sp>
+        <p:nvSpPr>
+          <p:cNvPr id="6" name="TextBox 5"/>
+          <p:cNvSpPr txBox="1"/>
+          <p:nvPr/>
+        </p:nvSpPr>
+        <p:spPr>
+          <a:xfrm>
+            <a:off x="640080" y="548640"/>
+            <a:ext cx="10911535" cy="731520"/>
+          </a:xfrm>
+          <a:prstGeom prst="rect">
+            <a:avLst/>
+          </a:prstGeom>
+          <a:noFill/>
+        </p:spPr>
+        <p:txBody>
+          <a:bodyPr wrap="square" lIns="45720" rIns="45720" anchor="ctr">
+            <a:spAutoFit/>
+          </a:bodyPr>
+          <a:lstStyle/>
+          <a:p>
+            <a:r>
+              <a:rPr sz="3000" b="1">
+                <a:solidFill>
+                  <a:srgbClr val="006D77"/>
+                </a:solidFill>
+              </a:rPr>
+              <a:t>Soru 12</a:t>
+            </a:r>
+          </a:p>
+        </p:txBody>
+      </p:sp>
+      <p:sp>
+        <p:nvSpPr>
+          <p:cNvPr id="7" name="TextBox 6"/>
+          <p:cNvSpPr txBox="1"/>
+          <p:nvPr/>
+        </p:nvSpPr>
+        <p:spPr>
+          <a:xfrm>
+            <a:off x="640080" y="1325880"/>
+            <a:ext cx="10911535" cy="439928"/>
+          </a:xfrm>
+          <a:prstGeom prst="rect">
+            <a:avLst/>
+          </a:prstGeom>
+          <a:noFill/>
+        </p:spPr>
+        <p:txBody>
+          <a:bodyPr wrap="square" lIns="45720" rIns="45720">
+            <a:spAutoFit/>
+          </a:bodyPr>
+          <a:lstStyle/>
+          <a:p>
+            <a:pPr algn="l"/>
+            <a:r>
+              <a:rPr sz="2000" b="1">
+                <a:solidFill>
+                  <a:srgbClr val="1F2D3A"/>
+                </a:solidFill>
+              </a:rPr>
+              <a:t>Finalde S16'dan "plan" değil "sonuç" beklenmesi ne demek?</a:t>
+            </a:r>
+          </a:p>
+        </p:txBody>
+      </p:sp>
+      <p:sp>
+        <p:nvSpPr>
+          <p:cNvPr id="8" name="TextBox 7"/>
+          <p:cNvSpPr txBox="1"/>
+          <p:nvPr/>
+        </p:nvSpPr>
+        <p:spPr>
+          <a:xfrm>
+            <a:off x="640080" y="1875536"/>
+            <a:ext cx="10911535" cy="770128"/>
+          </a:xfrm>
+          <a:prstGeom prst="rect">
+            <a:avLst/>
+          </a:prstGeom>
+          <a:noFill/>
+        </p:spPr>
+        <p:txBody>
+          <a:bodyPr wrap="square" lIns="45720" rIns="45720">
+            <a:spAutoFit/>
+          </a:bodyPr>
+          <a:lstStyle/>
+          <a:p>
+            <a:pPr algn="l"/>
+            <a:r>
+              <a:rPr sz="2000" b="1">
+                <a:solidFill>
+                  <a:srgbClr val="1F2D3A"/>
+                </a:solidFill>
+              </a:rPr>
+              <a:t>Cevap:</a:t>
+            </a:r>
+            <a:r>
+              <a:rPr sz="2000" b="0">
+                <a:solidFill>
+                  <a:srgbClr val="1F2D3A"/>
+                </a:solidFill>
+              </a:rPr>
+              <a:t> Test planı yazmak yetmez; testleri </a:t>
+            </a:r>
+            <a:r>
+              <a:rPr sz="2000" b="1">
+                <a:solidFill>
+                  <a:srgbClr val="1F2D3A"/>
+                </a:solidFill>
+              </a:rPr>
+              <a:t>çalıştırıp gözlenen sonuçları</a:t>
+            </a:r>
+            <a:r>
+              <a:rPr sz="2000" b="0">
+                <a:solidFill>
+                  <a:srgbClr val="1F2D3A"/>
+                </a:solidFill>
+              </a:rPr>
+              <a:t> ve bulgu–aksiyonu sunmak gerekir.</a:t>
+            </a:r>
+          </a:p>
+        </p:txBody>
+      </p:sp>
+    </p:spTree>
+  </p:cSld>
+  <p:clrMapOvr>
+    <a:masterClrMapping/>
+  </p:clrMapOvr>
+</p:sld>
+</file>
+
+<file path=ppt/slides/slide166.xml><?xml version="1.0" encoding="utf-8"?>
+<p:sld xmlns:a="http://schemas.openxmlformats.org/drawingml/2006/main" xmlns:p="http://schemas.openxmlformats.org/presentationml/2006/main" xmlns:r="http://schemas.openxmlformats.org/officeDocument/2006/relationships">
+  <p:cSld>
+    <p:spTree>
+      <p:nvGrpSpPr>
+        <p:cNvPr id="1" name=""/>
+        <p:cNvGrpSpPr/>
+        <p:nvPr/>
+      </p:nvGrpSpPr>
+      <p:grpSpPr/>
+      <p:pic>
+        <p:nvPicPr>
+          <p:cNvPr id="2" name="Picture 1" descr="rteu_logo_kucuk.jpg"/>
+          <p:cNvPicPr>
+            <a:picLocks noChangeAspect="1"/>
+          </p:cNvPicPr>
+          <p:nvPr/>
+        </p:nvPicPr>
+        <p:blipFill>
+          <a:blip r:embed="rId2"/>
+          <a:stretch>
+            <a:fillRect/>
+          </a:stretch>
+        </p:blipFill>
+        <p:spPr>
+          <a:xfrm>
+            <a:off x="640080" y="164592"/>
+            <a:ext cx="242773" cy="329184"/>
+          </a:xfrm>
+          <a:prstGeom prst="rect">
+            <a:avLst/>
+          </a:prstGeom>
+        </p:spPr>
+      </p:pic>
+      <p:sp>
+        <p:nvSpPr>
+          <p:cNvPr id="3" name="TextBox 2"/>
+          <p:cNvSpPr txBox="1"/>
+          <p:nvPr/>
+        </p:nvSpPr>
+        <p:spPr>
+          <a:xfrm>
+            <a:off x="1051560" y="182880"/>
+            <a:ext cx="7315200" cy="320040"/>
+          </a:xfrm>
+          <a:prstGeom prst="rect">
+            <a:avLst/>
+          </a:prstGeom>
+          <a:noFill/>
+        </p:spPr>
+        <p:txBody>
+          <a:bodyPr wrap="square" lIns="45720" rIns="45720">
+            <a:spAutoFit/>
+          </a:bodyPr>
+          <a:lstStyle/>
+          <a:p>
+            <a:r>
+              <a:rPr sz="1100" b="0">
+                <a:solidFill>
+                  <a:srgbClr val="5B6770"/>
+                </a:solidFill>
+              </a:rPr>
+              <a:t>CEN429 Güvenli Programlama · Hafta 12</a:t>
+            </a:r>
+          </a:p>
+        </p:txBody>
+      </p:sp>
+      <p:sp>
+        <p:nvSpPr>
+          <p:cNvPr id="4" name="TextBox 3"/>
+          <p:cNvSpPr txBox="1"/>
+          <p:nvPr/>
+        </p:nvSpPr>
+        <p:spPr>
+          <a:xfrm>
+            <a:off x="640080" y="6446520"/>
+            <a:ext cx="7315200" cy="274320"/>
+          </a:xfrm>
+          <a:prstGeom prst="rect">
+            <a:avLst/>
+          </a:prstGeom>
+          <a:noFill/>
+        </p:spPr>
+        <p:txBody>
+          <a:bodyPr wrap="square" lIns="45720" rIns="45720">
+            <a:spAutoFit/>
+          </a:bodyPr>
+          <a:lstStyle/>
+          <a:p>
+            <a:r>
+              <a:rPr sz="1000" b="0">
+                <a:solidFill>
+                  <a:srgbClr val="5B6770"/>
+                </a:solidFill>
+              </a:rPr>
+              <a:t>RTEÜ Bilgisayar Mühendisliği · 2026-2027 Güz</a:t>
+            </a:r>
+          </a:p>
+        </p:txBody>
+      </p:sp>
+      <p:sp>
+        <p:nvSpPr>
+          <p:cNvPr id="5" name="TextBox 4"/>
+          <p:cNvSpPr txBox="1"/>
+          <p:nvPr/>
+        </p:nvSpPr>
+        <p:spPr>
+          <a:xfrm>
+            <a:off x="10637215" y="6446520"/>
+            <a:ext cx="914400" cy="274320"/>
+          </a:xfrm>
+          <a:prstGeom prst="rect">
+            <a:avLst/>
+          </a:prstGeom>
+          <a:noFill/>
+        </p:spPr>
+        <p:txBody>
+          <a:bodyPr wrap="square" lIns="45720" rIns="45720">
+            <a:spAutoFit/>
+          </a:bodyPr>
+          <a:lstStyle/>
+          <a:p>
+            <a:pPr algn="r"/>
+            <a:r>
+              <a:rPr sz="1000" b="0">
+                <a:solidFill>
+                  <a:srgbClr val="5B6770"/>
+                </a:solidFill>
+              </a:rPr>
+              <a:t>166</a:t>
             </a:r>
           </a:p>
         </p:txBody>
@@ -25631,7 +25831,7 @@
 </p:sld>
 </file>
 
-<file path=ppt/slides/slide166.xml><?xml version="1.0" encoding="utf-8"?>
+<file path=ppt/slides/slide167.xml><?xml version="1.0" encoding="utf-8"?>
 <p:sld xmlns:a="http://schemas.openxmlformats.org/drawingml/2006/main" xmlns:p="http://schemas.openxmlformats.org/presentationml/2006/main" xmlns:r="http://schemas.openxmlformats.org/officeDocument/2006/relationships">
   <p:cSld>
     <p:spTree>
@@ -25760,7 +25960,7 @@
                   <a:srgbClr val="5B6770"/>
                 </a:solidFill>
               </a:rPr>
-              <a:t>166</a:t>
+              <a:t>167</a:t>
             </a:r>
           </a:p>
         </p:txBody>
@@ -26096,266 +26296,6 @@
 </p:sld>
 </file>
 
-<file path=ppt/slides/slide167.xml><?xml version="1.0" encoding="utf-8"?>
-<p:sld xmlns:a="http://schemas.openxmlformats.org/drawingml/2006/main" xmlns:p="http://schemas.openxmlformats.org/presentationml/2006/main" xmlns:r="http://schemas.openxmlformats.org/officeDocument/2006/relationships">
-  <p:cSld>
-    <p:spTree>
-      <p:nvGrpSpPr>
-        <p:cNvPr id="1" name=""/>
-        <p:cNvGrpSpPr/>
-        <p:nvPr/>
-      </p:nvGrpSpPr>
-      <p:grpSpPr/>
-      <p:pic>
-        <p:nvPicPr>
-          <p:cNvPr id="2" name="Picture 1" descr="rteu_logo_kucuk.jpg"/>
-          <p:cNvPicPr>
-            <a:picLocks noChangeAspect="1"/>
-          </p:cNvPicPr>
-          <p:nvPr/>
-        </p:nvPicPr>
-        <p:blipFill>
-          <a:blip r:embed="rId2"/>
-          <a:stretch>
-            <a:fillRect/>
-          </a:stretch>
-        </p:blipFill>
-        <p:spPr>
-          <a:xfrm>
-            <a:off x="640080" y="164592"/>
-            <a:ext cx="242773" cy="329184"/>
-          </a:xfrm>
-          <a:prstGeom prst="rect">
-            <a:avLst/>
-          </a:prstGeom>
-        </p:spPr>
-      </p:pic>
-      <p:sp>
-        <p:nvSpPr>
-          <p:cNvPr id="3" name="TextBox 2"/>
-          <p:cNvSpPr txBox="1"/>
-          <p:nvPr/>
-        </p:nvSpPr>
-        <p:spPr>
-          <a:xfrm>
-            <a:off x="1051560" y="182880"/>
-            <a:ext cx="7315200" cy="320040"/>
-          </a:xfrm>
-          <a:prstGeom prst="rect">
-            <a:avLst/>
-          </a:prstGeom>
-          <a:noFill/>
-        </p:spPr>
-        <p:txBody>
-          <a:bodyPr wrap="square" lIns="45720" rIns="45720">
-            <a:spAutoFit/>
-          </a:bodyPr>
-          <a:lstStyle/>
-          <a:p>
-            <a:r>
-              <a:rPr sz="1100" b="0">
-                <a:solidFill>
-                  <a:srgbClr val="5B6770"/>
-                </a:solidFill>
-              </a:rPr>
-              <a:t>CEN429 Güvenli Programlama · Hafta 12</a:t>
-            </a:r>
-          </a:p>
-        </p:txBody>
-      </p:sp>
-      <p:sp>
-        <p:nvSpPr>
-          <p:cNvPr id="4" name="TextBox 3"/>
-          <p:cNvSpPr txBox="1"/>
-          <p:nvPr/>
-        </p:nvSpPr>
-        <p:spPr>
-          <a:xfrm>
-            <a:off x="640080" y="6446520"/>
-            <a:ext cx="7315200" cy="274320"/>
-          </a:xfrm>
-          <a:prstGeom prst="rect">
-            <a:avLst/>
-          </a:prstGeom>
-          <a:noFill/>
-        </p:spPr>
-        <p:txBody>
-          <a:bodyPr wrap="square" lIns="45720" rIns="45720">
-            <a:spAutoFit/>
-          </a:bodyPr>
-          <a:lstStyle/>
-          <a:p>
-            <a:r>
-              <a:rPr sz="1000" b="0">
-                <a:solidFill>
-                  <a:srgbClr val="5B6770"/>
-                </a:solidFill>
-              </a:rPr>
-              <a:t>RTEÜ Bilgisayar Mühendisliği · 2026-2027 Güz</a:t>
-            </a:r>
-          </a:p>
-        </p:txBody>
-      </p:sp>
-      <p:sp>
-        <p:nvSpPr>
-          <p:cNvPr id="5" name="TextBox 4"/>
-          <p:cNvSpPr txBox="1"/>
-          <p:nvPr/>
-        </p:nvSpPr>
-        <p:spPr>
-          <a:xfrm>
-            <a:off x="10637215" y="6446520"/>
-            <a:ext cx="914400" cy="274320"/>
-          </a:xfrm>
-          <a:prstGeom prst="rect">
-            <a:avLst/>
-          </a:prstGeom>
-          <a:noFill/>
-        </p:spPr>
-        <p:txBody>
-          <a:bodyPr wrap="square" lIns="45720" rIns="45720">
-            <a:spAutoFit/>
-          </a:bodyPr>
-          <a:lstStyle/>
-          <a:p>
-            <a:pPr algn="r"/>
-            <a:r>
-              <a:rPr sz="1000" b="0">
-                <a:solidFill>
-                  <a:srgbClr val="5B6770"/>
-                </a:solidFill>
-              </a:rPr>
-              <a:t>167</a:t>
-            </a:r>
-          </a:p>
-        </p:txBody>
-      </p:sp>
-      <p:sp>
-        <p:nvSpPr>
-          <p:cNvPr id="6" name="TextBox 5"/>
-          <p:cNvSpPr txBox="1"/>
-          <p:nvPr/>
-        </p:nvSpPr>
-        <p:spPr>
-          <a:xfrm>
-            <a:off x="640080" y="548640"/>
-            <a:ext cx="10911535" cy="731520"/>
-          </a:xfrm>
-          <a:prstGeom prst="rect">
-            <a:avLst/>
-          </a:prstGeom>
-          <a:noFill/>
-        </p:spPr>
-        <p:txBody>
-          <a:bodyPr wrap="square" lIns="45720" rIns="45720" anchor="ctr">
-            <a:spAutoFit/>
-          </a:bodyPr>
-          <a:lstStyle/>
-          <a:p>
-            <a:r>
-              <a:rPr sz="3000" b="1">
-                <a:solidFill>
-                  <a:srgbClr val="006D77"/>
-                </a:solidFill>
-              </a:rPr>
-              <a:t>Özet: bu haftanın tek cümlesi</a:t>
-            </a:r>
-          </a:p>
-        </p:txBody>
-      </p:sp>
-      <p:sp>
-        <p:nvSpPr>
-          <p:cNvPr id="7" name="Rectangle 6"/>
-          <p:cNvSpPr/>
-          <p:nvPr/>
-        </p:nvSpPr>
-        <p:spPr>
-          <a:xfrm>
-            <a:off x="640080" y="1325880"/>
-            <a:ext cx="10911535" cy="1264920"/>
-          </a:xfrm>
-          <a:prstGeom prst="rect">
-            <a:avLst/>
-          </a:prstGeom>
-          <a:solidFill>
-            <a:srgbClr val="EEF7F8"/>
-          </a:solidFill>
-          <a:ln>
-            <a:solidFill>
-              <a:srgbClr val="006D77"/>
-            </a:solidFill>
-          </a:ln>
-        </p:spPr>
-        <p:style>
-          <a:lnRef idx="1">
-            <a:schemeClr val="accent1"/>
-          </a:lnRef>
-          <a:fillRef idx="3">
-            <a:schemeClr val="accent1"/>
-          </a:fillRef>
-          <a:effectRef idx="2">
-            <a:schemeClr val="accent1"/>
-          </a:effectRef>
-          <a:fontRef idx="minor">
-            <a:schemeClr val="lt1"/>
-          </a:fontRef>
-        </p:style>
-        <p:txBody>
-          <a:bodyPr rtlCol="0" anchor="ctr" wrap="square" lIns="182880"/>
-          <a:lstStyle/>
-          <a:p>
-            <a:pPr algn="l"/>
-            <a:r>
-              <a:rPr sz="2000" b="0">
-                <a:solidFill>
-                  <a:srgbClr val="1F2D3A"/>
-                </a:solidFill>
-              </a:rPr>
-              <a:t>Güvenlik bir iddia değil, </a:t>
-            </a:r>
-            <a:r>
-              <a:rPr sz="2000" b="1">
-                <a:solidFill>
-                  <a:srgbClr val="1F2D3A"/>
-                </a:solidFill>
-              </a:rPr>
-              <a:t>bağımsız olarak sınanan ve ölçülen</a:t>
-            </a:r>
-            <a:r>
-              <a:rPr sz="2000" b="0">
-                <a:solidFill>
-                  <a:srgbClr val="1F2D3A"/>
-                </a:solidFill>
-              </a:rPr>
-              <a:t> bir niteliktir; korumanın var olması yetmez, </a:t>
-            </a:r>
-            <a:r>
-              <a:rPr sz="2000" b="1">
-                <a:solidFill>
-                  <a:srgbClr val="1F2D3A"/>
-                </a:solidFill>
-              </a:rPr>
-              <a:t>ne kadar dayandığı</a:t>
-            </a:r>
-            <a:r>
-              <a:rPr sz="2000" b="0">
-                <a:solidFill>
-                  <a:srgbClr val="1F2D3A"/>
-                </a:solidFill>
-              </a:rPr>
-              <a:t> planlı, izinli ve tekrarlanabilir biçimde ölçülür.</a:t>
-            </a:r>
-          </a:p>
-        </p:txBody>
-      </p:sp>
-    </p:spTree>
-  </p:cSld>
-  <p:clrMapOvr>
-    <a:masterClrMapping/>
-  </p:clrMapOvr>
-</p:sld>
-</file>
-
 <file path=ppt/slides/slide168.xml><?xml version="1.0" encoding="utf-8"?>
 <p:sld xmlns:a="http://schemas.openxmlformats.org/drawingml/2006/main" xmlns:p="http://schemas.openxmlformats.org/presentationml/2006/main" xmlns:r="http://schemas.openxmlformats.org/officeDocument/2006/relationships">
   <p:cSld>
@@ -26518,224 +26458,92 @@
                   <a:srgbClr val="006D77"/>
                 </a:solidFill>
               </a:rPr>
-              <a:t>Kaynaklar</a:t>
-            </a:r>
-          </a:p>
-        </p:txBody>
-      </p:sp>
-      <p:sp>
-        <p:nvSpPr>
-          <p:cNvPr id="7" name="TextBox 6"/>
-          <p:cNvSpPr txBox="1"/>
+              <a:t>Özet: bu haftanın tek cümlesi</a:t>
+            </a:r>
+          </a:p>
+        </p:txBody>
+      </p:sp>
+      <p:sp>
+        <p:nvSpPr>
+          <p:cNvPr id="7" name="Rectangle 6"/>
+          <p:cNvSpPr/>
           <p:nvPr/>
         </p:nvSpPr>
         <p:spPr>
           <a:xfrm>
             <a:off x="640080" y="1325880"/>
-            <a:ext cx="10911535" cy="2677160"/>
-          </a:xfrm>
-          <a:prstGeom prst="rect">
-            <a:avLst/>
-          </a:prstGeom>
-          <a:noFill/>
-        </p:spPr>
-        <p:txBody>
-          <a:bodyPr wrap="square" lIns="45720" rIns="45720">
-            <a:spAutoFit/>
-          </a:bodyPr>
-          <a:lstStyle/>
-          <a:p>
-            <a:pPr>
-              <a:spcAft>
-                <a:spcPts val="300"/>
-              </a:spcAft>
-            </a:pPr>
-            <a:r>
-              <a:rPr sz="2000" b="1">
-                <a:solidFill>
-                  <a:srgbClr val="006D77"/>
-                </a:solidFill>
-              </a:rPr>
-              <a:t>• </a:t>
-            </a:r>
-            <a:r>
-              <a:rPr sz="2000" b="1">
-                <a:solidFill>
-                  <a:srgbClr val="1F2D3A"/>
-                </a:solidFill>
-              </a:rPr>
-              <a:t>Güvenli programlama teknik kılavuzu</a:t>
-            </a:r>
-            <a:r>
-              <a:rPr sz="2000" b="0">
-                <a:solidFill>
-                  <a:srgbClr val="1F2D3A"/>
-                </a:solidFill>
-              </a:rPr>
-              <a:t> — teslim edilen belge, etki/delta yapısı, gereksinim bloğu</a:t>
-            </a:r>
-          </a:p>
-          <a:p>
-            <a:pPr>
-              <a:spcAft>
-                <a:spcPts val="300"/>
-              </a:spcAft>
-            </a:pPr>
-            <a:r>
-              <a:rPr sz="2000" b="1">
-                <a:solidFill>
-                  <a:srgbClr val="006D77"/>
-                </a:solidFill>
-              </a:rPr>
-              <a:t>• </a:t>
-            </a:r>
-            <a:r>
-              <a:rPr sz="2000" b="1">
-                <a:solidFill>
-                  <a:srgbClr val="1F2D3A"/>
-                </a:solidFill>
-              </a:rPr>
-              <a:t>OWASP MASVS / MASTG</a:t>
-            </a:r>
-            <a:r>
-              <a:rPr sz="2000" b="0">
-                <a:solidFill>
-                  <a:srgbClr val="1F2D3A"/>
-                </a:solidFill>
-              </a:rPr>
-              <a:t> — mobil gereksinim + test rehberi</a:t>
-            </a:r>
-          </a:p>
-          <a:p>
-            <a:pPr>
-              <a:spcAft>
-                <a:spcPts val="300"/>
-              </a:spcAft>
-            </a:pPr>
-            <a:r>
-              <a:rPr sz="2000" b="1">
-                <a:solidFill>
-                  <a:srgbClr val="006D77"/>
-                </a:solidFill>
-              </a:rPr>
-              <a:t>• </a:t>
-            </a:r>
-            <a:r>
-              <a:rPr sz="2000" b="1">
-                <a:solidFill>
-                  <a:srgbClr val="1F2D3A"/>
-                </a:solidFill>
-              </a:rPr>
-              <a:t>OWASP WSTG</a:t>
-            </a:r>
-            <a:r>
-              <a:rPr sz="2000" b="0">
-                <a:solidFill>
-                  <a:srgbClr val="1F2D3A"/>
-                </a:solidFill>
-              </a:rPr>
-              <a:t> — web test rehberi</a:t>
-            </a:r>
-          </a:p>
-          <a:p>
-            <a:pPr>
-              <a:spcAft>
-                <a:spcPts val="300"/>
-              </a:spcAft>
-            </a:pPr>
-            <a:r>
-              <a:rPr sz="2000" b="1">
-                <a:solidFill>
-                  <a:srgbClr val="006D77"/>
-                </a:solidFill>
-              </a:rPr>
-              <a:t>• </a:t>
-            </a:r>
-            <a:r>
-              <a:rPr sz="2000" b="1">
-                <a:solidFill>
-                  <a:srgbClr val="1F2D3A"/>
-                </a:solidFill>
-              </a:rPr>
-              <a:t>PTES</a:t>
-            </a:r>
-            <a:r>
-              <a:rPr sz="2000" b="0">
-                <a:solidFill>
-                  <a:srgbClr val="1F2D3A"/>
-                </a:solidFill>
-              </a:rPr>
-              <a:t>, </a:t>
-            </a:r>
-            <a:r>
-              <a:rPr sz="2000" b="1">
-                <a:solidFill>
-                  <a:srgbClr val="1F2D3A"/>
-                </a:solidFill>
-              </a:rPr>
-              <a:t>NIST SP 800-115</a:t>
-            </a:r>
-            <a:r>
-              <a:rPr sz="2000" b="0">
-                <a:solidFill>
-                  <a:srgbClr val="1F2D3A"/>
-                </a:solidFill>
-              </a:rPr>
-              <a:t> — sızma testi metodolojisi</a:t>
-            </a:r>
-          </a:p>
-          <a:p>
-            <a:pPr>
-              <a:spcAft>
-                <a:spcPts val="300"/>
-              </a:spcAft>
-            </a:pPr>
-            <a:r>
-              <a:rPr sz="2000" b="1">
-                <a:solidFill>
-                  <a:srgbClr val="006D77"/>
-                </a:solidFill>
-              </a:rPr>
-              <a:t>• </a:t>
-            </a:r>
-            <a:r>
-              <a:rPr sz="2000" b="1">
-                <a:solidFill>
-                  <a:srgbClr val="1F2D3A"/>
-                </a:solidFill>
-              </a:rPr>
-              <a:t>Ortak Kriterler (ISO/IEC 15408)</a:t>
-            </a:r>
-            <a:r>
-              <a:rPr sz="2000" b="0">
-                <a:solidFill>
-                  <a:srgbClr val="1F2D3A"/>
-                </a:solidFill>
-              </a:rPr>
-              <a:t> + saldırı potansiyeli kılavuzları</a:t>
-            </a:r>
-          </a:p>
-          <a:p>
-            <a:pPr>
-              <a:spcAft>
-                <a:spcPts val="300"/>
-              </a:spcAft>
-            </a:pPr>
-            <a:r>
-              <a:rPr sz="2000" b="1">
-                <a:solidFill>
-                  <a:srgbClr val="006D77"/>
-                </a:solidFill>
-              </a:rPr>
-              <a:t>• </a:t>
-            </a:r>
-            <a:r>
-              <a:rPr sz="2000" b="1">
-                <a:solidFill>
-                  <a:srgbClr val="1F2D3A"/>
-                </a:solidFill>
-              </a:rPr>
-              <a:t>CVSS</a:t>
+            <a:ext cx="10911535" cy="1264920"/>
+          </a:xfrm>
+          <a:prstGeom prst="rect">
+            <a:avLst/>
+          </a:prstGeom>
+          <a:solidFill>
+            <a:srgbClr val="EEF7F8"/>
+          </a:solidFill>
+          <a:ln>
+            <a:solidFill>
+              <a:srgbClr val="006D77"/>
+            </a:solidFill>
+          </a:ln>
+        </p:spPr>
+        <p:style>
+          <a:lnRef idx="1">
+            <a:schemeClr val="accent1"/>
+          </a:lnRef>
+          <a:fillRef idx="3">
+            <a:schemeClr val="accent1"/>
+          </a:fillRef>
+          <a:effectRef idx="2">
+            <a:schemeClr val="accent1"/>
+          </a:effectRef>
+          <a:fontRef idx="minor">
+            <a:schemeClr val="lt1"/>
+          </a:fontRef>
+        </p:style>
+        <p:txBody>
+          <a:bodyPr rtlCol="0" anchor="ctr" wrap="square" lIns="182880"/>
+          <a:lstStyle/>
+          <a:p>
+            <a:pPr algn="l"/>
+            <a:r>
+              <a:rPr sz="2000" b="0">
+                <a:solidFill>
+                  <a:srgbClr val="1F2D3A"/>
+                </a:solidFill>
+              </a:rPr>
+              <a:t>Güvenlik bir iddia değil, </a:t>
+            </a:r>
+            <a:r>
+              <a:rPr sz="2000" b="1">
+                <a:solidFill>
+                  <a:srgbClr val="1F2D3A"/>
+                </a:solidFill>
+              </a:rPr>
+              <a:t>bağımsız olarak sınanan ve ölçülen</a:t>
+            </a:r>
+            <a:r>
+              <a:rPr sz="2000" b="0">
+                <a:solidFill>
+                  <a:srgbClr val="1F2D3A"/>
+                </a:solidFill>
+              </a:rPr>
+              <a:t> bir niteliktir; korumanın var olması yetmez, </a:t>
+            </a:r>
+            <a:r>
+              <a:rPr sz="2000" b="1">
+                <a:solidFill>
+                  <a:srgbClr val="1F2D3A"/>
+                </a:solidFill>
+              </a:rPr>
+              <a:t>ne kadar dayandığı</a:t>
+            </a:r>
+            <a:r>
+              <a:rPr sz="2000" b="0">
+                <a:solidFill>
+                  <a:srgbClr val="1F2D3A"/>
+                </a:solidFill>
+              </a:rPr>
+              <a:t> planlı, izinli ve tekrarlanabilir biçimde ölçülür.</a:t>
             </a:r>
           </a:p>
         </p:txBody>
@@ -26751,14 +26559,6 @@
 <file path=ppt/slides/slide169.xml><?xml version="1.0" encoding="utf-8"?>
 <p:sld xmlns:a="http://schemas.openxmlformats.org/drawingml/2006/main" xmlns:p="http://schemas.openxmlformats.org/presentationml/2006/main" xmlns:r="http://schemas.openxmlformats.org/officeDocument/2006/relationships">
   <p:cSld>
-    <p:bg>
-      <p:bgPr>
-        <a:solidFill>
-          <a:srgbClr val="006D77"/>
-        </a:solidFill>
-        <a:effectLst/>
-      </p:bgPr>
-    </p:bg>
     <p:spTree>
       <p:nvGrpSpPr>
         <p:cNvPr id="1" name=""/>
@@ -26766,9 +26566,33 @@
         <p:nvPr/>
       </p:nvGrpSpPr>
       <p:grpSpPr/>
-      <p:sp>
-        <p:nvSpPr>
-          <p:cNvPr id="2" name="TextBox 1"/>
+      <p:pic>
+        <p:nvPicPr>
+          <p:cNvPr id="2" name="Picture 1" descr="rteu_logo_kucuk.jpg"/>
+          <p:cNvPicPr>
+            <a:picLocks noChangeAspect="1"/>
+          </p:cNvPicPr>
+          <p:nvPr/>
+        </p:nvPicPr>
+        <p:blipFill>
+          <a:blip r:embed="rId2"/>
+          <a:stretch>
+            <a:fillRect/>
+          </a:stretch>
+        </p:blipFill>
+        <p:spPr>
+          <a:xfrm>
+            <a:off x="640080" y="164592"/>
+            <a:ext cx="242773" cy="329184"/>
+          </a:xfrm>
+          <a:prstGeom prst="rect">
+            <a:avLst/>
+          </a:prstGeom>
+        </p:spPr>
+      </p:pic>
+      <p:sp>
+        <p:nvSpPr>
+          <p:cNvPr id="3" name="TextBox 2"/>
           <p:cNvSpPr txBox="1"/>
           <p:nvPr/>
         </p:nvSpPr>
@@ -26791,7 +26615,7 @@
             <a:r>
               <a:rPr sz="1100" b="0">
                 <a:solidFill>
-                  <a:srgbClr val="D8F0F2"/>
+                  <a:srgbClr val="5B6770"/>
                 </a:solidFill>
               </a:rPr>
               <a:t>CEN429 Güvenli Programlama · Hafta 12</a:t>
@@ -26801,7 +26625,7 @@
       </p:sp>
       <p:sp>
         <p:nvSpPr>
-          <p:cNvPr id="3" name="TextBox 2"/>
+          <p:cNvPr id="4" name="TextBox 3"/>
           <p:cNvSpPr txBox="1"/>
           <p:nvPr/>
         </p:nvSpPr>
@@ -26824,7 +26648,7 @@
             <a:r>
               <a:rPr sz="1000" b="0">
                 <a:solidFill>
-                  <a:srgbClr val="D8F0F2"/>
+                  <a:srgbClr val="5B6770"/>
                 </a:solidFill>
               </a:rPr>
               <a:t>RTEÜ Bilgisayar Mühendisliği · 2026-2027 Güz</a:t>
@@ -26834,7 +26658,7 @@
       </p:sp>
       <p:sp>
         <p:nvSpPr>
-          <p:cNvPr id="4" name="TextBox 3"/>
+          <p:cNvPr id="5" name="TextBox 4"/>
           <p:cNvSpPr txBox="1"/>
           <p:nvPr/>
         </p:nvSpPr>
@@ -26858,7 +26682,7 @@
             <a:r>
               <a:rPr sz="1000" b="0">
                 <a:solidFill>
-                  <a:srgbClr val="D8F0F2"/>
+                  <a:srgbClr val="5B6770"/>
                 </a:solidFill>
               </a:rPr>
               <a:t>169</a:t>
@@ -26868,68 +26692,33 @@
       </p:sp>
       <p:sp>
         <p:nvSpPr>
-          <p:cNvPr id="5" name="TextBox 4"/>
-          <p:cNvSpPr txBox="1"/>
-          <p:nvPr/>
-        </p:nvSpPr>
-        <p:spPr>
-          <a:xfrm>
-            <a:off x="640080" y="2194560"/>
-            <a:ext cx="10911535" cy="1280160"/>
-          </a:xfrm>
-          <a:prstGeom prst="rect">
-            <a:avLst/>
-          </a:prstGeom>
-          <a:noFill/>
-        </p:spPr>
-        <p:txBody>
-          <a:bodyPr wrap="square" lIns="45720" rIns="45720">
-            <a:spAutoFit/>
-          </a:bodyPr>
-          <a:lstStyle/>
-          <a:p>
-            <a:pPr algn="l"/>
-            <a:r>
-              <a:rPr sz="4000" b="1">
-                <a:solidFill>
-                  <a:srgbClr val="FFFFFF"/>
-                </a:solidFill>
-              </a:rPr>
-              <a:t>Sonraki hafta</a:t>
-            </a:r>
-          </a:p>
-        </p:txBody>
-      </p:sp>
-      <p:sp>
-        <p:nvSpPr>
           <p:cNvPr id="6" name="TextBox 5"/>
           <p:cNvSpPr txBox="1"/>
           <p:nvPr/>
         </p:nvSpPr>
         <p:spPr>
           <a:xfrm>
-            <a:off x="640080" y="3566160"/>
-            <a:ext cx="10911535" cy="439928"/>
-          </a:xfrm>
-          <a:prstGeom prst="rect">
-            <a:avLst/>
-          </a:prstGeom>
-          <a:noFill/>
-        </p:spPr>
-        <p:txBody>
-          <a:bodyPr wrap="square" lIns="45720" rIns="45720">
-            <a:spAutoFit/>
-          </a:bodyPr>
-          <a:lstStyle/>
-          <a:p>
-            <a:pPr algn="l"/>
-            <a:r>
-              <a:rPr sz="2000" b="1">
-                <a:solidFill>
-                  <a:srgbClr val="FFFFFF"/>
-                </a:solidFill>
-              </a:rPr>
-              <a:t>13. hafta — Güvenlik gereksinimleri</a:t>
+            <a:off x="640080" y="548640"/>
+            <a:ext cx="10911535" cy="731520"/>
+          </a:xfrm>
+          <a:prstGeom prst="rect">
+            <a:avLst/>
+          </a:prstGeom>
+          <a:noFill/>
+        </p:spPr>
+        <p:txBody>
+          <a:bodyPr wrap="square" lIns="45720" rIns="45720" anchor="ctr">
+            <a:spAutoFit/>
+          </a:bodyPr>
+          <a:lstStyle/>
+          <a:p>
+            <a:r>
+              <a:rPr sz="3000" b="1">
+                <a:solidFill>
+                  <a:srgbClr val="006D77"/>
+                </a:solidFill>
+              </a:rPr>
+              <a:t>Kaynaklar</a:t>
             </a:r>
           </a:p>
         </p:txBody>
@@ -26942,28 +26731,211 @@
         </p:nvSpPr>
         <p:spPr>
           <a:xfrm>
-            <a:off x="640080" y="4051808"/>
-            <a:ext cx="10911535" cy="770128"/>
-          </a:xfrm>
-          <a:prstGeom prst="rect">
-            <a:avLst/>
-          </a:prstGeom>
-          <a:noFill/>
-        </p:spPr>
-        <p:txBody>
-          <a:bodyPr wrap="square" lIns="45720" rIns="45720">
-            <a:spAutoFit/>
-          </a:bodyPr>
-          <a:lstStyle/>
-          <a:p>
-            <a:pPr algn="l"/>
-            <a:r>
-              <a:rPr sz="2000" b="0">
-                <a:solidFill>
-                  <a:srgbClr val="FFFFFF"/>
-                </a:solidFill>
-              </a:rPr>
-              <a:t>İyi gereksinim · izlenebilirlik/uyum matrisi · devredilen gereksinimler · CC, FIPS 140-3, ETSI, EMVCo, PCI, MASVS.</a:t>
+            <a:off x="640080" y="1325880"/>
+            <a:ext cx="10911535" cy="2677160"/>
+          </a:xfrm>
+          <a:prstGeom prst="rect">
+            <a:avLst/>
+          </a:prstGeom>
+          <a:noFill/>
+        </p:spPr>
+        <p:txBody>
+          <a:bodyPr wrap="square" lIns="45720" rIns="45720">
+            <a:spAutoFit/>
+          </a:bodyPr>
+          <a:lstStyle/>
+          <a:p>
+            <a:pPr>
+              <a:spcAft>
+                <a:spcPts val="300"/>
+              </a:spcAft>
+            </a:pPr>
+            <a:r>
+              <a:rPr sz="2000" b="1">
+                <a:solidFill>
+                  <a:srgbClr val="006D77"/>
+                </a:solidFill>
+              </a:rPr>
+              <a:t>• </a:t>
+            </a:r>
+            <a:r>
+              <a:rPr sz="2000" b="1">
+                <a:solidFill>
+                  <a:srgbClr val="1F2D3A"/>
+                </a:solidFill>
+              </a:rPr>
+              <a:t>Güvenli programlama teknik kılavuzu</a:t>
+            </a:r>
+            <a:r>
+              <a:rPr sz="2000" b="0">
+                <a:solidFill>
+                  <a:srgbClr val="1F2D3A"/>
+                </a:solidFill>
+              </a:rPr>
+              <a:t> — teslim edilen belge, etki/delta yapısı, gereksinim bloğu</a:t>
+            </a:r>
+          </a:p>
+          <a:p>
+            <a:pPr>
+              <a:spcAft>
+                <a:spcPts val="300"/>
+              </a:spcAft>
+            </a:pPr>
+            <a:r>
+              <a:rPr sz="2000" b="1">
+                <a:solidFill>
+                  <a:srgbClr val="006D77"/>
+                </a:solidFill>
+              </a:rPr>
+              <a:t>• </a:t>
+            </a:r>
+            <a:r>
+              <a:rPr sz="2000" b="1">
+                <a:solidFill>
+                  <a:srgbClr val="1F2D3A"/>
+                </a:solidFill>
+              </a:rPr>
+              <a:t>OWASP MASVS / MASTG</a:t>
+            </a:r>
+            <a:r>
+              <a:rPr sz="2000" b="0">
+                <a:solidFill>
+                  <a:srgbClr val="1F2D3A"/>
+                </a:solidFill>
+              </a:rPr>
+              <a:t> — mobil gereksinim + test rehberi</a:t>
+            </a:r>
+          </a:p>
+          <a:p>
+            <a:pPr>
+              <a:spcAft>
+                <a:spcPts val="300"/>
+              </a:spcAft>
+            </a:pPr>
+            <a:r>
+              <a:rPr sz="2000" b="1">
+                <a:solidFill>
+                  <a:srgbClr val="006D77"/>
+                </a:solidFill>
+              </a:rPr>
+              <a:t>• </a:t>
+            </a:r>
+            <a:r>
+              <a:rPr sz="2000" b="1">
+                <a:solidFill>
+                  <a:srgbClr val="1F2D3A"/>
+                </a:solidFill>
+              </a:rPr>
+              <a:t>OWASP WSTG</a:t>
+            </a:r>
+            <a:r>
+              <a:rPr sz="2000" b="0">
+                <a:solidFill>
+                  <a:srgbClr val="1F2D3A"/>
+                </a:solidFill>
+              </a:rPr>
+              <a:t> — web test rehberi</a:t>
+            </a:r>
+          </a:p>
+          <a:p>
+            <a:pPr>
+              <a:spcAft>
+                <a:spcPts val="300"/>
+              </a:spcAft>
+            </a:pPr>
+            <a:r>
+              <a:rPr sz="2000" b="1">
+                <a:solidFill>
+                  <a:srgbClr val="006D77"/>
+                </a:solidFill>
+              </a:rPr>
+              <a:t>• </a:t>
+            </a:r>
+            <a:r>
+              <a:rPr sz="2000" b="1">
+                <a:solidFill>
+                  <a:srgbClr val="1F2D3A"/>
+                </a:solidFill>
+              </a:rPr>
+              <a:t>PTES</a:t>
+            </a:r>
+            <a:r>
+              <a:rPr sz="2000" b="0">
+                <a:solidFill>
+                  <a:srgbClr val="1F2D3A"/>
+                </a:solidFill>
+              </a:rPr>
+              <a:t>, </a:t>
+            </a:r>
+            <a:r>
+              <a:rPr sz="2000" b="1">
+                <a:solidFill>
+                  <a:srgbClr val="1F2D3A"/>
+                </a:solidFill>
+              </a:rPr>
+              <a:t>NIST SP 800-115</a:t>
+            </a:r>
+            <a:r>
+              <a:rPr sz="2000" b="0">
+                <a:solidFill>
+                  <a:srgbClr val="1F2D3A"/>
+                </a:solidFill>
+              </a:rPr>
+              <a:t> — sızma testi metodolojisi</a:t>
+            </a:r>
+          </a:p>
+          <a:p>
+            <a:pPr>
+              <a:spcAft>
+                <a:spcPts val="300"/>
+              </a:spcAft>
+            </a:pPr>
+            <a:r>
+              <a:rPr sz="2000" b="1">
+                <a:solidFill>
+                  <a:srgbClr val="006D77"/>
+                </a:solidFill>
+              </a:rPr>
+              <a:t>• </a:t>
+            </a:r>
+            <a:r>
+              <a:rPr sz="2000" b="1">
+                <a:solidFill>
+                  <a:srgbClr val="1F2D3A"/>
+                </a:solidFill>
+              </a:rPr>
+              <a:t>Ortak Kriterler (ISO/IEC 15408)</a:t>
+            </a:r>
+            <a:r>
+              <a:rPr sz="2000" b="0">
+                <a:solidFill>
+                  <a:srgbClr val="1F2D3A"/>
+                </a:solidFill>
+              </a:rPr>
+              <a:t> + saldırı potansiyeli kılavuzları</a:t>
+            </a:r>
+          </a:p>
+          <a:p>
+            <a:pPr>
+              <a:spcAft>
+                <a:spcPts val="300"/>
+              </a:spcAft>
+            </a:pPr>
+            <a:r>
+              <a:rPr sz="2000" b="1">
+                <a:solidFill>
+                  <a:srgbClr val="006D77"/>
+                </a:solidFill>
+              </a:rPr>
+              <a:t>• </a:t>
+            </a:r>
+            <a:r>
+              <a:rPr sz="2000" b="1">
+                <a:solidFill>
+                  <a:srgbClr val="1F2D3A"/>
+                </a:solidFill>
+              </a:rPr>
+              <a:t>CVSS</a:t>
             </a:r>
           </a:p>
         </p:txBody>
@@ -27404,7 +27376,7 @@
         </p:nvSpPr>
         <p:spPr>
           <a:xfrm>
-            <a:off x="640080" y="2743200"/>
+            <a:off x="640080" y="2194560"/>
             <a:ext cx="10911535" cy="1280160"/>
           </a:xfrm>
           <a:prstGeom prst="rect">
@@ -27425,7 +27397,75 @@
                   <a:srgbClr val="FFFFFF"/>
                 </a:solidFill>
               </a:rPr>
-              <a:t>Ek A · Uçtan uca mini vaka</a:t>
+              <a:t>Sonraki hafta</a:t>
+            </a:r>
+          </a:p>
+        </p:txBody>
+      </p:sp>
+      <p:sp>
+        <p:nvSpPr>
+          <p:cNvPr id="6" name="TextBox 5"/>
+          <p:cNvSpPr txBox="1"/>
+          <p:nvPr/>
+        </p:nvSpPr>
+        <p:spPr>
+          <a:xfrm>
+            <a:off x="640080" y="3566160"/>
+            <a:ext cx="10911535" cy="439928"/>
+          </a:xfrm>
+          <a:prstGeom prst="rect">
+            <a:avLst/>
+          </a:prstGeom>
+          <a:noFill/>
+        </p:spPr>
+        <p:txBody>
+          <a:bodyPr wrap="square" lIns="45720" rIns="45720">
+            <a:spAutoFit/>
+          </a:bodyPr>
+          <a:lstStyle/>
+          <a:p>
+            <a:pPr algn="l"/>
+            <a:r>
+              <a:rPr sz="2000" b="1">
+                <a:solidFill>
+                  <a:srgbClr val="FFFFFF"/>
+                </a:solidFill>
+              </a:rPr>
+              <a:t>13. hafta — Güvenlik gereksinimleri</a:t>
+            </a:r>
+          </a:p>
+        </p:txBody>
+      </p:sp>
+      <p:sp>
+        <p:nvSpPr>
+          <p:cNvPr id="7" name="TextBox 6"/>
+          <p:cNvSpPr txBox="1"/>
+          <p:nvPr/>
+        </p:nvSpPr>
+        <p:spPr>
+          <a:xfrm>
+            <a:off x="640080" y="4051808"/>
+            <a:ext cx="10911535" cy="770128"/>
+          </a:xfrm>
+          <a:prstGeom prst="rect">
+            <a:avLst/>
+          </a:prstGeom>
+          <a:noFill/>
+        </p:spPr>
+        <p:txBody>
+          <a:bodyPr wrap="square" lIns="45720" rIns="45720">
+            <a:spAutoFit/>
+          </a:bodyPr>
+          <a:lstStyle/>
+          <a:p>
+            <a:pPr algn="l"/>
+            <a:r>
+              <a:rPr sz="2000" b="0">
+                <a:solidFill>
+                  <a:srgbClr val="FFFFFF"/>
+                </a:solidFill>
+              </a:rPr>
+              <a:t>İyi gereksinim · izlenebilirlik/uyum matrisi · devredilen gereksinimler · CC, FIPS 140-3, ETSI, EMVCo, PCI, MASVS.</a:t>
             </a:r>
           </a:p>
         </p:txBody>
@@ -27441,6 +27481,14 @@
 <file path=ppt/slides/slide171.xml><?xml version="1.0" encoding="utf-8"?>
 <p:sld xmlns:a="http://schemas.openxmlformats.org/drawingml/2006/main" xmlns:p="http://schemas.openxmlformats.org/presentationml/2006/main" xmlns:r="http://schemas.openxmlformats.org/officeDocument/2006/relationships">
   <p:cSld>
+    <p:bg>
+      <p:bgPr>
+        <a:solidFill>
+          <a:srgbClr val="006D77"/>
+        </a:solidFill>
+        <a:effectLst/>
+      </p:bgPr>
+    </p:bg>
     <p:spTree>
       <p:nvGrpSpPr>
         <p:cNvPr id="1" name=""/>
@@ -27448,33 +27496,9 @@
         <p:nvPr/>
       </p:nvGrpSpPr>
       <p:grpSpPr/>
-      <p:pic>
-        <p:nvPicPr>
-          <p:cNvPr id="2" name="Picture 1" descr="rteu_logo_kucuk.jpg"/>
-          <p:cNvPicPr>
-            <a:picLocks noChangeAspect="1"/>
-          </p:cNvPicPr>
-          <p:nvPr/>
-        </p:nvPicPr>
-        <p:blipFill>
-          <a:blip r:embed="rId2"/>
-          <a:stretch>
-            <a:fillRect/>
-          </a:stretch>
-        </p:blipFill>
-        <p:spPr>
-          <a:xfrm>
-            <a:off x="640080" y="164592"/>
-            <a:ext cx="242773" cy="329184"/>
-          </a:xfrm>
-          <a:prstGeom prst="rect">
-            <a:avLst/>
-          </a:prstGeom>
-        </p:spPr>
-      </p:pic>
-      <p:sp>
-        <p:nvSpPr>
-          <p:cNvPr id="3" name="TextBox 2"/>
+      <p:sp>
+        <p:nvSpPr>
+          <p:cNvPr id="2" name="TextBox 1"/>
           <p:cNvSpPr txBox="1"/>
           <p:nvPr/>
         </p:nvSpPr>
@@ -27497,7 +27521,7 @@
             <a:r>
               <a:rPr sz="1100" b="0">
                 <a:solidFill>
-                  <a:srgbClr val="5B6770"/>
+                  <a:srgbClr val="D8F0F2"/>
                 </a:solidFill>
               </a:rPr>
               <a:t>CEN429 Güvenli Programlama · Hafta 12</a:t>
@@ -27507,7 +27531,7 @@
       </p:sp>
       <p:sp>
         <p:nvSpPr>
-          <p:cNvPr id="4" name="TextBox 3"/>
+          <p:cNvPr id="3" name="TextBox 2"/>
           <p:cNvSpPr txBox="1"/>
           <p:nvPr/>
         </p:nvSpPr>
@@ -27530,7 +27554,7 @@
             <a:r>
               <a:rPr sz="1000" b="0">
                 <a:solidFill>
-                  <a:srgbClr val="5B6770"/>
+                  <a:srgbClr val="D8F0F2"/>
                 </a:solidFill>
               </a:rPr>
               <a:t>RTEÜ Bilgisayar Mühendisliği · 2026-2027 Güz</a:t>
@@ -27540,7 +27564,7 @@
       </p:sp>
       <p:sp>
         <p:nvSpPr>
-          <p:cNvPr id="5" name="TextBox 4"/>
+          <p:cNvPr id="4" name="TextBox 3"/>
           <p:cNvSpPr txBox="1"/>
           <p:nvPr/>
         </p:nvSpPr>
@@ -27564,7 +27588,7 @@
             <a:r>
               <a:rPr sz="1000" b="0">
                 <a:solidFill>
-                  <a:srgbClr val="5B6770"/>
+                  <a:srgbClr val="D8F0F2"/>
                 </a:solidFill>
               </a:rPr>
               <a:t>171</a:t>
@@ -27574,47 +27598,14 @@
       </p:sp>
       <p:sp>
         <p:nvSpPr>
-          <p:cNvPr id="6" name="TextBox 5"/>
-          <p:cNvSpPr txBox="1"/>
-          <p:nvPr/>
-        </p:nvSpPr>
-        <p:spPr>
-          <a:xfrm>
-            <a:off x="640080" y="548640"/>
-            <a:ext cx="10911535" cy="731520"/>
-          </a:xfrm>
-          <a:prstGeom prst="rect">
-            <a:avLst/>
-          </a:prstGeom>
-          <a:noFill/>
-        </p:spPr>
-        <p:txBody>
-          <a:bodyPr wrap="square" lIns="45720" rIns="45720" anchor="ctr">
-            <a:spAutoFit/>
-          </a:bodyPr>
-          <a:lstStyle/>
-          <a:p>
-            <a:r>
-              <a:rPr sz="3000" b="1">
-                <a:solidFill>
-                  <a:srgbClr val="006D77"/>
-                </a:solidFill>
-              </a:rPr>
-              <a:t>Vaka · kurgu</a:t>
-            </a:r>
-          </a:p>
-        </p:txBody>
-      </p:sp>
-      <p:sp>
-        <p:nvSpPr>
-          <p:cNvPr id="7" name="TextBox 6"/>
-          <p:cNvSpPr txBox="1"/>
-          <p:nvPr/>
-        </p:nvSpPr>
-        <p:spPr>
-          <a:xfrm>
-            <a:off x="640080" y="1325880"/>
-            <a:ext cx="10911535" cy="439928"/>
+          <p:cNvPr id="5" name="TextBox 4"/>
+          <p:cNvSpPr txBox="1"/>
+          <p:nvPr/>
+        </p:nvSpPr>
+        <p:spPr>
+          <a:xfrm>
+            <a:off x="640080" y="2743200"/>
+            <a:ext cx="10911535" cy="1280160"/>
           </a:xfrm>
           <a:prstGeom prst="rect">
             <a:avLst/>
@@ -27629,154 +27620,12 @@
           <a:p>
             <a:pPr algn="l"/>
             <a:r>
-              <a:rPr sz="2000" b="0">
-                <a:solidFill>
-                  <a:srgbClr val="1F2D3A"/>
-                </a:solidFill>
-              </a:rPr>
-              <a:t>Sentetik bir mobil uygulama: </a:t>
-            </a:r>
-            <a:r>
-              <a:rPr sz="2000" b="1">
-                <a:solidFill>
-                  <a:srgbClr val="1F2D3A"/>
-                </a:solidFill>
-              </a:rPr>
-              <a:t>"NotKasa"</a:t>
-            </a:r>
-            <a:r>
-              <a:rPr sz="2000" b="0">
-                <a:solidFill>
-                  <a:srgbClr val="1F2D3A"/>
-                </a:solidFill>
-              </a:rPr>
-              <a:t> (yerel şifreli not tutar).</a:t>
-            </a:r>
-          </a:p>
-        </p:txBody>
-      </p:sp>
-      <p:sp>
-        <p:nvSpPr>
-          <p:cNvPr id="8" name="TextBox 7"/>
-          <p:cNvSpPr txBox="1"/>
-          <p:nvPr/>
-        </p:nvSpPr>
-        <p:spPr>
-          <a:xfrm>
-            <a:off x="640080" y="1875536"/>
-            <a:ext cx="10911535" cy="1219200"/>
-          </a:xfrm>
-          <a:prstGeom prst="rect">
-            <a:avLst/>
-          </a:prstGeom>
-          <a:noFill/>
-        </p:spPr>
-        <p:txBody>
-          <a:bodyPr wrap="square" lIns="45720" rIns="45720">
-            <a:spAutoFit/>
-          </a:bodyPr>
-          <a:lstStyle/>
-          <a:p>
-            <a:pPr>
-              <a:spcAft>
-                <a:spcPts val="300"/>
-              </a:spcAft>
-            </a:pPr>
-            <a:r>
-              <a:rPr sz="2000" b="1">
-                <a:solidFill>
-                  <a:srgbClr val="006D77"/>
-                </a:solidFill>
-              </a:rPr>
-              <a:t>• </a:t>
-            </a:r>
-            <a:r>
-              <a:rPr sz="2000" b="0">
-                <a:solidFill>
-                  <a:srgbClr val="1F2D3A"/>
-                </a:solidFill>
-              </a:rPr>
-              <a:t>Notları AES ile şifreliyor.</a:t>
-            </a:r>
-          </a:p>
-          <a:p>
-            <a:pPr>
-              <a:spcAft>
-                <a:spcPts val="300"/>
-              </a:spcAft>
-            </a:pPr>
-            <a:r>
-              <a:rPr sz="2000" b="1">
-                <a:solidFill>
-                  <a:srgbClr val="006D77"/>
-                </a:solidFill>
-              </a:rPr>
-              <a:t>• </a:t>
-            </a:r>
-            <a:r>
-              <a:rPr sz="2000" b="0">
-                <a:solidFill>
-                  <a:srgbClr val="1F2D3A"/>
-                </a:solidFill>
-              </a:rPr>
-              <a:t>Anahtarı sunucudan indiriyor.</a:t>
-            </a:r>
-          </a:p>
-          <a:p>
-            <a:pPr>
-              <a:spcAft>
-                <a:spcPts val="300"/>
-              </a:spcAft>
-            </a:pPr>
-            <a:r>
-              <a:rPr sz="2000" b="1">
-                <a:solidFill>
-                  <a:srgbClr val="006D77"/>
-                </a:solidFill>
-              </a:rPr>
-              <a:t>• </a:t>
-            </a:r>
-            <a:r>
-              <a:rPr sz="2000" b="0">
-                <a:solidFill>
-                  <a:srgbClr val="1F2D3A"/>
-                </a:solidFill>
-              </a:rPr>
-              <a:t>Sürüm derlemesinde günlük kapalı.</a:t>
-            </a:r>
-          </a:p>
-        </p:txBody>
-      </p:sp>
-      <p:sp>
-        <p:nvSpPr>
-          <p:cNvPr id="9" name="TextBox 8"/>
-          <p:cNvSpPr txBox="1"/>
-          <p:nvPr/>
-        </p:nvSpPr>
-        <p:spPr>
-          <a:xfrm>
-            <a:off x="640080" y="3204464"/>
-            <a:ext cx="10911535" cy="439928"/>
-          </a:xfrm>
-          <a:prstGeom prst="rect">
-            <a:avLst/>
-          </a:prstGeom>
-          <a:noFill/>
-        </p:spPr>
-        <p:txBody>
-          <a:bodyPr wrap="square" lIns="45720" rIns="45720">
-            <a:spAutoFit/>
-          </a:bodyPr>
-          <a:lstStyle/>
-          <a:p>
-            <a:pPr algn="l"/>
-            <a:r>
-              <a:rPr sz="2000" b="0">
-                <a:solidFill>
-                  <a:srgbClr val="1F2D3A"/>
-                </a:solidFill>
-              </a:rPr>
-              <a:t>Bu ürünü baştan sona değerlendireceğiz.</a:t>
+              <a:rPr sz="4000" b="1">
+                <a:solidFill>
+                  <a:srgbClr val="FFFFFF"/>
+                </a:solidFill>
+              </a:rPr>
+              <a:t>Ek A · Uçtan uca mini vaka</a:t>
             </a:r>
           </a:p>
         </p:txBody>
@@ -27951,7 +27800,7 @@
                   <a:srgbClr val="006D77"/>
                 </a:solidFill>
               </a:rPr>
-              <a:t>Adım 1 uygulaması · TOE</a:t>
+              <a:t>Vaka · kurgu</a:t>
             </a:r>
           </a:p>
         </p:txBody>
@@ -27965,7 +27814,57 @@
         <p:spPr>
           <a:xfrm>
             <a:off x="640080" y="1325880"/>
-            <a:ext cx="10911535" cy="1595120"/>
+            <a:ext cx="10911535" cy="439928"/>
+          </a:xfrm>
+          <a:prstGeom prst="rect">
+            <a:avLst/>
+          </a:prstGeom>
+          <a:noFill/>
+        </p:spPr>
+        <p:txBody>
+          <a:bodyPr wrap="square" lIns="45720" rIns="45720">
+            <a:spAutoFit/>
+          </a:bodyPr>
+          <a:lstStyle/>
+          <a:p>
+            <a:pPr algn="l"/>
+            <a:r>
+              <a:rPr sz="2000" b="0">
+                <a:solidFill>
+                  <a:srgbClr val="1F2D3A"/>
+                </a:solidFill>
+              </a:rPr>
+              <a:t>Sentetik bir mobil uygulama: </a:t>
+            </a:r>
+            <a:r>
+              <a:rPr sz="2000" b="1">
+                <a:solidFill>
+                  <a:srgbClr val="1F2D3A"/>
+                </a:solidFill>
+              </a:rPr>
+              <a:t>"NotKasa"</a:t>
+            </a:r>
+            <a:r>
+              <a:rPr sz="2000" b="0">
+                <a:solidFill>
+                  <a:srgbClr val="1F2D3A"/>
+                </a:solidFill>
+              </a:rPr>
+              <a:t> (yerel şifreli not tutar).</a:t>
+            </a:r>
+          </a:p>
+        </p:txBody>
+      </p:sp>
+      <p:sp>
+        <p:nvSpPr>
+          <p:cNvPr id="8" name="TextBox 7"/>
+          <p:cNvSpPr txBox="1"/>
+          <p:nvPr/>
+        </p:nvSpPr>
+        <p:spPr>
+          <a:xfrm>
+            <a:off x="640080" y="1875536"/>
+            <a:ext cx="10911535" cy="1219200"/>
           </a:xfrm>
           <a:prstGeom prst="rect">
             <a:avLst/>
@@ -27992,29 +27891,12 @@
               <a:t>• </a:t>
             </a:r>
             <a:r>
-              <a:rPr sz="2000" b="1">
-                <a:solidFill>
-                  <a:srgbClr val="1F2D3A"/>
-                </a:solidFill>
-              </a:rPr>
-              <a:t>TOE:</a:t>
-            </a:r>
-            <a:r>
-              <a:rPr sz="2000" b="0">
-                <a:solidFill>
-                  <a:srgbClr val="1F2D3A"/>
-                </a:solidFill>
-              </a:rPr>
-              <a:t> NotKasa v1.0.0, </a:t>
-            </a:r>
-            <a:r>
-              <a:rPr sz="2000" b="0">
-                <a:solidFill>
-                  <a:srgbClr val="A1123F"/>
-                </a:solidFill>
-                <a:latin typeface="Consolas"/>
-              </a:rPr>
-              <a:t>notkasa-1.0.0.apk</a:t>
+              <a:rPr sz="2000" b="0">
+                <a:solidFill>
+                  <a:srgbClr val="1F2D3A"/>
+                </a:solidFill>
+              </a:rPr>
+              <a:t>Notları AES ile şifreliyor.</a:t>
             </a:r>
           </a:p>
           <a:p>
@@ -28037,24 +27919,7 @@
                   <a:srgbClr val="1F2D3A"/>
                 </a:solidFill>
               </a:rPr>
-              <a:t>Özet (SHA-256): </a:t>
-            </a:r>
-            <a:r>
-              <a:rPr sz="2000" b="0">
-                <a:solidFill>
-                  <a:srgbClr val="A1123F"/>
-                </a:solidFill>
-                <a:latin typeface="Consolas"/>
-              </a:rPr>
-              <a:t>a1b2…</a:t>
-            </a:r>
-            <a:r>
-              <a:rPr sz="2000" b="0">
-                <a:solidFill>
-                  <a:srgbClr val="1F2D3A"/>
-                </a:solidFill>
-              </a:rPr>
-              <a:t> (sentetik)</a:t>
+              <a:t>Anahtarı sunucudan indiriyor.</a:t>
             </a:r>
           </a:p>
           <a:p>
@@ -28077,56 +27942,41 @@
                   <a:srgbClr val="1F2D3A"/>
                 </a:solidFill>
               </a:rPr>
-              <a:t>Kaynak: </a:t>
-            </a:r>
-            <a:r>
-              <a:rPr sz="2000" b="0">
-                <a:solidFill>
-                  <a:srgbClr val="A1123F"/>
-                </a:solidFill>
-                <a:latin typeface="Consolas"/>
-              </a:rPr>
-              <a:t>notkasa/</a:t>
-            </a:r>
-            <a:r>
-              <a:rPr sz="2000" b="0">
-                <a:solidFill>
-                  <a:srgbClr val="1F2D3A"/>
-                </a:solidFill>
-              </a:rPr>
-              <a:t> deposu, etiket </a:t>
-            </a:r>
-            <a:r>
-              <a:rPr sz="2000" b="0">
-                <a:solidFill>
-                  <a:srgbClr val="A1123F"/>
-                </a:solidFill>
-                <a:latin typeface="Consolas"/>
-              </a:rPr>
-              <a:t>v1.0.0</a:t>
-            </a:r>
-          </a:p>
-          <a:p>
-            <a:pPr>
-              <a:spcAft>
-                <a:spcPts val="300"/>
-              </a:spcAft>
-            </a:pPr>
-            <a:r>
-              <a:rPr sz="2000" b="1">
-                <a:solidFill>
-                  <a:srgbClr val="006D77"/>
-                </a:solidFill>
-              </a:rPr>
-              <a:t>• </a:t>
-            </a:r>
-            <a:r>
-              <a:rPr sz="2000" b="0">
-                <a:solidFill>
-                  <a:srgbClr val="1F2D3A"/>
-                </a:solidFill>
-              </a:rPr>
-              <a:t>Kapsam dışı: sunucu altyapısı</a:t>
+              <a:t>Sürüm derlemesinde günlük kapalı.</a:t>
+            </a:r>
+          </a:p>
+        </p:txBody>
+      </p:sp>
+      <p:sp>
+        <p:nvSpPr>
+          <p:cNvPr id="9" name="TextBox 8"/>
+          <p:cNvSpPr txBox="1"/>
+          <p:nvPr/>
+        </p:nvSpPr>
+        <p:spPr>
+          <a:xfrm>
+            <a:off x="640080" y="3204464"/>
+            <a:ext cx="10911535" cy="439928"/>
+          </a:xfrm>
+          <a:prstGeom prst="rect">
+            <a:avLst/>
+          </a:prstGeom>
+          <a:noFill/>
+        </p:spPr>
+        <p:txBody>
+          <a:bodyPr wrap="square" lIns="45720" rIns="45720">
+            <a:spAutoFit/>
+          </a:bodyPr>
+          <a:lstStyle/>
+          <a:p>
+            <a:pPr algn="l"/>
+            <a:r>
+              <a:rPr sz="2000" b="0">
+                <a:solidFill>
+                  <a:srgbClr val="1F2D3A"/>
+                </a:solidFill>
+              </a:rPr>
+              <a:t>Bu ürünü baştan sona değerlendireceğiz.</a:t>
             </a:r>
           </a:p>
         </p:txBody>
@@ -28301,7 +28151,7 @@
                   <a:srgbClr val="006D77"/>
                 </a:solidFill>
               </a:rPr>
-              <a:t>Adım 2–3 · Belge ve gereksinim şablonu</a:t>
+              <a:t>Adım 1 uygulaması · TOE</a:t>
             </a:r>
           </a:p>
         </p:txBody>
@@ -28315,7 +28165,7 @@
         <p:spPr>
           <a:xfrm>
             <a:off x="640080" y="1325880"/>
-            <a:ext cx="10911535" cy="1173480"/>
+            <a:ext cx="10911535" cy="1595120"/>
           </a:xfrm>
           <a:prstGeom prst="rect">
             <a:avLst/>
@@ -28342,12 +28192,29 @@
               <a:t>• </a:t>
             </a:r>
             <a:r>
-              <a:rPr sz="2000" b="0">
-                <a:solidFill>
-                  <a:srgbClr val="1F2D3A"/>
-                </a:solidFill>
-              </a:rPr>
-              <a:t>Teslim: kaynak, güvenlik kılavuzu, hem hata ayıklama hem sürüm APK.</a:t>
+              <a:rPr sz="2000" b="1">
+                <a:solidFill>
+                  <a:srgbClr val="1F2D3A"/>
+                </a:solidFill>
+              </a:rPr>
+              <a:t>TOE:</a:t>
+            </a:r>
+            <a:r>
+              <a:rPr sz="2000" b="0">
+                <a:solidFill>
+                  <a:srgbClr val="1F2D3A"/>
+                </a:solidFill>
+              </a:rPr>
+              <a:t> NotKasa v1.0.0, </a:t>
+            </a:r>
+            <a:r>
+              <a:rPr sz="2000" b="0">
+                <a:solidFill>
+                  <a:srgbClr val="A1123F"/>
+                </a:solidFill>
+                <a:latin typeface="Consolas"/>
+              </a:rPr>
+              <a:t>notkasa-1.0.0.apk</a:t>
             </a:r>
           </a:p>
           <a:p>
@@ -28370,7 +28237,96 @@
                   <a:srgbClr val="1F2D3A"/>
                 </a:solidFill>
               </a:rPr>
-              <a:t>Gereksinim şablonu: MASVS maddeleri numaralı; her biri için durum + kanıt referansı.</a:t>
+              <a:t>Özet (SHA-256): </a:t>
+            </a:r>
+            <a:r>
+              <a:rPr sz="2000" b="0">
+                <a:solidFill>
+                  <a:srgbClr val="A1123F"/>
+                </a:solidFill>
+                <a:latin typeface="Consolas"/>
+              </a:rPr>
+              <a:t>a1b2…</a:t>
+            </a:r>
+            <a:r>
+              <a:rPr sz="2000" b="0">
+                <a:solidFill>
+                  <a:srgbClr val="1F2D3A"/>
+                </a:solidFill>
+              </a:rPr>
+              <a:t> (sentetik)</a:t>
+            </a:r>
+          </a:p>
+          <a:p>
+            <a:pPr>
+              <a:spcAft>
+                <a:spcPts val="300"/>
+              </a:spcAft>
+            </a:pPr>
+            <a:r>
+              <a:rPr sz="2000" b="1">
+                <a:solidFill>
+                  <a:srgbClr val="006D77"/>
+                </a:solidFill>
+              </a:rPr>
+              <a:t>• </a:t>
+            </a:r>
+            <a:r>
+              <a:rPr sz="2000" b="0">
+                <a:solidFill>
+                  <a:srgbClr val="1F2D3A"/>
+                </a:solidFill>
+              </a:rPr>
+              <a:t>Kaynak: </a:t>
+            </a:r>
+            <a:r>
+              <a:rPr sz="2000" b="0">
+                <a:solidFill>
+                  <a:srgbClr val="A1123F"/>
+                </a:solidFill>
+                <a:latin typeface="Consolas"/>
+              </a:rPr>
+              <a:t>notkasa/</a:t>
+            </a:r>
+            <a:r>
+              <a:rPr sz="2000" b="0">
+                <a:solidFill>
+                  <a:srgbClr val="1F2D3A"/>
+                </a:solidFill>
+              </a:rPr>
+              <a:t> deposu, etiket </a:t>
+            </a:r>
+            <a:r>
+              <a:rPr sz="2000" b="0">
+                <a:solidFill>
+                  <a:srgbClr val="A1123F"/>
+                </a:solidFill>
+                <a:latin typeface="Consolas"/>
+              </a:rPr>
+              <a:t>v1.0.0</a:t>
+            </a:r>
+          </a:p>
+          <a:p>
+            <a:pPr>
+              <a:spcAft>
+                <a:spcPts val="300"/>
+              </a:spcAft>
+            </a:pPr>
+            <a:r>
+              <a:rPr sz="2000" b="1">
+                <a:solidFill>
+                  <a:srgbClr val="006D77"/>
+                </a:solidFill>
+              </a:rPr>
+              <a:t>• </a:t>
+            </a:r>
+            <a:r>
+              <a:rPr sz="2000" b="0">
+                <a:solidFill>
+                  <a:srgbClr val="1F2D3A"/>
+                </a:solidFill>
+              </a:rPr>
+              <a:t>Kapsam dışı: sunucu altyapısı</a:t>
             </a:r>
           </a:p>
         </p:txBody>
@@ -28545,7 +28501,7 @@
                   <a:srgbClr val="006D77"/>
                 </a:solidFill>
               </a:rPr>
-              <a:t>Adım 5 · Kod incelemesi bulguları (sentetik)</a:t>
+              <a:t>Adım 2–3 · Belge ve gereksinim şablonu</a:t>
             </a:r>
           </a:p>
         </p:txBody>
@@ -28586,53 +28542,12 @@
               <a:t>• </a:t>
             </a:r>
             <a:r>
-              <a:rPr sz="2000" b="1">
-                <a:solidFill>
-                  <a:srgbClr val="1F2D3A"/>
-                </a:solidFill>
-              </a:rPr>
-              <a:t>B-01:</a:t>
-            </a:r>
-            <a:r>
-              <a:rPr sz="2000" b="0">
-                <a:solidFill>
-                  <a:srgbClr val="1F2D3A"/>
-                </a:solidFill>
-              </a:rPr>
-              <a:t> anahtar bir ara değişkende siliniyor ama </a:t>
-            </a:r>
-            <a:r>
-              <a:rPr sz="2000" b="0">
-                <a:solidFill>
-                  <a:srgbClr val="A1123F"/>
-                </a:solidFill>
-                <a:latin typeface="Consolas"/>
-              </a:rPr>
-              <a:t>tmp</a:t>
-            </a:r>
-            <a:r>
-              <a:rPr sz="2000" b="0">
-                <a:solidFill>
-                  <a:srgbClr val="1F2D3A"/>
-                </a:solidFill>
-              </a:rPr>
-              <a:t> tampon </a:t>
-            </a:r>
-            <a:r>
-              <a:rPr sz="2000" b="1">
-                <a:solidFill>
-                  <a:srgbClr val="1F2D3A"/>
-                </a:solidFill>
-              </a:rPr>
-              <a:t>silinmemiş</a:t>
-            </a:r>
-            <a:r>
-              <a:rPr sz="2000" b="0">
-                <a:solidFill>
-                  <a:srgbClr val="1F2D3A"/>
-                </a:solidFill>
-              </a:rPr>
-              <a:t> (bellekte kalıyor).</a:t>
+              <a:rPr sz="2000" b="0">
+                <a:solidFill>
+                  <a:srgbClr val="1F2D3A"/>
+                </a:solidFill>
+              </a:rPr>
+              <a:t>Teslim: kaynak, güvenlik kılavuzu, hem hata ayıklama hem sürüm APK.</a:t>
             </a:r>
           </a:p>
           <a:p>
@@ -28650,20 +28565,12 @@
               <a:t>• </a:t>
             </a:r>
             <a:r>
-              <a:rPr sz="2000" b="1">
-                <a:solidFill>
-                  <a:srgbClr val="1F2D3A"/>
-                </a:solidFill>
-              </a:rPr>
-              <a:t>B-02:</a:t>
-            </a:r>
-            <a:r>
-              <a:rPr sz="2000" b="0">
-                <a:solidFill>
-                  <a:srgbClr val="1F2D3A"/>
-                </a:solidFill>
-              </a:rPr>
-              <a:t> hata iletisi çözme hatasında iç ayrıntı sızdırıyor.</a:t>
+              <a:rPr sz="2000" b="0">
+                <a:solidFill>
+                  <a:srgbClr val="1F2D3A"/>
+                </a:solidFill>
+              </a:rPr>
+              <a:t>Gereksinim şablonu: MASVS maddeleri numaralı; her biri için durum + kanıt referansı.</a:t>
             </a:r>
           </a:p>
         </p:txBody>
@@ -28838,7 +28745,7 @@
                   <a:srgbClr val="006D77"/>
                 </a:solidFill>
               </a:rPr>
-              <a:t>Adım 6 · Zafiyet analizi</a:t>
+              <a:t>Adım 5 · Kod incelemesi bulguları (sentetik)</a:t>
             </a:r>
           </a:p>
         </p:txBody>
@@ -28852,7 +28759,7 @@
         <p:spPr>
           <a:xfrm>
             <a:off x="640080" y="1325880"/>
-            <a:ext cx="10911535" cy="1219200"/>
+            <a:ext cx="10911535" cy="1173480"/>
           </a:xfrm>
           <a:prstGeom prst="rect">
             <a:avLst/>
@@ -28879,12 +28786,53 @@
               <a:t>• </a:t>
             </a:r>
             <a:r>
-              <a:rPr sz="2000" b="0">
-                <a:solidFill>
-                  <a:srgbClr val="1F2D3A"/>
-                </a:solidFill>
-              </a:rPr>
-              <a:t>Varlıklar: not içeriği (C/I), veri anahtarı (C/I), sunucu jetonu.</a:t>
+              <a:rPr sz="2000" b="1">
+                <a:solidFill>
+                  <a:srgbClr val="1F2D3A"/>
+                </a:solidFill>
+              </a:rPr>
+              <a:t>B-01:</a:t>
+            </a:r>
+            <a:r>
+              <a:rPr sz="2000" b="0">
+                <a:solidFill>
+                  <a:srgbClr val="1F2D3A"/>
+                </a:solidFill>
+              </a:rPr>
+              <a:t> anahtar bir ara değişkende siliniyor ama </a:t>
+            </a:r>
+            <a:r>
+              <a:rPr sz="2000" b="0">
+                <a:solidFill>
+                  <a:srgbClr val="A1123F"/>
+                </a:solidFill>
+                <a:latin typeface="Consolas"/>
+              </a:rPr>
+              <a:t>tmp</a:t>
+            </a:r>
+            <a:r>
+              <a:rPr sz="2000" b="0">
+                <a:solidFill>
+                  <a:srgbClr val="1F2D3A"/>
+                </a:solidFill>
+              </a:rPr>
+              <a:t> tampon </a:t>
+            </a:r>
+            <a:r>
+              <a:rPr sz="2000" b="1">
+                <a:solidFill>
+                  <a:srgbClr val="1F2D3A"/>
+                </a:solidFill>
+              </a:rPr>
+              <a:t>silinmemiş</a:t>
+            </a:r>
+            <a:r>
+              <a:rPr sz="2000" b="0">
+                <a:solidFill>
+                  <a:srgbClr val="1F2D3A"/>
+                </a:solidFill>
+              </a:rPr>
+              <a:t> (bellekte kalıyor).</a:t>
             </a:r>
           </a:p>
           <a:p>
@@ -28902,51 +28850,20 @@
               <a:t>• </a:t>
             </a:r>
             <a:r>
-              <a:rPr sz="2000" b="0">
-                <a:solidFill>
-                  <a:srgbClr val="1F2D3A"/>
-                </a:solidFill>
-              </a:rPr>
-              <a:t>Soru: her varlık </a:t>
-            </a:r>
-            <a:r>
-              <a:rPr sz="2000" b="1">
-                <a:solidFill>
-                  <a:srgbClr val="1F2D3A"/>
-                </a:solidFill>
-              </a:rPr>
-              <a:t>nerede</a:t>
-            </a:r>
-            <a:r>
-              <a:rPr sz="2000" b="0">
-                <a:solidFill>
-                  <a:srgbClr val="1F2D3A"/>
-                </a:solidFill>
-              </a:rPr>
-              <a:t> açığa çıkıyor?</a:t>
-            </a:r>
-          </a:p>
-          <a:p>
-            <a:pPr>
-              <a:spcAft>
-                <a:spcPts val="300"/>
-              </a:spcAft>
-            </a:pPr>
-            <a:r>
-              <a:rPr sz="2000" b="1">
-                <a:solidFill>
-                  <a:srgbClr val="006D77"/>
-                </a:solidFill>
-              </a:rPr>
-              <a:t>• </a:t>
-            </a:r>
-            <a:r>
-              <a:rPr sz="2000" b="0">
-                <a:solidFill>
-                  <a:srgbClr val="1F2D3A"/>
-                </a:solidFill>
-              </a:rPr>
-              <a:t>Çıktı: bir sızma testi planı (aşağıda).</a:t>
+              <a:rPr sz="2000" b="1">
+                <a:solidFill>
+                  <a:srgbClr val="1F2D3A"/>
+                </a:solidFill>
+              </a:rPr>
+              <a:t>B-02:</a:t>
+            </a:r>
+            <a:r>
+              <a:rPr sz="2000" b="0">
+                <a:solidFill>
+                  <a:srgbClr val="1F2D3A"/>
+                </a:solidFill>
+              </a:rPr>
+              <a:t> hata iletisi çözme hatasında iç ayrıntı sızdırıyor.</a:t>
             </a:r>
           </a:p>
         </p:txBody>
@@ -29121,7 +29038,7 @@
                   <a:srgbClr val="006D77"/>
                 </a:solidFill>
               </a:rPr>
-              <a:t>Adım 7 · Sızma testi kartı (özet)</a:t>
+              <a:t>Adım 6 · Zafiyet analizi</a:t>
             </a:r>
           </a:p>
         </p:txBody>
@@ -29162,20 +29079,12 @@
               <a:t>• </a:t>
             </a:r>
             <a:r>
-              <a:rPr sz="2000" b="1">
-                <a:solidFill>
-                  <a:srgbClr val="1F2D3A"/>
-                </a:solidFill>
-              </a:rPr>
-              <a:t>T-01</a:t>
-            </a:r>
-            <a:r>
-              <a:rPr sz="2000" b="0">
-                <a:solidFill>
-                  <a:srgbClr val="1F2D3A"/>
-                </a:solidFill>
-              </a:rPr>
-              <a:t> düz metin diskte? → geçti (şifreli)</a:t>
+              <a:rPr sz="2000" b="0">
+                <a:solidFill>
+                  <a:srgbClr val="1F2D3A"/>
+                </a:solidFill>
+              </a:rPr>
+              <a:t>Varlıklar: not içeriği (C/I), veri anahtarı (C/I), sunucu jetonu.</a:t>
             </a:r>
           </a:p>
           <a:p>
@@ -29193,36 +29102,28 @@
               <a:t>• </a:t>
             </a:r>
             <a:r>
-              <a:rPr sz="2000" b="1">
-                <a:solidFill>
-                  <a:srgbClr val="1F2D3A"/>
-                </a:solidFill>
-              </a:rPr>
-              <a:t>T-02</a:t>
-            </a:r>
-            <a:r>
-              <a:rPr sz="2000" b="0">
-                <a:solidFill>
-                  <a:srgbClr val="1F2D3A"/>
-                </a:solidFill>
-              </a:rPr>
-              <a:t> anahtar bellekte kalıyor mu? → </a:t>
-            </a:r>
-            <a:r>
-              <a:rPr sz="2000" b="1">
-                <a:solidFill>
-                  <a:srgbClr val="1F2D3A"/>
-                </a:solidFill>
-              </a:rPr>
-              <a:t>kaldı</a:t>
-            </a:r>
-            <a:r>
-              <a:rPr sz="2000" b="0">
-                <a:solidFill>
-                  <a:srgbClr val="1F2D3A"/>
-                </a:solidFill>
-              </a:rPr>
-              <a:t> (B-01 doğrulandı)</a:t>
+              <a:rPr sz="2000" b="0">
+                <a:solidFill>
+                  <a:srgbClr val="1F2D3A"/>
+                </a:solidFill>
+              </a:rPr>
+              <a:t>Soru: her varlık </a:t>
+            </a:r>
+            <a:r>
+              <a:rPr sz="2000" b="1">
+                <a:solidFill>
+                  <a:srgbClr val="1F2D3A"/>
+                </a:solidFill>
+              </a:rPr>
+              <a:t>nerede</a:t>
+            </a:r>
+            <a:r>
+              <a:rPr sz="2000" b="0">
+                <a:solidFill>
+                  <a:srgbClr val="1F2D3A"/>
+                </a:solidFill>
+              </a:rPr>
+              <a:t> açığa çıkıyor?</a:t>
             </a:r>
           </a:p>
           <a:p>
@@ -29240,36 +29141,12 @@
               <a:t>• </a:t>
             </a:r>
             <a:r>
-              <a:rPr sz="2000" b="1">
-                <a:solidFill>
-                  <a:srgbClr val="1F2D3A"/>
-                </a:solidFill>
-              </a:rPr>
-              <a:t>T-03</a:t>
-            </a:r>
-            <a:r>
-              <a:rPr sz="2000" b="0">
-                <a:solidFill>
-                  <a:srgbClr val="1F2D3A"/>
-                </a:solidFill>
-              </a:rPr>
-              <a:t> hata iletisi sızdırıyor mu? → </a:t>
-            </a:r>
-            <a:r>
-              <a:rPr sz="2000" b="1">
-                <a:solidFill>
-                  <a:srgbClr val="1F2D3A"/>
-                </a:solidFill>
-              </a:rPr>
-              <a:t>kaldı</a:t>
-            </a:r>
-            <a:r>
-              <a:rPr sz="2000" b="0">
-                <a:solidFill>
-                  <a:srgbClr val="1F2D3A"/>
-                </a:solidFill>
-              </a:rPr>
-              <a:t> (B-02)</a:t>
+              <a:rPr sz="2000" b="0">
+                <a:solidFill>
+                  <a:srgbClr val="1F2D3A"/>
+                </a:solidFill>
+              </a:rPr>
+              <a:t>Çıktı: bir sızma testi planı (aşağıda).</a:t>
             </a:r>
           </a:p>
         </p:txBody>
@@ -29444,7 +29321,7 @@
                   <a:srgbClr val="006D77"/>
                 </a:solidFill>
               </a:rPr>
-              <a:t>Adım 7 · T-02 derecelendirme</a:t>
+              <a:t>Adım 7 · Sızma testi kartı (özet)</a:t>
             </a:r>
           </a:p>
         </p:txBody>
@@ -29458,7 +29335,7 @@
         <p:spPr>
           <a:xfrm>
             <a:off x="640080" y="1325880"/>
-            <a:ext cx="10911535" cy="1549400"/>
+            <a:ext cx="10911535" cy="1219200"/>
           </a:xfrm>
           <a:prstGeom prst="rect">
             <a:avLst/>
@@ -29485,12 +29362,20 @@
               <a:t>• </a:t>
             </a:r>
             <a:r>
-              <a:rPr sz="2000" b="0">
-                <a:solidFill>
-                  <a:srgbClr val="1F2D3A"/>
-                </a:solidFill>
-              </a:rPr>
-              <a:t>Süre: düşük · uzmanlık: orta · bilgi: kamuya açık · ekipman: ücretsiz (bellek dökümü)</a:t>
+              <a:rPr sz="2000" b="1">
+                <a:solidFill>
+                  <a:srgbClr val="1F2D3A"/>
+                </a:solidFill>
+              </a:rPr>
+              <a:t>T-01</a:t>
+            </a:r>
+            <a:r>
+              <a:rPr sz="2000" b="0">
+                <a:solidFill>
+                  <a:srgbClr val="1F2D3A"/>
+                </a:solidFill>
+              </a:rPr>
+              <a:t> düz metin diskte? → geçti (şifreli)</a:t>
             </a:r>
           </a:p>
           <a:p>
@@ -29508,20 +29393,36 @@
               <a:t>• </a:t>
             </a:r>
             <a:r>
-              <a:rPr sz="2000" b="0">
-                <a:solidFill>
-                  <a:srgbClr val="1F2D3A"/>
-                </a:solidFill>
-              </a:rPr>
-              <a:t>→ </a:t>
-            </a:r>
-            <a:r>
-              <a:rPr sz="2000" b="1">
-                <a:solidFill>
-                  <a:srgbClr val="1F2D3A"/>
-                </a:solidFill>
-              </a:rPr>
-              <a:t>orta-düşük saldırı potansiyeli</a:t>
+              <a:rPr sz="2000" b="1">
+                <a:solidFill>
+                  <a:srgbClr val="1F2D3A"/>
+                </a:solidFill>
+              </a:rPr>
+              <a:t>T-02</a:t>
+            </a:r>
+            <a:r>
+              <a:rPr sz="2000" b="0">
+                <a:solidFill>
+                  <a:srgbClr val="1F2D3A"/>
+                </a:solidFill>
+              </a:rPr>
+              <a:t> anahtar bellekte kalıyor mu? → </a:t>
+            </a:r>
+            <a:r>
+              <a:rPr sz="2000" b="1">
+                <a:solidFill>
+                  <a:srgbClr val="1F2D3A"/>
+                </a:solidFill>
+              </a:rPr>
+              <a:t>kaldı</a:t>
+            </a:r>
+            <a:r>
+              <a:rPr sz="2000" b="0">
+                <a:solidFill>
+                  <a:srgbClr val="1F2D3A"/>
+                </a:solidFill>
+              </a:rPr>
+              <a:t> (B-01 doğrulandı)</a:t>
             </a:r>
           </a:p>
           <a:p>
@@ -29539,12 +29440,36 @@
               <a:t>• </a:t>
             </a:r>
             <a:r>
-              <a:rPr sz="2000" b="0">
-                <a:solidFill>
-                  <a:srgbClr val="1F2D3A"/>
-                </a:solidFill>
-              </a:rPr>
-              <a:t>CVSS: orta (gizlilik etkisi)</a:t>
+              <a:rPr sz="2000" b="1">
+                <a:solidFill>
+                  <a:srgbClr val="1F2D3A"/>
+                </a:solidFill>
+              </a:rPr>
+              <a:t>T-03</a:t>
+            </a:r>
+            <a:r>
+              <a:rPr sz="2000" b="0">
+                <a:solidFill>
+                  <a:srgbClr val="1F2D3A"/>
+                </a:solidFill>
+              </a:rPr>
+              <a:t> hata iletisi sızdırıyor mu? → </a:t>
+            </a:r>
+            <a:r>
+              <a:rPr sz="2000" b="1">
+                <a:solidFill>
+                  <a:srgbClr val="1F2D3A"/>
+                </a:solidFill>
+              </a:rPr>
+              <a:t>kaldı</a:t>
+            </a:r>
+            <a:r>
+              <a:rPr sz="2000" b="0">
+                <a:solidFill>
+                  <a:srgbClr val="1F2D3A"/>
+                </a:solidFill>
+              </a:rPr>
+              <a:t> (B-02)</a:t>
             </a:r>
           </a:p>
         </p:txBody>
@@ -29687,6 +29612,281 @@
                 </a:solidFill>
               </a:rPr>
               <a:t>178</a:t>
+            </a:r>
+          </a:p>
+        </p:txBody>
+      </p:sp>
+      <p:sp>
+        <p:nvSpPr>
+          <p:cNvPr id="6" name="TextBox 5"/>
+          <p:cNvSpPr txBox="1"/>
+          <p:nvPr/>
+        </p:nvSpPr>
+        <p:spPr>
+          <a:xfrm>
+            <a:off x="640080" y="548640"/>
+            <a:ext cx="10911535" cy="731520"/>
+          </a:xfrm>
+          <a:prstGeom prst="rect">
+            <a:avLst/>
+          </a:prstGeom>
+          <a:noFill/>
+        </p:spPr>
+        <p:txBody>
+          <a:bodyPr wrap="square" lIns="45720" rIns="45720" anchor="ctr">
+            <a:spAutoFit/>
+          </a:bodyPr>
+          <a:lstStyle/>
+          <a:p>
+            <a:r>
+              <a:rPr sz="3000" b="1">
+                <a:solidFill>
+                  <a:srgbClr val="006D77"/>
+                </a:solidFill>
+              </a:rPr>
+              <a:t>Adım 7 · T-02 derecelendirme</a:t>
+            </a:r>
+          </a:p>
+        </p:txBody>
+      </p:sp>
+      <p:sp>
+        <p:nvSpPr>
+          <p:cNvPr id="7" name="TextBox 6"/>
+          <p:cNvSpPr txBox="1"/>
+          <p:nvPr/>
+        </p:nvSpPr>
+        <p:spPr>
+          <a:xfrm>
+            <a:off x="640080" y="1325880"/>
+            <a:ext cx="10911535" cy="1549400"/>
+          </a:xfrm>
+          <a:prstGeom prst="rect">
+            <a:avLst/>
+          </a:prstGeom>
+          <a:noFill/>
+        </p:spPr>
+        <p:txBody>
+          <a:bodyPr wrap="square" lIns="45720" rIns="45720">
+            <a:spAutoFit/>
+          </a:bodyPr>
+          <a:lstStyle/>
+          <a:p>
+            <a:pPr>
+              <a:spcAft>
+                <a:spcPts val="300"/>
+              </a:spcAft>
+            </a:pPr>
+            <a:r>
+              <a:rPr sz="2000" b="1">
+                <a:solidFill>
+                  <a:srgbClr val="006D77"/>
+                </a:solidFill>
+              </a:rPr>
+              <a:t>• </a:t>
+            </a:r>
+            <a:r>
+              <a:rPr sz="2000" b="0">
+                <a:solidFill>
+                  <a:srgbClr val="1F2D3A"/>
+                </a:solidFill>
+              </a:rPr>
+              <a:t>Süre: düşük · uzmanlık: orta · bilgi: kamuya açık · ekipman: ücretsiz (bellek dökümü)</a:t>
+            </a:r>
+          </a:p>
+          <a:p>
+            <a:pPr>
+              <a:spcAft>
+                <a:spcPts val="300"/>
+              </a:spcAft>
+            </a:pPr>
+            <a:r>
+              <a:rPr sz="2000" b="1">
+                <a:solidFill>
+                  <a:srgbClr val="006D77"/>
+                </a:solidFill>
+              </a:rPr>
+              <a:t>• </a:t>
+            </a:r>
+            <a:r>
+              <a:rPr sz="2000" b="0">
+                <a:solidFill>
+                  <a:srgbClr val="1F2D3A"/>
+                </a:solidFill>
+              </a:rPr>
+              <a:t>→ </a:t>
+            </a:r>
+            <a:r>
+              <a:rPr sz="2000" b="1">
+                <a:solidFill>
+                  <a:srgbClr val="1F2D3A"/>
+                </a:solidFill>
+              </a:rPr>
+              <a:t>orta-düşük saldırı potansiyeli</a:t>
+            </a:r>
+          </a:p>
+          <a:p>
+            <a:pPr>
+              <a:spcAft>
+                <a:spcPts val="300"/>
+              </a:spcAft>
+            </a:pPr>
+            <a:r>
+              <a:rPr sz="2000" b="1">
+                <a:solidFill>
+                  <a:srgbClr val="006D77"/>
+                </a:solidFill>
+              </a:rPr>
+              <a:t>• </a:t>
+            </a:r>
+            <a:r>
+              <a:rPr sz="2000" b="0">
+                <a:solidFill>
+                  <a:srgbClr val="1F2D3A"/>
+                </a:solidFill>
+              </a:rPr>
+              <a:t>CVSS: orta (gizlilik etkisi)</a:t>
+            </a:r>
+          </a:p>
+        </p:txBody>
+      </p:sp>
+    </p:spTree>
+  </p:cSld>
+  <p:clrMapOvr>
+    <a:masterClrMapping/>
+  </p:clrMapOvr>
+</p:sld>
+</file>
+
+<file path=ppt/slides/slide179.xml><?xml version="1.0" encoding="utf-8"?>
+<p:sld xmlns:a="http://schemas.openxmlformats.org/drawingml/2006/main" xmlns:p="http://schemas.openxmlformats.org/presentationml/2006/main" xmlns:r="http://schemas.openxmlformats.org/officeDocument/2006/relationships">
+  <p:cSld>
+    <p:spTree>
+      <p:nvGrpSpPr>
+        <p:cNvPr id="1" name=""/>
+        <p:cNvGrpSpPr/>
+        <p:nvPr/>
+      </p:nvGrpSpPr>
+      <p:grpSpPr/>
+      <p:pic>
+        <p:nvPicPr>
+          <p:cNvPr id="2" name="Picture 1" descr="rteu_logo_kucuk.jpg"/>
+          <p:cNvPicPr>
+            <a:picLocks noChangeAspect="1"/>
+          </p:cNvPicPr>
+          <p:nvPr/>
+        </p:nvPicPr>
+        <p:blipFill>
+          <a:blip r:embed="rId2"/>
+          <a:stretch>
+            <a:fillRect/>
+          </a:stretch>
+        </p:blipFill>
+        <p:spPr>
+          <a:xfrm>
+            <a:off x="640080" y="164592"/>
+            <a:ext cx="242773" cy="329184"/>
+          </a:xfrm>
+          <a:prstGeom prst="rect">
+            <a:avLst/>
+          </a:prstGeom>
+        </p:spPr>
+      </p:pic>
+      <p:sp>
+        <p:nvSpPr>
+          <p:cNvPr id="3" name="TextBox 2"/>
+          <p:cNvSpPr txBox="1"/>
+          <p:nvPr/>
+        </p:nvSpPr>
+        <p:spPr>
+          <a:xfrm>
+            <a:off x="1051560" y="182880"/>
+            <a:ext cx="7315200" cy="320040"/>
+          </a:xfrm>
+          <a:prstGeom prst="rect">
+            <a:avLst/>
+          </a:prstGeom>
+          <a:noFill/>
+        </p:spPr>
+        <p:txBody>
+          <a:bodyPr wrap="square" lIns="45720" rIns="45720">
+            <a:spAutoFit/>
+          </a:bodyPr>
+          <a:lstStyle/>
+          <a:p>
+            <a:r>
+              <a:rPr sz="1100" b="0">
+                <a:solidFill>
+                  <a:srgbClr val="5B6770"/>
+                </a:solidFill>
+              </a:rPr>
+              <a:t>CEN429 Güvenli Programlama · Hafta 12</a:t>
+            </a:r>
+          </a:p>
+        </p:txBody>
+      </p:sp>
+      <p:sp>
+        <p:nvSpPr>
+          <p:cNvPr id="4" name="TextBox 3"/>
+          <p:cNvSpPr txBox="1"/>
+          <p:nvPr/>
+        </p:nvSpPr>
+        <p:spPr>
+          <a:xfrm>
+            <a:off x="640080" y="6446520"/>
+            <a:ext cx="7315200" cy="274320"/>
+          </a:xfrm>
+          <a:prstGeom prst="rect">
+            <a:avLst/>
+          </a:prstGeom>
+          <a:noFill/>
+        </p:spPr>
+        <p:txBody>
+          <a:bodyPr wrap="square" lIns="45720" rIns="45720">
+            <a:spAutoFit/>
+          </a:bodyPr>
+          <a:lstStyle/>
+          <a:p>
+            <a:r>
+              <a:rPr sz="1000" b="0">
+                <a:solidFill>
+                  <a:srgbClr val="5B6770"/>
+                </a:solidFill>
+              </a:rPr>
+              <a:t>RTEÜ Bilgisayar Mühendisliği · 2026-2027 Güz</a:t>
+            </a:r>
+          </a:p>
+        </p:txBody>
+      </p:sp>
+      <p:sp>
+        <p:nvSpPr>
+          <p:cNvPr id="5" name="TextBox 4"/>
+          <p:cNvSpPr txBox="1"/>
+          <p:nvPr/>
+        </p:nvSpPr>
+        <p:spPr>
+          <a:xfrm>
+            <a:off x="10637215" y="6446520"/>
+            <a:ext cx="914400" cy="274320"/>
+          </a:xfrm>
+          <a:prstGeom prst="rect">
+            <a:avLst/>
+          </a:prstGeom>
+          <a:noFill/>
+        </p:spPr>
+        <p:txBody>
+          <a:bodyPr wrap="square" lIns="45720" rIns="45720">
+            <a:spAutoFit/>
+          </a:bodyPr>
+          <a:lstStyle/>
+          <a:p>
+            <a:pPr algn="r"/>
+            <a:r>
+              <a:rPr sz="1000" b="0">
+                <a:solidFill>
+                  <a:srgbClr val="5B6770"/>
+                </a:solidFill>
+              </a:rPr>
+              <a:t>179</a:t>
             </a:r>
           </a:p>
         </p:txBody>
@@ -29963,306 +30163,6 @@
 </p:sld>
 </file>
 
-<file path=ppt/slides/slide179.xml><?xml version="1.0" encoding="utf-8"?>
-<p:sld xmlns:a="http://schemas.openxmlformats.org/drawingml/2006/main" xmlns:p="http://schemas.openxmlformats.org/presentationml/2006/main" xmlns:r="http://schemas.openxmlformats.org/officeDocument/2006/relationships">
-  <p:cSld>
-    <p:spTree>
-      <p:nvGrpSpPr>
-        <p:cNvPr id="1" name=""/>
-        <p:cNvGrpSpPr/>
-        <p:nvPr/>
-      </p:nvGrpSpPr>
-      <p:grpSpPr/>
-      <p:pic>
-        <p:nvPicPr>
-          <p:cNvPr id="2" name="Picture 1" descr="rteu_logo_kucuk.jpg"/>
-          <p:cNvPicPr>
-            <a:picLocks noChangeAspect="1"/>
-          </p:cNvPicPr>
-          <p:nvPr/>
-        </p:nvPicPr>
-        <p:blipFill>
-          <a:blip r:embed="rId2"/>
-          <a:stretch>
-            <a:fillRect/>
-          </a:stretch>
-        </p:blipFill>
-        <p:spPr>
-          <a:xfrm>
-            <a:off x="640080" y="164592"/>
-            <a:ext cx="242773" cy="329184"/>
-          </a:xfrm>
-          <a:prstGeom prst="rect">
-            <a:avLst/>
-          </a:prstGeom>
-        </p:spPr>
-      </p:pic>
-      <p:sp>
-        <p:nvSpPr>
-          <p:cNvPr id="3" name="TextBox 2"/>
-          <p:cNvSpPr txBox="1"/>
-          <p:nvPr/>
-        </p:nvSpPr>
-        <p:spPr>
-          <a:xfrm>
-            <a:off x="1051560" y="182880"/>
-            <a:ext cx="7315200" cy="320040"/>
-          </a:xfrm>
-          <a:prstGeom prst="rect">
-            <a:avLst/>
-          </a:prstGeom>
-          <a:noFill/>
-        </p:spPr>
-        <p:txBody>
-          <a:bodyPr wrap="square" lIns="45720" rIns="45720">
-            <a:spAutoFit/>
-          </a:bodyPr>
-          <a:lstStyle/>
-          <a:p>
-            <a:r>
-              <a:rPr sz="1100" b="0">
-                <a:solidFill>
-                  <a:srgbClr val="5B6770"/>
-                </a:solidFill>
-              </a:rPr>
-              <a:t>CEN429 Güvenli Programlama · Hafta 12</a:t>
-            </a:r>
-          </a:p>
-        </p:txBody>
-      </p:sp>
-      <p:sp>
-        <p:nvSpPr>
-          <p:cNvPr id="4" name="TextBox 3"/>
-          <p:cNvSpPr txBox="1"/>
-          <p:nvPr/>
-        </p:nvSpPr>
-        <p:spPr>
-          <a:xfrm>
-            <a:off x="640080" y="6446520"/>
-            <a:ext cx="7315200" cy="274320"/>
-          </a:xfrm>
-          <a:prstGeom prst="rect">
-            <a:avLst/>
-          </a:prstGeom>
-          <a:noFill/>
-        </p:spPr>
-        <p:txBody>
-          <a:bodyPr wrap="square" lIns="45720" rIns="45720">
-            <a:spAutoFit/>
-          </a:bodyPr>
-          <a:lstStyle/>
-          <a:p>
-            <a:r>
-              <a:rPr sz="1000" b="0">
-                <a:solidFill>
-                  <a:srgbClr val="5B6770"/>
-                </a:solidFill>
-              </a:rPr>
-              <a:t>RTEÜ Bilgisayar Mühendisliği · 2026-2027 Güz</a:t>
-            </a:r>
-          </a:p>
-        </p:txBody>
-      </p:sp>
-      <p:sp>
-        <p:nvSpPr>
-          <p:cNvPr id="5" name="TextBox 4"/>
-          <p:cNvSpPr txBox="1"/>
-          <p:nvPr/>
-        </p:nvSpPr>
-        <p:spPr>
-          <a:xfrm>
-            <a:off x="10637215" y="6446520"/>
-            <a:ext cx="914400" cy="274320"/>
-          </a:xfrm>
-          <a:prstGeom prst="rect">
-            <a:avLst/>
-          </a:prstGeom>
-          <a:noFill/>
-        </p:spPr>
-        <p:txBody>
-          <a:bodyPr wrap="square" lIns="45720" rIns="45720">
-            <a:spAutoFit/>
-          </a:bodyPr>
-          <a:lstStyle/>
-          <a:p>
-            <a:pPr algn="r"/>
-            <a:r>
-              <a:rPr sz="1000" b="0">
-                <a:solidFill>
-                  <a:srgbClr val="5B6770"/>
-                </a:solidFill>
-              </a:rPr>
-              <a:t>179</a:t>
-            </a:r>
-          </a:p>
-        </p:txBody>
-      </p:sp>
-      <p:sp>
-        <p:nvSpPr>
-          <p:cNvPr id="6" name="TextBox 5"/>
-          <p:cNvSpPr txBox="1"/>
-          <p:nvPr/>
-        </p:nvSpPr>
-        <p:spPr>
-          <a:xfrm>
-            <a:off x="640080" y="548640"/>
-            <a:ext cx="10911535" cy="731520"/>
-          </a:xfrm>
-          <a:prstGeom prst="rect">
-            <a:avLst/>
-          </a:prstGeom>
-          <a:noFill/>
-        </p:spPr>
-        <p:txBody>
-          <a:bodyPr wrap="square" lIns="45720" rIns="45720" anchor="ctr">
-            <a:spAutoFit/>
-          </a:bodyPr>
-          <a:lstStyle/>
-          <a:p>
-            <a:r>
-              <a:rPr sz="3000" b="1">
-                <a:solidFill>
-                  <a:srgbClr val="006D77"/>
-                </a:solidFill>
-              </a:rPr>
-              <a:t>Adım 10–11 · Etki analizi + delta</a:t>
-            </a:r>
-          </a:p>
-        </p:txBody>
-      </p:sp>
-      <p:sp>
-        <p:nvSpPr>
-          <p:cNvPr id="7" name="TextBox 6"/>
-          <p:cNvSpPr txBox="1"/>
-          <p:nvPr/>
-        </p:nvSpPr>
-        <p:spPr>
-          <a:xfrm>
-            <a:off x="640080" y="1325880"/>
-            <a:ext cx="10911535" cy="1879600"/>
-          </a:xfrm>
-          <a:prstGeom prst="rect">
-            <a:avLst/>
-          </a:prstGeom>
-          <a:noFill/>
-        </p:spPr>
-        <p:txBody>
-          <a:bodyPr wrap="square" lIns="45720" rIns="45720">
-            <a:spAutoFit/>
-          </a:bodyPr>
-          <a:lstStyle/>
-          <a:p>
-            <a:pPr>
-              <a:spcAft>
-                <a:spcPts val="300"/>
-              </a:spcAft>
-            </a:pPr>
-            <a:r>
-              <a:rPr sz="2000" b="1">
-                <a:solidFill>
-                  <a:srgbClr val="006D77"/>
-                </a:solidFill>
-              </a:rPr>
-              <a:t>• </a:t>
-            </a:r>
-            <a:r>
-              <a:rPr sz="2000" b="0">
-                <a:solidFill>
-                  <a:srgbClr val="1F2D3A"/>
-                </a:solidFill>
-              </a:rPr>
-              <a:t>Düzeltmeler v1.0.1 doğurdu.</a:t>
-            </a:r>
-          </a:p>
-          <a:p>
-            <a:pPr>
-              <a:spcAft>
-                <a:spcPts val="300"/>
-              </a:spcAft>
-            </a:pPr>
-            <a:r>
-              <a:rPr sz="2000" b="1">
-                <a:solidFill>
-                  <a:srgbClr val="006D77"/>
-                </a:solidFill>
-              </a:rPr>
-              <a:t>• </a:t>
-            </a:r>
-            <a:r>
-              <a:rPr sz="2000" b="1">
-                <a:solidFill>
-                  <a:srgbClr val="1F2D3A"/>
-                </a:solidFill>
-              </a:rPr>
-              <a:t>Etki analizi:</a:t>
-            </a:r>
-            <a:r>
-              <a:rPr sz="2000" b="0">
-                <a:solidFill>
-                  <a:srgbClr val="1F2D3A"/>
-                </a:solidFill>
-              </a:rPr>
-              <a:t> 2 dosya değişti, ikisi de bellek/hata yolu; kripto akışı değişmedi.</a:t>
-            </a:r>
-          </a:p>
-          <a:p>
-            <a:pPr>
-              <a:spcAft>
-                <a:spcPts val="300"/>
-              </a:spcAft>
-            </a:pPr>
-            <a:r>
-              <a:rPr sz="2000" b="1">
-                <a:solidFill>
-                  <a:srgbClr val="006D77"/>
-                </a:solidFill>
-              </a:rPr>
-              <a:t>• </a:t>
-            </a:r>
-            <a:r>
-              <a:rPr sz="2000" b="1">
-                <a:solidFill>
-                  <a:srgbClr val="1F2D3A"/>
-                </a:solidFill>
-              </a:rPr>
-              <a:t>Delta:</a:t>
-            </a:r>
-            <a:r>
-              <a:rPr sz="2000" b="0">
-                <a:solidFill>
-                  <a:srgbClr val="1F2D3A"/>
-                </a:solidFill>
-              </a:rPr>
-              <a:t> yalnız bu iki dosya + yeni TOE kimliği (</a:t>
-            </a:r>
-            <a:r>
-              <a:rPr sz="2000" b="0">
-                <a:solidFill>
-                  <a:srgbClr val="A1123F"/>
-                </a:solidFill>
-                <a:latin typeface="Consolas"/>
-              </a:rPr>
-              <a:t>notkasa-1.0.1.apk</a:t>
-            </a:r>
-            <a:r>
-              <a:rPr sz="2000" b="0">
-                <a:solidFill>
-                  <a:srgbClr val="1F2D3A"/>
-                </a:solidFill>
-              </a:rPr>
-              <a:t>) yeniden değerlendirildi.</a:t>
-            </a:r>
-          </a:p>
-        </p:txBody>
-      </p:sp>
-    </p:spTree>
-  </p:cSld>
-  <p:clrMapOvr>
-    <a:masterClrMapping/>
-  </p:clrMapOvr>
-</p:sld>
-</file>
-
 <file path=ppt/slides/slide18.xml><?xml version="1.0" encoding="utf-8"?>
 <p:sld xmlns:a="http://schemas.openxmlformats.org/drawingml/2006/main" xmlns:p="http://schemas.openxmlformats.org/presentationml/2006/main" xmlns:r="http://schemas.openxmlformats.org/officeDocument/2006/relationships">
   <p:cSld>
@@ -30727,7 +30627,7 @@
                   <a:srgbClr val="006D77"/>
                 </a:solidFill>
               </a:rPr>
-              <a:t>Adım 12 · Kalan risk</a:t>
+              <a:t>Adım 10–11 · Etki analizi + delta</a:t>
             </a:r>
           </a:p>
         </p:txBody>
@@ -30741,7 +30641,7 @@
         <p:spPr>
           <a:xfrm>
             <a:off x="640080" y="1325880"/>
-            <a:ext cx="10911535" cy="1219200"/>
+            <a:ext cx="10911535" cy="1879600"/>
           </a:xfrm>
           <a:prstGeom prst="rect">
             <a:avLst/>
@@ -30773,7 +30673,7 @@
                   <a:srgbClr val="1F2D3A"/>
                 </a:solidFill>
               </a:rPr>
-              <a:t>Cihaz köklü ise bellek dökümü hâlâ mümkün.</a:t>
+              <a:t>Düzeltmeler v1.0.1 doğurdu.</a:t>
             </a:r>
           </a:p>
           <a:p>
@@ -30791,12 +30691,20 @@
               <a:t>• </a:t>
             </a:r>
             <a:r>
-              <a:rPr sz="2000" b="0">
-                <a:solidFill>
-                  <a:srgbClr val="1F2D3A"/>
-                </a:solidFill>
-              </a:rPr>
-              <a:t>Telafi: anahtar kısa ömürlü + sunucu risk denetimi.</a:t>
+              <a:rPr sz="2000" b="1">
+                <a:solidFill>
+                  <a:srgbClr val="1F2D3A"/>
+                </a:solidFill>
+              </a:rPr>
+              <a:t>Etki analizi:</a:t>
+            </a:r>
+            <a:r>
+              <a:rPr sz="2000" b="0">
+                <a:solidFill>
+                  <a:srgbClr val="1F2D3A"/>
+                </a:solidFill>
+              </a:rPr>
+              <a:t> 2 dosya değişti, ikisi de bellek/hata yolu; kripto akışı değişmedi.</a:t>
             </a:r>
           </a:p>
           <a:p>
@@ -30819,7 +30727,32 @@
                   <a:srgbClr val="1F2D3A"/>
                 </a:solidFill>
               </a:rPr>
-              <a:t>Açıkça yazıldı.</a:t>
+              <a:t>Delta:</a:t>
+            </a:r>
+            <a:r>
+              <a:rPr sz="2000" b="0">
+                <a:solidFill>
+                  <a:srgbClr val="1F2D3A"/>
+                </a:solidFill>
+              </a:rPr>
+              <a:t> yalnız bu iki dosya + yeni TOE kimliği (</a:t>
+            </a:r>
+            <a:r>
+              <a:rPr sz="2000" b="0">
+                <a:solidFill>
+                  <a:srgbClr val="A1123F"/>
+                </a:solidFill>
+                <a:latin typeface="Consolas"/>
+              </a:rPr>
+              <a:t>notkasa-1.0.1.apk</a:t>
+            </a:r>
+            <a:r>
+              <a:rPr sz="2000" b="0">
+                <a:solidFill>
+                  <a:srgbClr val="1F2D3A"/>
+                </a:solidFill>
+              </a:rPr>
+              <a:t>) yeniden değerlendirildi.</a:t>
             </a:r>
           </a:p>
         </p:txBody>
@@ -30994,7 +30927,7 @@
                   <a:srgbClr val="006D77"/>
                 </a:solidFill>
               </a:rPr>
-              <a:t>Vaka · çıkarım</a:t>
+              <a:t>Adım 12 · Kalan risk</a:t>
             </a:r>
           </a:p>
         </p:txBody>
@@ -31040,23 +30973,7 @@
                   <a:srgbClr val="1F2D3A"/>
                 </a:solidFill>
               </a:rPr>
-              <a:t>13 adım soyut değil; küçük bir üründe </a:t>
-            </a:r>
-            <a:r>
-              <a:rPr sz="2000" b="1">
-                <a:solidFill>
-                  <a:srgbClr val="1F2D3A"/>
-                </a:solidFill>
-              </a:rPr>
-              <a:t>somut</a:t>
-            </a:r>
-            <a:r>
-              <a:rPr sz="2000" b="0">
-                <a:solidFill>
-                  <a:srgbClr val="1F2D3A"/>
-                </a:solidFill>
-              </a:rPr>
-              <a:t>.</a:t>
+              <a:t>Cihaz köklü ise bellek dökümü hâlâ mümkün.</a:t>
             </a:r>
           </a:p>
           <a:p>
@@ -31079,23 +30996,7 @@
                   <a:srgbClr val="1F2D3A"/>
                 </a:solidFill>
               </a:rPr>
-              <a:t>Değerlendirme bir </a:t>
-            </a:r>
-            <a:r>
-              <a:rPr sz="2000" b="1">
-                <a:solidFill>
-                  <a:srgbClr val="1F2D3A"/>
-                </a:solidFill>
-              </a:rPr>
-              <a:t>döngü</a:t>
-            </a:r>
-            <a:r>
-              <a:rPr sz="2000" b="0">
-                <a:solidFill>
-                  <a:srgbClr val="1F2D3A"/>
-                </a:solidFill>
-              </a:rPr>
-              <a:t>: bul → düzelt → yeniden değerlendir.</a:t>
+              <a:t>Telafi: anahtar kısa ömürlü + sunucu risk denetimi.</a:t>
             </a:r>
           </a:p>
           <a:p>
@@ -31113,12 +31014,12 @@
               <a:t>• </a:t>
             </a:r>
             <a:r>
-              <a:rPr sz="2000" b="0">
-                <a:solidFill>
-                  <a:srgbClr val="1F2D3A"/>
-                </a:solidFill>
-              </a:rPr>
-              <a:t>Projeniz bunun küçültülmüş hâli.</a:t>
+              <a:rPr sz="2000" b="1">
+                <a:solidFill>
+                  <a:srgbClr val="1F2D3A"/>
+                </a:solidFill>
+              </a:rPr>
+              <a:t>Açıkça yazıldı.</a:t>
             </a:r>
           </a:p>
         </p:txBody>
@@ -31132,6 +31033,305 @@
 </file>
 
 <file path=ppt/slides/slide182.xml><?xml version="1.0" encoding="utf-8"?>
+<p:sld xmlns:a="http://schemas.openxmlformats.org/drawingml/2006/main" xmlns:p="http://schemas.openxmlformats.org/presentationml/2006/main" xmlns:r="http://schemas.openxmlformats.org/officeDocument/2006/relationships">
+  <p:cSld>
+    <p:spTree>
+      <p:nvGrpSpPr>
+        <p:cNvPr id="1" name=""/>
+        <p:cNvGrpSpPr/>
+        <p:nvPr/>
+      </p:nvGrpSpPr>
+      <p:grpSpPr/>
+      <p:pic>
+        <p:nvPicPr>
+          <p:cNvPr id="2" name="Picture 1" descr="rteu_logo_kucuk.jpg"/>
+          <p:cNvPicPr>
+            <a:picLocks noChangeAspect="1"/>
+          </p:cNvPicPr>
+          <p:nvPr/>
+        </p:nvPicPr>
+        <p:blipFill>
+          <a:blip r:embed="rId2"/>
+          <a:stretch>
+            <a:fillRect/>
+          </a:stretch>
+        </p:blipFill>
+        <p:spPr>
+          <a:xfrm>
+            <a:off x="640080" y="164592"/>
+            <a:ext cx="242773" cy="329184"/>
+          </a:xfrm>
+          <a:prstGeom prst="rect">
+            <a:avLst/>
+          </a:prstGeom>
+        </p:spPr>
+      </p:pic>
+      <p:sp>
+        <p:nvSpPr>
+          <p:cNvPr id="3" name="TextBox 2"/>
+          <p:cNvSpPr txBox="1"/>
+          <p:nvPr/>
+        </p:nvSpPr>
+        <p:spPr>
+          <a:xfrm>
+            <a:off x="1051560" y="182880"/>
+            <a:ext cx="7315200" cy="320040"/>
+          </a:xfrm>
+          <a:prstGeom prst="rect">
+            <a:avLst/>
+          </a:prstGeom>
+          <a:noFill/>
+        </p:spPr>
+        <p:txBody>
+          <a:bodyPr wrap="square" lIns="45720" rIns="45720">
+            <a:spAutoFit/>
+          </a:bodyPr>
+          <a:lstStyle/>
+          <a:p>
+            <a:r>
+              <a:rPr sz="1100" b="0">
+                <a:solidFill>
+                  <a:srgbClr val="5B6770"/>
+                </a:solidFill>
+              </a:rPr>
+              <a:t>CEN429 Güvenli Programlama · Hafta 12</a:t>
+            </a:r>
+          </a:p>
+        </p:txBody>
+      </p:sp>
+      <p:sp>
+        <p:nvSpPr>
+          <p:cNvPr id="4" name="TextBox 3"/>
+          <p:cNvSpPr txBox="1"/>
+          <p:nvPr/>
+        </p:nvSpPr>
+        <p:spPr>
+          <a:xfrm>
+            <a:off x="640080" y="6446520"/>
+            <a:ext cx="7315200" cy="274320"/>
+          </a:xfrm>
+          <a:prstGeom prst="rect">
+            <a:avLst/>
+          </a:prstGeom>
+          <a:noFill/>
+        </p:spPr>
+        <p:txBody>
+          <a:bodyPr wrap="square" lIns="45720" rIns="45720">
+            <a:spAutoFit/>
+          </a:bodyPr>
+          <a:lstStyle/>
+          <a:p>
+            <a:r>
+              <a:rPr sz="1000" b="0">
+                <a:solidFill>
+                  <a:srgbClr val="5B6770"/>
+                </a:solidFill>
+              </a:rPr>
+              <a:t>RTEÜ Bilgisayar Mühendisliği · 2026-2027 Güz</a:t>
+            </a:r>
+          </a:p>
+        </p:txBody>
+      </p:sp>
+      <p:sp>
+        <p:nvSpPr>
+          <p:cNvPr id="5" name="TextBox 4"/>
+          <p:cNvSpPr txBox="1"/>
+          <p:nvPr/>
+        </p:nvSpPr>
+        <p:spPr>
+          <a:xfrm>
+            <a:off x="10637215" y="6446520"/>
+            <a:ext cx="914400" cy="274320"/>
+          </a:xfrm>
+          <a:prstGeom prst="rect">
+            <a:avLst/>
+          </a:prstGeom>
+          <a:noFill/>
+        </p:spPr>
+        <p:txBody>
+          <a:bodyPr wrap="square" lIns="45720" rIns="45720">
+            <a:spAutoFit/>
+          </a:bodyPr>
+          <a:lstStyle/>
+          <a:p>
+            <a:pPr algn="r"/>
+            <a:r>
+              <a:rPr sz="1000" b="0">
+                <a:solidFill>
+                  <a:srgbClr val="5B6770"/>
+                </a:solidFill>
+              </a:rPr>
+              <a:t>182</a:t>
+            </a:r>
+          </a:p>
+        </p:txBody>
+      </p:sp>
+      <p:sp>
+        <p:nvSpPr>
+          <p:cNvPr id="6" name="TextBox 5"/>
+          <p:cNvSpPr txBox="1"/>
+          <p:nvPr/>
+        </p:nvSpPr>
+        <p:spPr>
+          <a:xfrm>
+            <a:off x="640080" y="548640"/>
+            <a:ext cx="10911535" cy="731520"/>
+          </a:xfrm>
+          <a:prstGeom prst="rect">
+            <a:avLst/>
+          </a:prstGeom>
+          <a:noFill/>
+        </p:spPr>
+        <p:txBody>
+          <a:bodyPr wrap="square" lIns="45720" rIns="45720" anchor="ctr">
+            <a:spAutoFit/>
+          </a:bodyPr>
+          <a:lstStyle/>
+          <a:p>
+            <a:r>
+              <a:rPr sz="3000" b="1">
+                <a:solidFill>
+                  <a:srgbClr val="006D77"/>
+                </a:solidFill>
+              </a:rPr>
+              <a:t>Vaka · çıkarım</a:t>
+            </a:r>
+          </a:p>
+        </p:txBody>
+      </p:sp>
+      <p:sp>
+        <p:nvSpPr>
+          <p:cNvPr id="7" name="TextBox 6"/>
+          <p:cNvSpPr txBox="1"/>
+          <p:nvPr/>
+        </p:nvSpPr>
+        <p:spPr>
+          <a:xfrm>
+            <a:off x="640080" y="1325880"/>
+            <a:ext cx="10911535" cy="1219200"/>
+          </a:xfrm>
+          <a:prstGeom prst="rect">
+            <a:avLst/>
+          </a:prstGeom>
+          <a:noFill/>
+        </p:spPr>
+        <p:txBody>
+          <a:bodyPr wrap="square" lIns="45720" rIns="45720">
+            <a:spAutoFit/>
+          </a:bodyPr>
+          <a:lstStyle/>
+          <a:p>
+            <a:pPr>
+              <a:spcAft>
+                <a:spcPts val="300"/>
+              </a:spcAft>
+            </a:pPr>
+            <a:r>
+              <a:rPr sz="2000" b="1">
+                <a:solidFill>
+                  <a:srgbClr val="006D77"/>
+                </a:solidFill>
+              </a:rPr>
+              <a:t>• </a:t>
+            </a:r>
+            <a:r>
+              <a:rPr sz="2000" b="0">
+                <a:solidFill>
+                  <a:srgbClr val="1F2D3A"/>
+                </a:solidFill>
+              </a:rPr>
+              <a:t>13 adım soyut değil; küçük bir üründe </a:t>
+            </a:r>
+            <a:r>
+              <a:rPr sz="2000" b="1">
+                <a:solidFill>
+                  <a:srgbClr val="1F2D3A"/>
+                </a:solidFill>
+              </a:rPr>
+              <a:t>somut</a:t>
+            </a:r>
+            <a:r>
+              <a:rPr sz="2000" b="0">
+                <a:solidFill>
+                  <a:srgbClr val="1F2D3A"/>
+                </a:solidFill>
+              </a:rPr>
+              <a:t>.</a:t>
+            </a:r>
+          </a:p>
+          <a:p>
+            <a:pPr>
+              <a:spcAft>
+                <a:spcPts val="300"/>
+              </a:spcAft>
+            </a:pPr>
+            <a:r>
+              <a:rPr sz="2000" b="1">
+                <a:solidFill>
+                  <a:srgbClr val="006D77"/>
+                </a:solidFill>
+              </a:rPr>
+              <a:t>• </a:t>
+            </a:r>
+            <a:r>
+              <a:rPr sz="2000" b="0">
+                <a:solidFill>
+                  <a:srgbClr val="1F2D3A"/>
+                </a:solidFill>
+              </a:rPr>
+              <a:t>Değerlendirme bir </a:t>
+            </a:r>
+            <a:r>
+              <a:rPr sz="2000" b="1">
+                <a:solidFill>
+                  <a:srgbClr val="1F2D3A"/>
+                </a:solidFill>
+              </a:rPr>
+              <a:t>döngü</a:t>
+            </a:r>
+            <a:r>
+              <a:rPr sz="2000" b="0">
+                <a:solidFill>
+                  <a:srgbClr val="1F2D3A"/>
+                </a:solidFill>
+              </a:rPr>
+              <a:t>: bul → düzelt → yeniden değerlendir.</a:t>
+            </a:r>
+          </a:p>
+          <a:p>
+            <a:pPr>
+              <a:spcAft>
+                <a:spcPts val="300"/>
+              </a:spcAft>
+            </a:pPr>
+            <a:r>
+              <a:rPr sz="2000" b="1">
+                <a:solidFill>
+                  <a:srgbClr val="006D77"/>
+                </a:solidFill>
+              </a:rPr>
+              <a:t>• </a:t>
+            </a:r>
+            <a:r>
+              <a:rPr sz="2000" b="0">
+                <a:solidFill>
+                  <a:srgbClr val="1F2D3A"/>
+                </a:solidFill>
+              </a:rPr>
+              <a:t>Projeniz bunun küçültülmüş hâli.</a:t>
+            </a:r>
+          </a:p>
+        </p:txBody>
+      </p:sp>
+    </p:spTree>
+  </p:cSld>
+  <p:clrMapOvr>
+    <a:masterClrMapping/>
+  </p:clrMapOvr>
+</p:sld>
+</file>
+
+<file path=ppt/slides/slide183.xml><?xml version="1.0" encoding="utf-8"?>
 <p:sld xmlns:a="http://schemas.openxmlformats.org/drawingml/2006/main" xmlns:p="http://schemas.openxmlformats.org/presentationml/2006/main" xmlns:r="http://schemas.openxmlformats.org/officeDocument/2006/relationships">
   <p:cSld>
     <p:bg>
@@ -31244,7 +31444,7 @@
                   <a:srgbClr val="D8F0F2"/>
                 </a:solidFill>
               </a:rPr>
-              <a:t>182</a:t>
+              <a:t>183</a:t>
             </a:r>
           </a:p>
         </p:txBody>
@@ -31279,297 +31479,6 @@
                 </a:solidFill>
               </a:rPr>
               <a:t>Ek B · Daha çok test kartı örneği</a:t>
-            </a:r>
-          </a:p>
-        </p:txBody>
-      </p:sp>
-    </p:spTree>
-  </p:cSld>
-  <p:clrMapOvr>
-    <a:masterClrMapping/>
-  </p:clrMapOvr>
-</p:sld>
-</file>
-
-<file path=ppt/slides/slide183.xml><?xml version="1.0" encoding="utf-8"?>
-<p:sld xmlns:a="http://schemas.openxmlformats.org/drawingml/2006/main" xmlns:p="http://schemas.openxmlformats.org/presentationml/2006/main" xmlns:r="http://schemas.openxmlformats.org/officeDocument/2006/relationships">
-  <p:cSld>
-    <p:spTree>
-      <p:nvGrpSpPr>
-        <p:cNvPr id="1" name=""/>
-        <p:cNvGrpSpPr/>
-        <p:nvPr/>
-      </p:nvGrpSpPr>
-      <p:grpSpPr/>
-      <p:pic>
-        <p:nvPicPr>
-          <p:cNvPr id="2" name="Picture 1" descr="rteu_logo_kucuk.jpg"/>
-          <p:cNvPicPr>
-            <a:picLocks noChangeAspect="1"/>
-          </p:cNvPicPr>
-          <p:nvPr/>
-        </p:nvPicPr>
-        <p:blipFill>
-          <a:blip r:embed="rId2"/>
-          <a:stretch>
-            <a:fillRect/>
-          </a:stretch>
-        </p:blipFill>
-        <p:spPr>
-          <a:xfrm>
-            <a:off x="640080" y="164592"/>
-            <a:ext cx="242773" cy="329184"/>
-          </a:xfrm>
-          <a:prstGeom prst="rect">
-            <a:avLst/>
-          </a:prstGeom>
-        </p:spPr>
-      </p:pic>
-      <p:sp>
-        <p:nvSpPr>
-          <p:cNvPr id="3" name="TextBox 2"/>
-          <p:cNvSpPr txBox="1"/>
-          <p:nvPr/>
-        </p:nvSpPr>
-        <p:spPr>
-          <a:xfrm>
-            <a:off x="1051560" y="182880"/>
-            <a:ext cx="7315200" cy="320040"/>
-          </a:xfrm>
-          <a:prstGeom prst="rect">
-            <a:avLst/>
-          </a:prstGeom>
-          <a:noFill/>
-        </p:spPr>
-        <p:txBody>
-          <a:bodyPr wrap="square" lIns="45720" rIns="45720">
-            <a:spAutoFit/>
-          </a:bodyPr>
-          <a:lstStyle/>
-          <a:p>
-            <a:r>
-              <a:rPr sz="1100" b="0">
-                <a:solidFill>
-                  <a:srgbClr val="5B6770"/>
-                </a:solidFill>
-              </a:rPr>
-              <a:t>CEN429 Güvenli Programlama · Hafta 12</a:t>
-            </a:r>
-          </a:p>
-        </p:txBody>
-      </p:sp>
-      <p:sp>
-        <p:nvSpPr>
-          <p:cNvPr id="4" name="TextBox 3"/>
-          <p:cNvSpPr txBox="1"/>
-          <p:nvPr/>
-        </p:nvSpPr>
-        <p:spPr>
-          <a:xfrm>
-            <a:off x="640080" y="6446520"/>
-            <a:ext cx="7315200" cy="274320"/>
-          </a:xfrm>
-          <a:prstGeom prst="rect">
-            <a:avLst/>
-          </a:prstGeom>
-          <a:noFill/>
-        </p:spPr>
-        <p:txBody>
-          <a:bodyPr wrap="square" lIns="45720" rIns="45720">
-            <a:spAutoFit/>
-          </a:bodyPr>
-          <a:lstStyle/>
-          <a:p>
-            <a:r>
-              <a:rPr sz="1000" b="0">
-                <a:solidFill>
-                  <a:srgbClr val="5B6770"/>
-                </a:solidFill>
-              </a:rPr>
-              <a:t>RTEÜ Bilgisayar Mühendisliği · 2026-2027 Güz</a:t>
-            </a:r>
-          </a:p>
-        </p:txBody>
-      </p:sp>
-      <p:sp>
-        <p:nvSpPr>
-          <p:cNvPr id="5" name="TextBox 4"/>
-          <p:cNvSpPr txBox="1"/>
-          <p:nvPr/>
-        </p:nvSpPr>
-        <p:spPr>
-          <a:xfrm>
-            <a:off x="10637215" y="6446520"/>
-            <a:ext cx="914400" cy="274320"/>
-          </a:xfrm>
-          <a:prstGeom prst="rect">
-            <a:avLst/>
-          </a:prstGeom>
-          <a:noFill/>
-        </p:spPr>
-        <p:txBody>
-          <a:bodyPr wrap="square" lIns="45720" rIns="45720">
-            <a:spAutoFit/>
-          </a:bodyPr>
-          <a:lstStyle/>
-          <a:p>
-            <a:pPr algn="r"/>
-            <a:r>
-              <a:rPr sz="1000" b="0">
-                <a:solidFill>
-                  <a:srgbClr val="5B6770"/>
-                </a:solidFill>
-              </a:rPr>
-              <a:t>183</a:t>
-            </a:r>
-          </a:p>
-        </p:txBody>
-      </p:sp>
-      <p:sp>
-        <p:nvSpPr>
-          <p:cNvPr id="6" name="TextBox 5"/>
-          <p:cNvSpPr txBox="1"/>
-          <p:nvPr/>
-        </p:nvSpPr>
-        <p:spPr>
-          <a:xfrm>
-            <a:off x="640080" y="548640"/>
-            <a:ext cx="10911535" cy="731520"/>
-          </a:xfrm>
-          <a:prstGeom prst="rect">
-            <a:avLst/>
-          </a:prstGeom>
-          <a:noFill/>
-        </p:spPr>
-        <p:txBody>
-          <a:bodyPr wrap="square" lIns="45720" rIns="45720" anchor="ctr">
-            <a:spAutoFit/>
-          </a:bodyPr>
-          <a:lstStyle/>
-          <a:p>
-            <a:r>
-              <a:rPr sz="3000" b="1">
-                <a:solidFill>
-                  <a:srgbClr val="006D77"/>
-                </a:solidFill>
-              </a:rPr>
-              <a:t>Kart · kripto doğrulama</a:t>
-            </a:r>
-          </a:p>
-        </p:txBody>
-      </p:sp>
-      <p:sp>
-        <p:nvSpPr>
-          <p:cNvPr id="7" name="TextBox 6"/>
-          <p:cNvSpPr txBox="1"/>
-          <p:nvPr/>
-        </p:nvSpPr>
-        <p:spPr>
-          <a:xfrm>
-            <a:off x="640080" y="1325880"/>
-            <a:ext cx="10911535" cy="1549400"/>
-          </a:xfrm>
-          <a:prstGeom prst="rect">
-            <a:avLst/>
-          </a:prstGeom>
-          <a:noFill/>
-        </p:spPr>
-        <p:txBody>
-          <a:bodyPr wrap="square" lIns="45720" rIns="45720">
-            <a:spAutoFit/>
-          </a:bodyPr>
-          <a:lstStyle/>
-          <a:p>
-            <a:pPr>
-              <a:spcAft>
-                <a:spcPts val="300"/>
-              </a:spcAft>
-            </a:pPr>
-            <a:r>
-              <a:rPr sz="2000" b="1">
-                <a:solidFill>
-                  <a:srgbClr val="006D77"/>
-                </a:solidFill>
-              </a:rPr>
-              <a:t>• </a:t>
-            </a:r>
-            <a:r>
-              <a:rPr sz="2000" b="1">
-                <a:solidFill>
-                  <a:srgbClr val="1F2D3A"/>
-                </a:solidFill>
-              </a:rPr>
-              <a:t>Amaç:</a:t>
-            </a:r>
-            <a:r>
-              <a:rPr sz="2000" b="0">
-                <a:solidFill>
-                  <a:srgbClr val="1F2D3A"/>
-                </a:solidFill>
-              </a:rPr>
-              <a:t> notlar gerçekten AEAD ile mi şifreli?</a:t>
-            </a:r>
-          </a:p>
-          <a:p>
-            <a:pPr>
-              <a:spcAft>
-                <a:spcPts val="300"/>
-              </a:spcAft>
-            </a:pPr>
-            <a:r>
-              <a:rPr sz="2000" b="1">
-                <a:solidFill>
-                  <a:srgbClr val="006D77"/>
-                </a:solidFill>
-              </a:rPr>
-              <a:t>• </a:t>
-            </a:r>
-            <a:r>
-              <a:rPr sz="2000" b="1">
-                <a:solidFill>
-                  <a:srgbClr val="1F2D3A"/>
-                </a:solidFill>
-              </a:rPr>
-              <a:t>Adım:</a:t>
-            </a:r>
-            <a:r>
-              <a:rPr sz="2000" b="0">
-                <a:solidFill>
-                  <a:srgbClr val="1F2D3A"/>
-                </a:solidFill>
-              </a:rPr>
-              <a:t> şifreli blobun başlığını/etiketini incele; bozuk etiketli veri reddediliyor mu?</a:t>
-            </a:r>
-          </a:p>
-          <a:p>
-            <a:pPr>
-              <a:spcAft>
-                <a:spcPts val="300"/>
-              </a:spcAft>
-            </a:pPr>
-            <a:r>
-              <a:rPr sz="2000" b="1">
-                <a:solidFill>
-                  <a:srgbClr val="006D77"/>
-                </a:solidFill>
-              </a:rPr>
-              <a:t>• </a:t>
-            </a:r>
-            <a:r>
-              <a:rPr sz="2000" b="1">
-                <a:solidFill>
-                  <a:srgbClr val="1F2D3A"/>
-                </a:solidFill>
-              </a:rPr>
-              <a:t>Beklenen:</a:t>
-            </a:r>
-            <a:r>
-              <a:rPr sz="2000" b="0">
-                <a:solidFill>
-                  <a:srgbClr val="1F2D3A"/>
-                </a:solidFill>
-              </a:rPr>
-              <a:t> bozuk etiket → çözme reddi.</a:t>
             </a:r>
           </a:p>
         </p:txBody>
@@ -31744,7 +31653,7 @@
                   <a:srgbClr val="006D77"/>
                 </a:solidFill>
               </a:rPr>
-              <a:t>Kart · anahtar yaşam döngüsü</a:t>
+              <a:t>Kart · kripto doğrulama</a:t>
             </a:r>
           </a:p>
         </p:txBody>
@@ -31758,7 +31667,7 @@
         <p:spPr>
           <a:xfrm>
             <a:off x="640080" y="1325880"/>
-            <a:ext cx="10911535" cy="1219200"/>
+            <a:ext cx="10911535" cy="1549400"/>
           </a:xfrm>
           <a:prstGeom prst="rect">
             <a:avLst/>
@@ -31798,7 +31707,7 @@
                   <a:srgbClr val="1F2D3A"/>
                 </a:solidFill>
               </a:rPr>
-              <a:t> anahtar iş bitince siliniyor mu?</a:t>
+              <a:t> notlar gerçekten AEAD ile mi şifreli?</a:t>
             </a:r>
           </a:p>
           <a:p>
@@ -31829,7 +31738,7 @@
                   <a:srgbClr val="1F2D3A"/>
                 </a:solidFill>
               </a:rPr>
-              <a:t> işlem sonrası bellek taraması.</a:t>
+              <a:t> şifreli blobun başlığını/etiketini incele; bozuk etiketli veri reddediliyor mu?</a:t>
             </a:r>
           </a:p>
           <a:p>
@@ -31860,7 +31769,7 @@
                   <a:srgbClr val="1F2D3A"/>
                 </a:solidFill>
               </a:rPr>
-              <a:t> anahtar baytları bulunmuyor.</a:t>
+              <a:t> bozuk etiket → çözme reddi.</a:t>
             </a:r>
           </a:p>
         </p:txBody>
@@ -32035,7 +31944,7 @@
                   <a:srgbClr val="006D77"/>
                 </a:solidFill>
               </a:rPr>
-              <a:t>Kart · sürüm/hata ayıklama ayrımı</a:t>
+              <a:t>Kart · anahtar yaşam döngüsü</a:t>
             </a:r>
           </a:p>
         </p:txBody>
@@ -32089,7 +31998,7 @@
                   <a:srgbClr val="1F2D3A"/>
                 </a:solidFill>
               </a:rPr>
-              <a:t> sürüm derlemesinde günlük gerçekten kapalı mı?</a:t>
+              <a:t> anahtar iş bitince siliniyor mu?</a:t>
             </a:r>
           </a:p>
           <a:p>
@@ -32120,24 +32029,7 @@
                   <a:srgbClr val="1F2D3A"/>
                 </a:solidFill>
               </a:rPr>
-              <a:t> sürüm APK'da </a:t>
-            </a:r>
-            <a:r>
-              <a:rPr sz="2000" b="0">
-                <a:solidFill>
-                  <a:srgbClr val="A1123F"/>
-                </a:solidFill>
-                <a:latin typeface="Consolas"/>
-              </a:rPr>
-              <a:t>strings</a:t>
-            </a:r>
-            <a:r>
-              <a:rPr sz="2000" b="0">
-                <a:solidFill>
-                  <a:srgbClr val="1F2D3A"/>
-                </a:solidFill>
-              </a:rPr>
-              <a:t> ile günlük dizgesi ara.</a:t>
+              <a:t> işlem sonrası bellek taraması.</a:t>
             </a:r>
           </a:p>
           <a:p>
@@ -32168,7 +32060,7 @@
                   <a:srgbClr val="1F2D3A"/>
                 </a:solidFill>
               </a:rPr>
-              <a:t> günlük dizgesi yok.</a:t>
+              <a:t> anahtar baytları bulunmuyor.</a:t>
             </a:r>
           </a:p>
         </p:txBody>
@@ -32343,7 +32235,7 @@
                   <a:srgbClr val="006D77"/>
                 </a:solidFill>
               </a:rPr>
-              <a:t>Kart · yükseltme güvenliği</a:t>
+              <a:t>Kart · sürüm/hata ayıklama ayrımı</a:t>
             </a:r>
           </a:p>
         </p:txBody>
@@ -32397,7 +32289,7 @@
                   <a:srgbClr val="1F2D3A"/>
                 </a:solidFill>
               </a:rPr>
-              <a:t> eski imzalı sürüm geri yüklenebilir mi?</a:t>
+              <a:t> sürüm derlemesinde günlük gerçekten kapalı mı?</a:t>
             </a:r>
           </a:p>
           <a:p>
@@ -32428,7 +32320,24 @@
                   <a:srgbClr val="1F2D3A"/>
                 </a:solidFill>
               </a:rPr>
-              <a:t> düşük sürümü yüklemeyi dene.</a:t>
+              <a:t> sürüm APK'da </a:t>
+            </a:r>
+            <a:r>
+              <a:rPr sz="2000" b="0">
+                <a:solidFill>
+                  <a:srgbClr val="A1123F"/>
+                </a:solidFill>
+                <a:latin typeface="Consolas"/>
+              </a:rPr>
+              <a:t>strings</a:t>
+            </a:r>
+            <a:r>
+              <a:rPr sz="2000" b="0">
+                <a:solidFill>
+                  <a:srgbClr val="1F2D3A"/>
+                </a:solidFill>
+              </a:rPr>
+              <a:t> ile günlük dizgesi ara.</a:t>
             </a:r>
           </a:p>
           <a:p>
@@ -32459,7 +32368,7 @@
                   <a:srgbClr val="1F2D3A"/>
                 </a:solidFill>
               </a:rPr>
-              <a:t> sürüm düşürme reddi.</a:t>
+              <a:t> günlük dizgesi yok.</a:t>
             </a:r>
           </a:p>
         </p:txBody>
@@ -32634,7 +32543,7 @@
                   <a:srgbClr val="006D77"/>
                 </a:solidFill>
               </a:rPr>
-              <a:t>Kartları yazarken kural</a:t>
+              <a:t>Kart · yükseltme güvenliği</a:t>
             </a:r>
           </a:p>
         </p:txBody>
@@ -32675,28 +32584,20 @@
               <a:t>• </a:t>
             </a:r>
             <a:r>
-              <a:rPr sz="2000" b="0">
-                <a:solidFill>
-                  <a:srgbClr val="1F2D3A"/>
-                </a:solidFill>
-              </a:rPr>
-              <a:t>Her kart </a:t>
-            </a:r>
-            <a:r>
-              <a:rPr sz="2000" b="1">
-                <a:solidFill>
-                  <a:srgbClr val="1F2D3A"/>
-                </a:solidFill>
-              </a:rPr>
-              <a:t>tekrarlanabilir</a:t>
-            </a:r>
-            <a:r>
-              <a:rPr sz="2000" b="0">
-                <a:solidFill>
-                  <a:srgbClr val="1F2D3A"/>
-                </a:solidFill>
-              </a:rPr>
-              <a:t> olmalı (başkası aynı adımı izleyebilmeli).</a:t>
+              <a:rPr sz="2000" b="1">
+                <a:solidFill>
+                  <a:srgbClr val="1F2D3A"/>
+                </a:solidFill>
+              </a:rPr>
+              <a:t>Amaç:</a:t>
+            </a:r>
+            <a:r>
+              <a:rPr sz="2000" b="0">
+                <a:solidFill>
+                  <a:srgbClr val="1F2D3A"/>
+                </a:solidFill>
+              </a:rPr>
+              <a:t> eski imzalı sürüm geri yüklenebilir mi?</a:t>
             </a:r>
           </a:p>
           <a:p>
@@ -32714,28 +32615,20 @@
               <a:t>• </a:t>
             </a:r>
             <a:r>
-              <a:rPr sz="2000" b="0">
-                <a:solidFill>
-                  <a:srgbClr val="1F2D3A"/>
-                </a:solidFill>
-              </a:rPr>
-              <a:t>Her kart bir </a:t>
-            </a:r>
-            <a:r>
-              <a:rPr sz="2000" b="1">
-                <a:solidFill>
-                  <a:srgbClr val="1F2D3A"/>
-                </a:solidFill>
-              </a:rPr>
-              <a:t>gereksinime</a:t>
-            </a:r>
-            <a:r>
-              <a:rPr sz="2000" b="0">
-                <a:solidFill>
-                  <a:srgbClr val="1F2D3A"/>
-                </a:solidFill>
-              </a:rPr>
-              <a:t> bağlı (S17).</a:t>
+              <a:rPr sz="2000" b="1">
+                <a:solidFill>
+                  <a:srgbClr val="1F2D3A"/>
+                </a:solidFill>
+              </a:rPr>
+              <a:t>Adım:</a:t>
+            </a:r>
+            <a:r>
+              <a:rPr sz="2000" b="0">
+                <a:solidFill>
+                  <a:srgbClr val="1F2D3A"/>
+                </a:solidFill>
+              </a:rPr>
+              <a:t> düşük sürümü yüklemeyi dene.</a:t>
             </a:r>
           </a:p>
           <a:p>
@@ -32753,28 +32646,20 @@
               <a:t>• </a:t>
             </a:r>
             <a:r>
-              <a:rPr sz="2000" b="0">
-                <a:solidFill>
-                  <a:srgbClr val="1F2D3A"/>
-                </a:solidFill>
-              </a:rPr>
-              <a:t>"Gözlenen" alanı </a:t>
-            </a:r>
-            <a:r>
-              <a:rPr sz="2000" b="1">
-                <a:solidFill>
-                  <a:srgbClr val="1F2D3A"/>
-                </a:solidFill>
-              </a:rPr>
-              <a:t>kanıtla</a:t>
-            </a:r>
-            <a:r>
-              <a:rPr sz="2000" b="0">
-                <a:solidFill>
-                  <a:srgbClr val="1F2D3A"/>
-                </a:solidFill>
-              </a:rPr>
-              <a:t> dolu.</a:t>
+              <a:rPr sz="2000" b="1">
+                <a:solidFill>
+                  <a:srgbClr val="1F2D3A"/>
+                </a:solidFill>
+              </a:rPr>
+              <a:t>Beklenen:</a:t>
+            </a:r>
+            <a:r>
+              <a:rPr sz="2000" b="0">
+                <a:solidFill>
+                  <a:srgbClr val="1F2D3A"/>
+                </a:solidFill>
+              </a:rPr>
+              <a:t> sürüm düşürme reddi.</a:t>
             </a:r>
           </a:p>
         </p:txBody>
@@ -32788,6 +32673,321 @@
 </file>
 
 <file path=ppt/slides/slide188.xml><?xml version="1.0" encoding="utf-8"?>
+<p:sld xmlns:a="http://schemas.openxmlformats.org/drawingml/2006/main" xmlns:p="http://schemas.openxmlformats.org/presentationml/2006/main" xmlns:r="http://schemas.openxmlformats.org/officeDocument/2006/relationships">
+  <p:cSld>
+    <p:spTree>
+      <p:nvGrpSpPr>
+        <p:cNvPr id="1" name=""/>
+        <p:cNvGrpSpPr/>
+        <p:nvPr/>
+      </p:nvGrpSpPr>
+      <p:grpSpPr/>
+      <p:pic>
+        <p:nvPicPr>
+          <p:cNvPr id="2" name="Picture 1" descr="rteu_logo_kucuk.jpg"/>
+          <p:cNvPicPr>
+            <a:picLocks noChangeAspect="1"/>
+          </p:cNvPicPr>
+          <p:nvPr/>
+        </p:nvPicPr>
+        <p:blipFill>
+          <a:blip r:embed="rId2"/>
+          <a:stretch>
+            <a:fillRect/>
+          </a:stretch>
+        </p:blipFill>
+        <p:spPr>
+          <a:xfrm>
+            <a:off x="640080" y="164592"/>
+            <a:ext cx="242773" cy="329184"/>
+          </a:xfrm>
+          <a:prstGeom prst="rect">
+            <a:avLst/>
+          </a:prstGeom>
+        </p:spPr>
+      </p:pic>
+      <p:sp>
+        <p:nvSpPr>
+          <p:cNvPr id="3" name="TextBox 2"/>
+          <p:cNvSpPr txBox="1"/>
+          <p:nvPr/>
+        </p:nvSpPr>
+        <p:spPr>
+          <a:xfrm>
+            <a:off x="1051560" y="182880"/>
+            <a:ext cx="7315200" cy="320040"/>
+          </a:xfrm>
+          <a:prstGeom prst="rect">
+            <a:avLst/>
+          </a:prstGeom>
+          <a:noFill/>
+        </p:spPr>
+        <p:txBody>
+          <a:bodyPr wrap="square" lIns="45720" rIns="45720">
+            <a:spAutoFit/>
+          </a:bodyPr>
+          <a:lstStyle/>
+          <a:p>
+            <a:r>
+              <a:rPr sz="1100" b="0">
+                <a:solidFill>
+                  <a:srgbClr val="5B6770"/>
+                </a:solidFill>
+              </a:rPr>
+              <a:t>CEN429 Güvenli Programlama · Hafta 12</a:t>
+            </a:r>
+          </a:p>
+        </p:txBody>
+      </p:sp>
+      <p:sp>
+        <p:nvSpPr>
+          <p:cNvPr id="4" name="TextBox 3"/>
+          <p:cNvSpPr txBox="1"/>
+          <p:nvPr/>
+        </p:nvSpPr>
+        <p:spPr>
+          <a:xfrm>
+            <a:off x="640080" y="6446520"/>
+            <a:ext cx="7315200" cy="274320"/>
+          </a:xfrm>
+          <a:prstGeom prst="rect">
+            <a:avLst/>
+          </a:prstGeom>
+          <a:noFill/>
+        </p:spPr>
+        <p:txBody>
+          <a:bodyPr wrap="square" lIns="45720" rIns="45720">
+            <a:spAutoFit/>
+          </a:bodyPr>
+          <a:lstStyle/>
+          <a:p>
+            <a:r>
+              <a:rPr sz="1000" b="0">
+                <a:solidFill>
+                  <a:srgbClr val="5B6770"/>
+                </a:solidFill>
+              </a:rPr>
+              <a:t>RTEÜ Bilgisayar Mühendisliği · 2026-2027 Güz</a:t>
+            </a:r>
+          </a:p>
+        </p:txBody>
+      </p:sp>
+      <p:sp>
+        <p:nvSpPr>
+          <p:cNvPr id="5" name="TextBox 4"/>
+          <p:cNvSpPr txBox="1"/>
+          <p:nvPr/>
+        </p:nvSpPr>
+        <p:spPr>
+          <a:xfrm>
+            <a:off x="10637215" y="6446520"/>
+            <a:ext cx="914400" cy="274320"/>
+          </a:xfrm>
+          <a:prstGeom prst="rect">
+            <a:avLst/>
+          </a:prstGeom>
+          <a:noFill/>
+        </p:spPr>
+        <p:txBody>
+          <a:bodyPr wrap="square" lIns="45720" rIns="45720">
+            <a:spAutoFit/>
+          </a:bodyPr>
+          <a:lstStyle/>
+          <a:p>
+            <a:pPr algn="r"/>
+            <a:r>
+              <a:rPr sz="1000" b="0">
+                <a:solidFill>
+                  <a:srgbClr val="5B6770"/>
+                </a:solidFill>
+              </a:rPr>
+              <a:t>188</a:t>
+            </a:r>
+          </a:p>
+        </p:txBody>
+      </p:sp>
+      <p:sp>
+        <p:nvSpPr>
+          <p:cNvPr id="6" name="TextBox 5"/>
+          <p:cNvSpPr txBox="1"/>
+          <p:nvPr/>
+        </p:nvSpPr>
+        <p:spPr>
+          <a:xfrm>
+            <a:off x="640080" y="548640"/>
+            <a:ext cx="10911535" cy="731520"/>
+          </a:xfrm>
+          <a:prstGeom prst="rect">
+            <a:avLst/>
+          </a:prstGeom>
+          <a:noFill/>
+        </p:spPr>
+        <p:txBody>
+          <a:bodyPr wrap="square" lIns="45720" rIns="45720" anchor="ctr">
+            <a:spAutoFit/>
+          </a:bodyPr>
+          <a:lstStyle/>
+          <a:p>
+            <a:r>
+              <a:rPr sz="3000" b="1">
+                <a:solidFill>
+                  <a:srgbClr val="006D77"/>
+                </a:solidFill>
+              </a:rPr>
+              <a:t>Kartları yazarken kural</a:t>
+            </a:r>
+          </a:p>
+        </p:txBody>
+      </p:sp>
+      <p:sp>
+        <p:nvSpPr>
+          <p:cNvPr id="7" name="TextBox 6"/>
+          <p:cNvSpPr txBox="1"/>
+          <p:nvPr/>
+        </p:nvSpPr>
+        <p:spPr>
+          <a:xfrm>
+            <a:off x="640080" y="1325880"/>
+            <a:ext cx="10911535" cy="1219200"/>
+          </a:xfrm>
+          <a:prstGeom prst="rect">
+            <a:avLst/>
+          </a:prstGeom>
+          <a:noFill/>
+        </p:spPr>
+        <p:txBody>
+          <a:bodyPr wrap="square" lIns="45720" rIns="45720">
+            <a:spAutoFit/>
+          </a:bodyPr>
+          <a:lstStyle/>
+          <a:p>
+            <a:pPr>
+              <a:spcAft>
+                <a:spcPts val="300"/>
+              </a:spcAft>
+            </a:pPr>
+            <a:r>
+              <a:rPr sz="2000" b="1">
+                <a:solidFill>
+                  <a:srgbClr val="006D77"/>
+                </a:solidFill>
+              </a:rPr>
+              <a:t>• </a:t>
+            </a:r>
+            <a:r>
+              <a:rPr sz="2000" b="0">
+                <a:solidFill>
+                  <a:srgbClr val="1F2D3A"/>
+                </a:solidFill>
+              </a:rPr>
+              <a:t>Her kart </a:t>
+            </a:r>
+            <a:r>
+              <a:rPr sz="2000" b="1">
+                <a:solidFill>
+                  <a:srgbClr val="1F2D3A"/>
+                </a:solidFill>
+              </a:rPr>
+              <a:t>tekrarlanabilir</a:t>
+            </a:r>
+            <a:r>
+              <a:rPr sz="2000" b="0">
+                <a:solidFill>
+                  <a:srgbClr val="1F2D3A"/>
+                </a:solidFill>
+              </a:rPr>
+              <a:t> olmalı (başkası aynı adımı izleyebilmeli).</a:t>
+            </a:r>
+          </a:p>
+          <a:p>
+            <a:pPr>
+              <a:spcAft>
+                <a:spcPts val="300"/>
+              </a:spcAft>
+            </a:pPr>
+            <a:r>
+              <a:rPr sz="2000" b="1">
+                <a:solidFill>
+                  <a:srgbClr val="006D77"/>
+                </a:solidFill>
+              </a:rPr>
+              <a:t>• </a:t>
+            </a:r>
+            <a:r>
+              <a:rPr sz="2000" b="0">
+                <a:solidFill>
+                  <a:srgbClr val="1F2D3A"/>
+                </a:solidFill>
+              </a:rPr>
+              <a:t>Her kart bir </a:t>
+            </a:r>
+            <a:r>
+              <a:rPr sz="2000" b="1">
+                <a:solidFill>
+                  <a:srgbClr val="1F2D3A"/>
+                </a:solidFill>
+              </a:rPr>
+              <a:t>gereksinime</a:t>
+            </a:r>
+            <a:r>
+              <a:rPr sz="2000" b="0">
+                <a:solidFill>
+                  <a:srgbClr val="1F2D3A"/>
+                </a:solidFill>
+              </a:rPr>
+              <a:t> bağlı (S17).</a:t>
+            </a:r>
+          </a:p>
+          <a:p>
+            <a:pPr>
+              <a:spcAft>
+                <a:spcPts val="300"/>
+              </a:spcAft>
+            </a:pPr>
+            <a:r>
+              <a:rPr sz="2000" b="1">
+                <a:solidFill>
+                  <a:srgbClr val="006D77"/>
+                </a:solidFill>
+              </a:rPr>
+              <a:t>• </a:t>
+            </a:r>
+            <a:r>
+              <a:rPr sz="2000" b="0">
+                <a:solidFill>
+                  <a:srgbClr val="1F2D3A"/>
+                </a:solidFill>
+              </a:rPr>
+              <a:t>"Gözlenen" alanı </a:t>
+            </a:r>
+            <a:r>
+              <a:rPr sz="2000" b="1">
+                <a:solidFill>
+                  <a:srgbClr val="1F2D3A"/>
+                </a:solidFill>
+              </a:rPr>
+              <a:t>kanıtla</a:t>
+            </a:r>
+            <a:r>
+              <a:rPr sz="2000" b="0">
+                <a:solidFill>
+                  <a:srgbClr val="1F2D3A"/>
+                </a:solidFill>
+              </a:rPr>
+              <a:t> dolu.</a:t>
+            </a:r>
+          </a:p>
+        </p:txBody>
+      </p:sp>
+    </p:spTree>
+  </p:cSld>
+  <p:clrMapOvr>
+    <a:masterClrMapping/>
+  </p:clrMapOvr>
+</p:sld>
+</file>
+
+<file path=ppt/slides/slide189.xml><?xml version="1.0" encoding="utf-8"?>
 <p:sld xmlns:a="http://schemas.openxmlformats.org/drawingml/2006/main" xmlns:p="http://schemas.openxmlformats.org/presentationml/2006/main" xmlns:r="http://schemas.openxmlformats.org/officeDocument/2006/relationships">
   <p:cSld>
     <p:bg>
@@ -32900,7 +33100,7 @@
                   <a:srgbClr val="D8F0F2"/>
                 </a:solidFill>
               </a:rPr>
-              <a:t>188</a:t>
+              <a:t>189</a:t>
             </a:r>
           </a:p>
         </p:txBody>
@@ -32935,266 +33135,6 @@
                 </a:solidFill>
               </a:rPr>
               <a:t>Ek C · Sık yapılan hatalar</a:t>
-            </a:r>
-          </a:p>
-        </p:txBody>
-      </p:sp>
-    </p:spTree>
-  </p:cSld>
-  <p:clrMapOvr>
-    <a:masterClrMapping/>
-  </p:clrMapOvr>
-</p:sld>
-</file>
-
-<file path=ppt/slides/slide189.xml><?xml version="1.0" encoding="utf-8"?>
-<p:sld xmlns:a="http://schemas.openxmlformats.org/drawingml/2006/main" xmlns:p="http://schemas.openxmlformats.org/presentationml/2006/main" xmlns:r="http://schemas.openxmlformats.org/officeDocument/2006/relationships">
-  <p:cSld>
-    <p:spTree>
-      <p:nvGrpSpPr>
-        <p:cNvPr id="1" name=""/>
-        <p:cNvGrpSpPr/>
-        <p:nvPr/>
-      </p:nvGrpSpPr>
-      <p:grpSpPr/>
-      <p:pic>
-        <p:nvPicPr>
-          <p:cNvPr id="2" name="Picture 1" descr="rteu_logo_kucuk.jpg"/>
-          <p:cNvPicPr>
-            <a:picLocks noChangeAspect="1"/>
-          </p:cNvPicPr>
-          <p:nvPr/>
-        </p:nvPicPr>
-        <p:blipFill>
-          <a:blip r:embed="rId2"/>
-          <a:stretch>
-            <a:fillRect/>
-          </a:stretch>
-        </p:blipFill>
-        <p:spPr>
-          <a:xfrm>
-            <a:off x="640080" y="164592"/>
-            <a:ext cx="242773" cy="329184"/>
-          </a:xfrm>
-          <a:prstGeom prst="rect">
-            <a:avLst/>
-          </a:prstGeom>
-        </p:spPr>
-      </p:pic>
-      <p:sp>
-        <p:nvSpPr>
-          <p:cNvPr id="3" name="TextBox 2"/>
-          <p:cNvSpPr txBox="1"/>
-          <p:nvPr/>
-        </p:nvSpPr>
-        <p:spPr>
-          <a:xfrm>
-            <a:off x="1051560" y="182880"/>
-            <a:ext cx="7315200" cy="320040"/>
-          </a:xfrm>
-          <a:prstGeom prst="rect">
-            <a:avLst/>
-          </a:prstGeom>
-          <a:noFill/>
-        </p:spPr>
-        <p:txBody>
-          <a:bodyPr wrap="square" lIns="45720" rIns="45720">
-            <a:spAutoFit/>
-          </a:bodyPr>
-          <a:lstStyle/>
-          <a:p>
-            <a:r>
-              <a:rPr sz="1100" b="0">
-                <a:solidFill>
-                  <a:srgbClr val="5B6770"/>
-                </a:solidFill>
-              </a:rPr>
-              <a:t>CEN429 Güvenli Programlama · Hafta 12</a:t>
-            </a:r>
-          </a:p>
-        </p:txBody>
-      </p:sp>
-      <p:sp>
-        <p:nvSpPr>
-          <p:cNvPr id="4" name="TextBox 3"/>
-          <p:cNvSpPr txBox="1"/>
-          <p:nvPr/>
-        </p:nvSpPr>
-        <p:spPr>
-          <a:xfrm>
-            <a:off x="640080" y="6446520"/>
-            <a:ext cx="7315200" cy="274320"/>
-          </a:xfrm>
-          <a:prstGeom prst="rect">
-            <a:avLst/>
-          </a:prstGeom>
-          <a:noFill/>
-        </p:spPr>
-        <p:txBody>
-          <a:bodyPr wrap="square" lIns="45720" rIns="45720">
-            <a:spAutoFit/>
-          </a:bodyPr>
-          <a:lstStyle/>
-          <a:p>
-            <a:r>
-              <a:rPr sz="1000" b="0">
-                <a:solidFill>
-                  <a:srgbClr val="5B6770"/>
-                </a:solidFill>
-              </a:rPr>
-              <a:t>RTEÜ Bilgisayar Mühendisliği · 2026-2027 Güz</a:t>
-            </a:r>
-          </a:p>
-        </p:txBody>
-      </p:sp>
-      <p:sp>
-        <p:nvSpPr>
-          <p:cNvPr id="5" name="TextBox 4"/>
-          <p:cNvSpPr txBox="1"/>
-          <p:nvPr/>
-        </p:nvSpPr>
-        <p:spPr>
-          <a:xfrm>
-            <a:off x="10637215" y="6446520"/>
-            <a:ext cx="914400" cy="274320"/>
-          </a:xfrm>
-          <a:prstGeom prst="rect">
-            <a:avLst/>
-          </a:prstGeom>
-          <a:noFill/>
-        </p:spPr>
-        <p:txBody>
-          <a:bodyPr wrap="square" lIns="45720" rIns="45720">
-            <a:spAutoFit/>
-          </a:bodyPr>
-          <a:lstStyle/>
-          <a:p>
-            <a:pPr algn="r"/>
-            <a:r>
-              <a:rPr sz="1000" b="0">
-                <a:solidFill>
-                  <a:srgbClr val="5B6770"/>
-                </a:solidFill>
-              </a:rPr>
-              <a:t>189</a:t>
-            </a:r>
-          </a:p>
-        </p:txBody>
-      </p:sp>
-      <p:sp>
-        <p:nvSpPr>
-          <p:cNvPr id="6" name="TextBox 5"/>
-          <p:cNvSpPr txBox="1"/>
-          <p:nvPr/>
-        </p:nvSpPr>
-        <p:spPr>
-          <a:xfrm>
-            <a:off x="640080" y="548640"/>
-            <a:ext cx="10911535" cy="731520"/>
-          </a:xfrm>
-          <a:prstGeom prst="rect">
-            <a:avLst/>
-          </a:prstGeom>
-          <a:noFill/>
-        </p:spPr>
-        <p:txBody>
-          <a:bodyPr wrap="square" lIns="45720" rIns="45720" anchor="ctr">
-            <a:spAutoFit/>
-          </a:bodyPr>
-          <a:lstStyle/>
-          <a:p>
-            <a:r>
-              <a:rPr sz="3000" b="1">
-                <a:solidFill>
-                  <a:srgbClr val="006D77"/>
-                </a:solidFill>
-              </a:rPr>
-              <a:t>Hata · plan var, sonuç yok</a:t>
-            </a:r>
-          </a:p>
-        </p:txBody>
-      </p:sp>
-      <p:sp>
-        <p:nvSpPr>
-          <p:cNvPr id="7" name="TextBox 6"/>
-          <p:cNvSpPr txBox="1"/>
-          <p:nvPr/>
-        </p:nvSpPr>
-        <p:spPr>
-          <a:xfrm>
-            <a:off x="640080" y="1325880"/>
-            <a:ext cx="10911535" cy="843280"/>
-          </a:xfrm>
-          <a:prstGeom prst="rect">
-            <a:avLst/>
-          </a:prstGeom>
-          <a:noFill/>
-        </p:spPr>
-        <p:txBody>
-          <a:bodyPr wrap="square" lIns="45720" rIns="45720">
-            <a:spAutoFit/>
-          </a:bodyPr>
-          <a:lstStyle/>
-          <a:p>
-            <a:pPr>
-              <a:spcAft>
-                <a:spcPts val="300"/>
-              </a:spcAft>
-            </a:pPr>
-            <a:r>
-              <a:rPr sz="2000" b="1">
-                <a:solidFill>
-                  <a:srgbClr val="006D77"/>
-                </a:solidFill>
-              </a:rPr>
-              <a:t>• </a:t>
-            </a:r>
-            <a:r>
-              <a:rPr sz="2000" b="0">
-                <a:solidFill>
-                  <a:srgbClr val="1F2D3A"/>
-                </a:solidFill>
-              </a:rPr>
-              <a:t>Finalde (S16) </a:t>
-            </a:r>
-            <a:r>
-              <a:rPr sz="2000" b="1">
-                <a:solidFill>
-                  <a:srgbClr val="1F2D3A"/>
-                </a:solidFill>
-              </a:rPr>
-              <a:t>sonuç</a:t>
-            </a:r>
-            <a:r>
-              <a:rPr sz="2000" b="0">
-                <a:solidFill>
-                  <a:srgbClr val="1F2D3A"/>
-                </a:solidFill>
-              </a:rPr>
-              <a:t> beklenir.</a:t>
-            </a:r>
-          </a:p>
-          <a:p>
-            <a:pPr>
-              <a:spcAft>
-                <a:spcPts val="300"/>
-              </a:spcAft>
-            </a:pPr>
-            <a:r>
-              <a:rPr sz="2000" b="1">
-                <a:solidFill>
-                  <a:srgbClr val="006D77"/>
-                </a:solidFill>
-              </a:rPr>
-              <a:t>• </a:t>
-            </a:r>
-            <a:r>
-              <a:rPr sz="2000" b="0">
-                <a:solidFill>
-                  <a:srgbClr val="1F2D3A"/>
-                </a:solidFill>
-              </a:rPr>
-              <a:t>"Şunu test edeceğiz" yetmez; "şunu test ettik, şu çıktı".</a:t>
             </a:r>
           </a:p>
         </p:txBody>
@@ -33669,7 +33609,7 @@
                   <a:srgbClr val="006D77"/>
                 </a:solidFill>
               </a:rPr>
-              <a:t>Hata · kanıtsız "karşılandı"</a:t>
+              <a:t>Hata · plan var, sonuç yok</a:t>
             </a:r>
           </a:p>
         </p:txBody>
@@ -33715,23 +33655,23 @@
                   <a:srgbClr val="1F2D3A"/>
                 </a:solidFill>
               </a:rPr>
-              <a:t>Uyum matrisinde kanıtsız "karşılandı" = değerlendiricide </a:t>
-            </a:r>
-            <a:r>
-              <a:rPr sz="2000" b="1">
-                <a:solidFill>
-                  <a:srgbClr val="1F2D3A"/>
-                </a:solidFill>
-              </a:rPr>
-              <a:t>karşılanmamış</a:t>
-            </a:r>
-            <a:r>
-              <a:rPr sz="2000" b="0">
-                <a:solidFill>
-                  <a:srgbClr val="1F2D3A"/>
-                </a:solidFill>
-              </a:rPr>
-              <a:t> sayılır.</a:t>
+              <a:t>Finalde (S16) </a:t>
+            </a:r>
+            <a:r>
+              <a:rPr sz="2000" b="1">
+                <a:solidFill>
+                  <a:srgbClr val="1F2D3A"/>
+                </a:solidFill>
+              </a:rPr>
+              <a:t>sonuç</a:t>
+            </a:r>
+            <a:r>
+              <a:rPr sz="2000" b="0">
+                <a:solidFill>
+                  <a:srgbClr val="1F2D3A"/>
+                </a:solidFill>
+              </a:rPr>
+              <a:t> beklenir.</a:t>
             </a:r>
           </a:p>
           <a:p>
@@ -33754,7 +33694,7 @@
                   <a:srgbClr val="1F2D3A"/>
                 </a:solidFill>
               </a:rPr>
-              <a:t>Her satıra kanıt referansı.</a:t>
+              <a:t>"Şunu test edeceğiz" yetmez; "şunu test ettik, şu çıktı".</a:t>
             </a:r>
           </a:p>
         </p:txBody>
@@ -33929,7 +33869,7 @@
                   <a:srgbClr val="006D77"/>
                 </a:solidFill>
               </a:rPr>
-              <a:t>Hata · sürüm tutarsızlığı</a:t>
+              <a:t>Hata · kanıtsız "karşılandı"</a:t>
             </a:r>
           </a:p>
         </p:txBody>
@@ -33975,7 +33915,23 @@
                   <a:srgbClr val="1F2D3A"/>
                 </a:solidFill>
               </a:rPr>
-              <a:t>Kılavuz v1.0, kod v1.1 → değerlendirilen ürün belirsiz.</a:t>
+              <a:t>Uyum matrisinde kanıtsız "karşılandı" = değerlendiricide </a:t>
+            </a:r>
+            <a:r>
+              <a:rPr sz="2000" b="1">
+                <a:solidFill>
+                  <a:srgbClr val="1F2D3A"/>
+                </a:solidFill>
+              </a:rPr>
+              <a:t>karşılanmamış</a:t>
+            </a:r>
+            <a:r>
+              <a:rPr sz="2000" b="0">
+                <a:solidFill>
+                  <a:srgbClr val="1F2D3A"/>
+                </a:solidFill>
+              </a:rPr>
+              <a:t> sayılır.</a:t>
             </a:r>
           </a:p>
           <a:p>
@@ -33998,23 +33954,7 @@
                   <a:srgbClr val="1F2D3A"/>
                 </a:solidFill>
               </a:rPr>
-              <a:t>Sürüm kimliği + özet </a:t>
-            </a:r>
-            <a:r>
-              <a:rPr sz="2000" b="1">
-                <a:solidFill>
-                  <a:srgbClr val="1F2D3A"/>
-                </a:solidFill>
-              </a:rPr>
-              <a:t>tutarlı</a:t>
-            </a:r>
-            <a:r>
-              <a:rPr sz="2000" b="0">
-                <a:solidFill>
-                  <a:srgbClr val="1F2D3A"/>
-                </a:solidFill>
-              </a:rPr>
-              <a:t> olmalı.</a:t>
+              <a:t>Her satıra kanıt referansı.</a:t>
             </a:r>
           </a:p>
         </p:txBody>
@@ -34189,7 +34129,7 @@
                   <a:srgbClr val="006D77"/>
                 </a:solidFill>
               </a:rPr>
-              <a:t>Hata · kalan risk boş</a:t>
+              <a:t>Hata · sürüm tutarsızlığı</a:t>
             </a:r>
           </a:p>
         </p:txBody>
@@ -34235,7 +34175,7 @@
                   <a:srgbClr val="1F2D3A"/>
                 </a:solidFill>
               </a:rPr>
-              <a:t>Hiçbir ürünün kalan riski sıfır değildir.</a:t>
+              <a:t>Kılavuz v1.0, kod v1.1 → değerlendirilen ürün belirsiz.</a:t>
             </a:r>
           </a:p>
           <a:p>
@@ -34258,7 +34198,23 @@
                   <a:srgbClr val="1F2D3A"/>
                 </a:solidFill>
               </a:rPr>
-              <a:t>Boş "kalan risk" = eksik analiz.</a:t>
+              <a:t>Sürüm kimliği + özet </a:t>
+            </a:r>
+            <a:r>
+              <a:rPr sz="2000" b="1">
+                <a:solidFill>
+                  <a:srgbClr val="1F2D3A"/>
+                </a:solidFill>
+              </a:rPr>
+              <a:t>tutarlı</a:t>
+            </a:r>
+            <a:r>
+              <a:rPr sz="2000" b="0">
+                <a:solidFill>
+                  <a:srgbClr val="1F2D3A"/>
+                </a:solidFill>
+              </a:rPr>
+              <a:t> olmalı.</a:t>
             </a:r>
           </a:p>
         </p:txBody>
@@ -34433,7 +34389,7 @@
                   <a:srgbClr val="006D77"/>
                 </a:solidFill>
               </a:rPr>
-              <a:t>Hata · vize geri bildirimini yok saymak</a:t>
+              <a:t>Hata · kalan risk boş</a:t>
             </a:r>
           </a:p>
         </p:txBody>
@@ -34479,7 +34435,7 @@
                   <a:srgbClr val="1F2D3A"/>
                 </a:solidFill>
               </a:rPr>
-              <a:t>Bulgu–aksiyon döngüsü sürecin parçası.</a:t>
+              <a:t>Hiçbir ürünün kalan riski sıfır değildir.</a:t>
             </a:r>
           </a:p>
           <a:p>
@@ -34502,7 +34458,7 @@
                   <a:srgbClr val="1F2D3A"/>
                 </a:solidFill>
               </a:rPr>
-              <a:t>Vize bulguları finalde kapatılmış olmalı.</a:t>
+              <a:t>Boş "kalan risk" = eksik analiz.</a:t>
             </a:r>
           </a:p>
         </p:txBody>
@@ -34677,7 +34633,7 @@
                   <a:srgbClr val="006D77"/>
                 </a:solidFill>
               </a:rPr>
-              <a:t>Hata · depoda gerçek veri</a:t>
+              <a:t>Hata · vize geri bildirimini yok saymak</a:t>
             </a:r>
           </a:p>
         </p:txBody>
@@ -34723,7 +34679,7 @@
                   <a:srgbClr val="1F2D3A"/>
                 </a:solidFill>
               </a:rPr>
-              <a:t>Gerçek sır/kişisel veri = ağır bulgu.</a:t>
+              <a:t>Bulgu–aksiyon döngüsü sürecin parçası.</a:t>
             </a:r>
           </a:p>
           <a:p>
@@ -34746,23 +34702,7 @@
                   <a:srgbClr val="1F2D3A"/>
                 </a:solidFill>
               </a:rPr>
-              <a:t>Her şey </a:t>
-            </a:r>
-            <a:r>
-              <a:rPr sz="2000" b="1">
-                <a:solidFill>
-                  <a:srgbClr val="1F2D3A"/>
-                </a:solidFill>
-              </a:rPr>
-              <a:t>sentetik</a:t>
-            </a:r>
-            <a:r>
-              <a:rPr sz="2000" b="0">
-                <a:solidFill>
-                  <a:srgbClr val="1F2D3A"/>
-                </a:solidFill>
-              </a:rPr>
-              <a:t>.</a:t>
+              <a:t>Vize bulguları finalde kapatılmış olmalı.</a:t>
             </a:r>
           </a:p>
         </p:txBody>
@@ -34905,6 +34845,266 @@
                 </a:solidFill>
               </a:rPr>
               <a:t>195</a:t>
+            </a:r>
+          </a:p>
+        </p:txBody>
+      </p:sp>
+      <p:sp>
+        <p:nvSpPr>
+          <p:cNvPr id="6" name="TextBox 5"/>
+          <p:cNvSpPr txBox="1"/>
+          <p:nvPr/>
+        </p:nvSpPr>
+        <p:spPr>
+          <a:xfrm>
+            <a:off x="640080" y="548640"/>
+            <a:ext cx="10911535" cy="731520"/>
+          </a:xfrm>
+          <a:prstGeom prst="rect">
+            <a:avLst/>
+          </a:prstGeom>
+          <a:noFill/>
+        </p:spPr>
+        <p:txBody>
+          <a:bodyPr wrap="square" lIns="45720" rIns="45720" anchor="ctr">
+            <a:spAutoFit/>
+          </a:bodyPr>
+          <a:lstStyle/>
+          <a:p>
+            <a:r>
+              <a:rPr sz="3000" b="1">
+                <a:solidFill>
+                  <a:srgbClr val="006D77"/>
+                </a:solidFill>
+              </a:rPr>
+              <a:t>Hata · depoda gerçek veri</a:t>
+            </a:r>
+          </a:p>
+        </p:txBody>
+      </p:sp>
+      <p:sp>
+        <p:nvSpPr>
+          <p:cNvPr id="7" name="TextBox 6"/>
+          <p:cNvSpPr txBox="1"/>
+          <p:nvPr/>
+        </p:nvSpPr>
+        <p:spPr>
+          <a:xfrm>
+            <a:off x="640080" y="1325880"/>
+            <a:ext cx="10911535" cy="843280"/>
+          </a:xfrm>
+          <a:prstGeom prst="rect">
+            <a:avLst/>
+          </a:prstGeom>
+          <a:noFill/>
+        </p:spPr>
+        <p:txBody>
+          <a:bodyPr wrap="square" lIns="45720" rIns="45720">
+            <a:spAutoFit/>
+          </a:bodyPr>
+          <a:lstStyle/>
+          <a:p>
+            <a:pPr>
+              <a:spcAft>
+                <a:spcPts val="300"/>
+              </a:spcAft>
+            </a:pPr>
+            <a:r>
+              <a:rPr sz="2000" b="1">
+                <a:solidFill>
+                  <a:srgbClr val="006D77"/>
+                </a:solidFill>
+              </a:rPr>
+              <a:t>• </a:t>
+            </a:r>
+            <a:r>
+              <a:rPr sz="2000" b="0">
+                <a:solidFill>
+                  <a:srgbClr val="1F2D3A"/>
+                </a:solidFill>
+              </a:rPr>
+              <a:t>Gerçek sır/kişisel veri = ağır bulgu.</a:t>
+            </a:r>
+          </a:p>
+          <a:p>
+            <a:pPr>
+              <a:spcAft>
+                <a:spcPts val="300"/>
+              </a:spcAft>
+            </a:pPr>
+            <a:r>
+              <a:rPr sz="2000" b="1">
+                <a:solidFill>
+                  <a:srgbClr val="006D77"/>
+                </a:solidFill>
+              </a:rPr>
+              <a:t>• </a:t>
+            </a:r>
+            <a:r>
+              <a:rPr sz="2000" b="0">
+                <a:solidFill>
+                  <a:srgbClr val="1F2D3A"/>
+                </a:solidFill>
+              </a:rPr>
+              <a:t>Her şey </a:t>
+            </a:r>
+            <a:r>
+              <a:rPr sz="2000" b="1">
+                <a:solidFill>
+                  <a:srgbClr val="1F2D3A"/>
+                </a:solidFill>
+              </a:rPr>
+              <a:t>sentetik</a:t>
+            </a:r>
+            <a:r>
+              <a:rPr sz="2000" b="0">
+                <a:solidFill>
+                  <a:srgbClr val="1F2D3A"/>
+                </a:solidFill>
+              </a:rPr>
+              <a:t>.</a:t>
+            </a:r>
+          </a:p>
+        </p:txBody>
+      </p:sp>
+    </p:spTree>
+  </p:cSld>
+  <p:clrMapOvr>
+    <a:masterClrMapping/>
+  </p:clrMapOvr>
+</p:sld>
+</file>
+
+<file path=ppt/slides/slide196.xml><?xml version="1.0" encoding="utf-8"?>
+<p:sld xmlns:a="http://schemas.openxmlformats.org/drawingml/2006/main" xmlns:p="http://schemas.openxmlformats.org/presentationml/2006/main" xmlns:r="http://schemas.openxmlformats.org/officeDocument/2006/relationships">
+  <p:cSld>
+    <p:spTree>
+      <p:nvGrpSpPr>
+        <p:cNvPr id="1" name=""/>
+        <p:cNvGrpSpPr/>
+        <p:nvPr/>
+      </p:nvGrpSpPr>
+      <p:grpSpPr/>
+      <p:pic>
+        <p:nvPicPr>
+          <p:cNvPr id="2" name="Picture 1" descr="rteu_logo_kucuk.jpg"/>
+          <p:cNvPicPr>
+            <a:picLocks noChangeAspect="1"/>
+          </p:cNvPicPr>
+          <p:nvPr/>
+        </p:nvPicPr>
+        <p:blipFill>
+          <a:blip r:embed="rId2"/>
+          <a:stretch>
+            <a:fillRect/>
+          </a:stretch>
+        </p:blipFill>
+        <p:spPr>
+          <a:xfrm>
+            <a:off x="640080" y="164592"/>
+            <a:ext cx="242773" cy="329184"/>
+          </a:xfrm>
+          <a:prstGeom prst="rect">
+            <a:avLst/>
+          </a:prstGeom>
+        </p:spPr>
+      </p:pic>
+      <p:sp>
+        <p:nvSpPr>
+          <p:cNvPr id="3" name="TextBox 2"/>
+          <p:cNvSpPr txBox="1"/>
+          <p:nvPr/>
+        </p:nvSpPr>
+        <p:spPr>
+          <a:xfrm>
+            <a:off x="1051560" y="182880"/>
+            <a:ext cx="7315200" cy="320040"/>
+          </a:xfrm>
+          <a:prstGeom prst="rect">
+            <a:avLst/>
+          </a:prstGeom>
+          <a:noFill/>
+        </p:spPr>
+        <p:txBody>
+          <a:bodyPr wrap="square" lIns="45720" rIns="45720">
+            <a:spAutoFit/>
+          </a:bodyPr>
+          <a:lstStyle/>
+          <a:p>
+            <a:r>
+              <a:rPr sz="1100" b="0">
+                <a:solidFill>
+                  <a:srgbClr val="5B6770"/>
+                </a:solidFill>
+              </a:rPr>
+              <a:t>CEN429 Güvenli Programlama · Hafta 12</a:t>
+            </a:r>
+          </a:p>
+        </p:txBody>
+      </p:sp>
+      <p:sp>
+        <p:nvSpPr>
+          <p:cNvPr id="4" name="TextBox 3"/>
+          <p:cNvSpPr txBox="1"/>
+          <p:nvPr/>
+        </p:nvSpPr>
+        <p:spPr>
+          <a:xfrm>
+            <a:off x="640080" y="6446520"/>
+            <a:ext cx="7315200" cy="274320"/>
+          </a:xfrm>
+          <a:prstGeom prst="rect">
+            <a:avLst/>
+          </a:prstGeom>
+          <a:noFill/>
+        </p:spPr>
+        <p:txBody>
+          <a:bodyPr wrap="square" lIns="45720" rIns="45720">
+            <a:spAutoFit/>
+          </a:bodyPr>
+          <a:lstStyle/>
+          <a:p>
+            <a:r>
+              <a:rPr sz="1000" b="0">
+                <a:solidFill>
+                  <a:srgbClr val="5B6770"/>
+                </a:solidFill>
+              </a:rPr>
+              <a:t>RTEÜ Bilgisayar Mühendisliği · 2026-2027 Güz</a:t>
+            </a:r>
+          </a:p>
+        </p:txBody>
+      </p:sp>
+      <p:sp>
+        <p:nvSpPr>
+          <p:cNvPr id="5" name="TextBox 4"/>
+          <p:cNvSpPr txBox="1"/>
+          <p:nvPr/>
+        </p:nvSpPr>
+        <p:spPr>
+          <a:xfrm>
+            <a:off x="10637215" y="6446520"/>
+            <a:ext cx="914400" cy="274320"/>
+          </a:xfrm>
+          <a:prstGeom prst="rect">
+            <a:avLst/>
+          </a:prstGeom>
+          <a:noFill/>
+        </p:spPr>
+        <p:txBody>
+          <a:bodyPr wrap="square" lIns="45720" rIns="45720">
+            <a:spAutoFit/>
+          </a:bodyPr>
+          <a:lstStyle/>
+          <a:p>
+            <a:pPr algn="r"/>
+            <a:r>
+              <a:rPr sz="1000" b="0">
+                <a:solidFill>
+                  <a:srgbClr val="5B6770"/>
+                </a:solidFill>
+              </a:rPr>
+              <a:t>196</a:t>
             </a:r>
           </a:p>
         </p:txBody>

--- a/docs/week-12/cen429-week-12-sunum.tr.pptx
+++ b/docs/week-12/cen429-week-12-sunum.tr.pptx
@@ -56664,7 +56664,7 @@
                   <a:srgbClr val="1F2D3A"/>
                 </a:solidFill>
               </a:rPr>
-              <a:t>4. bölümde ayrıntılı planlayacağız.</a:t>
+              <a:t>5. bölümde ayrıntılı planlayacağız.</a:t>
             </a:r>
           </a:p>
         </p:txBody>
